--- a/Quickbites Analysis.pptx
+++ b/Quickbites Analysis.pptx
@@ -1404,7 +1404,7 @@
     <p:bg>
       <p:bgPr>
         <a:solidFill>
-          <a:srgbClr val="3B2F2F"/>
+          <a:srgbClr val="1B2A41"/>
         </a:solidFill>
         <a:effectLst/>
       </p:bgPr>
@@ -1438,7 +1438,7 @@
             <a:avLst/>
           </a:prstGeom>
           <a:solidFill>
-            <a:srgbClr val="B85042"/>
+            <a:srgbClr val="2F6690"/>
           </a:solidFill>
           <a:ln/>
         </p:spPr>
@@ -1465,7 +1465,7 @@
             <a:avLst/>
           </a:prstGeom>
           <a:solidFill>
-            <a:srgbClr val="B85042"/>
+            <a:srgbClr val="2F6690"/>
           </a:solidFill>
           <a:ln/>
         </p:spPr>
@@ -1530,9 +1530,9 @@
                 <a:solidFill>
                   <a:srgbClr val="FFFFFF"/>
                 </a:solidFill>
-                <a:latin typeface="Georgia" pitchFamily="34" charset="0"/>
-                <a:ea typeface="Georgia" pitchFamily="34" charset="-122"/>
-                <a:cs typeface="Georgia" pitchFamily="34" charset="-120"/>
+                <a:latin typeface="Calibri" pitchFamily="34" charset="0"/>
+                <a:ea typeface="Calibri" pitchFamily="34" charset="-122"/>
+                <a:cs typeface="Calibri" pitchFamily="34" charset="-120"/>
               </a:rPr>
               <a:t>QuickBite Ghost Kitchen Analysis</a:t>
             </a:r>
@@ -1567,7 +1567,7 @@
             <a:r>
               <a:rPr lang="en-US" sz="1600" i="1" dirty="0">
                 <a:solidFill>
-                  <a:srgbClr val="A7BEAE"/>
+                  <a:srgbClr val="A9C4E2"/>
                 </a:solidFill>
                 <a:latin typeface="Calibri" pitchFamily="34" charset="0"/>
                 <a:ea typeface="Calibri" pitchFamily="34" charset="-122"/>
@@ -1606,7 +1606,7 @@
             <a:r>
               <a:rPr lang="en-US" sz="1200" dirty="0">
                 <a:solidFill>
-                  <a:srgbClr val="7A7A7A"/>
+                  <a:srgbClr val="5F6B7A"/>
                 </a:solidFill>
                 <a:latin typeface="Calibri" pitchFamily="34" charset="0"/>
                 <a:ea typeface="Calibri" pitchFamily="34" charset="-122"/>
@@ -1632,7 +1632,7 @@
     <p:bg>
       <p:bgPr>
         <a:solidFill>
-          <a:srgbClr val="FAF8F5"/>
+          <a:srgbClr val="FFFFFF"/>
         </a:solidFill>
         <a:effectLst/>
       </p:bgPr>
@@ -1666,7 +1666,7 @@
             <a:avLst/>
           </a:prstGeom>
           <a:solidFill>
-            <a:srgbClr val="3B2F2F"/>
+            <a:srgbClr val="1B2A41"/>
           </a:solidFill>
           <a:ln/>
         </p:spPr>
@@ -1731,9 +1731,9 @@
                 <a:solidFill>
                   <a:srgbClr val="FFFFFF"/>
                 </a:solidFill>
-                <a:latin typeface="Georgia" pitchFamily="34" charset="0"/>
-                <a:ea typeface="Georgia" pitchFamily="34" charset="-122"/>
-                <a:cs typeface="Georgia" pitchFamily="34" charset="-120"/>
+                <a:latin typeface="Calibri" pitchFamily="34" charset="0"/>
+                <a:ea typeface="Calibri" pitchFamily="34" charset="-122"/>
+                <a:cs typeface="Calibri" pitchFamily="34" charset="-120"/>
               </a:rPr>
               <a:t>Weather Impact on Operations</a:t>
             </a:r>
@@ -1838,11 +1838,11 @@
             <a:r>
               <a:rPr lang="en-US" sz="2800" b="1" dirty="0">
                 <a:solidFill>
-                  <a:srgbClr val="C0392B"/>
+                  <a:srgbClr val="D9472B"/>
                 </a:solidFill>
-                <a:latin typeface="Georgia" pitchFamily="34" charset="0"/>
-                <a:ea typeface="Georgia" pitchFamily="34" charset="-122"/>
-                <a:cs typeface="Georgia" pitchFamily="34" charset="-120"/>
+                <a:latin typeface="Calibri" pitchFamily="34" charset="0"/>
+                <a:ea typeface="Calibri" pitchFamily="34" charset="-122"/>
+                <a:cs typeface="Calibri" pitchFamily="34" charset="-120"/>
               </a:rPr>
               <a:t>-27%</a:t>
             </a:r>
@@ -1877,7 +1877,7 @@
             <a:r>
               <a:rPr lang="en-US" sz="1000" dirty="0">
                 <a:solidFill>
-                  <a:srgbClr val="7A7A7A"/>
+                  <a:srgbClr val="5F6B7A"/>
                 </a:solidFill>
                 <a:latin typeface="Calibri" pitchFamily="34" charset="0"/>
                 <a:ea typeface="Calibri" pitchFamily="34" charset="-122"/>
@@ -1894,7 +1894,7 @@
             <a:r>
               <a:rPr lang="en-US" sz="1000" dirty="0">
                 <a:solidFill>
-                  <a:srgbClr val="7A7A7A"/>
+                  <a:srgbClr val="5F6B7A"/>
                 </a:solidFill>
                 <a:latin typeface="Calibri" pitchFamily="34" charset="0"/>
                 <a:ea typeface="Calibri" pitchFamily="34" charset="-122"/>
@@ -1967,11 +1967,11 @@
             <a:r>
               <a:rPr lang="en-US" sz="2800" b="1" dirty="0">
                 <a:solidFill>
-                  <a:srgbClr val="C0392B"/>
+                  <a:srgbClr val="D9472B"/>
                 </a:solidFill>
-                <a:latin typeface="Georgia" pitchFamily="34" charset="0"/>
-                <a:ea typeface="Georgia" pitchFamily="34" charset="-122"/>
-                <a:cs typeface="Georgia" pitchFamily="34" charset="-120"/>
+                <a:latin typeface="Calibri" pitchFamily="34" charset="0"/>
+                <a:ea typeface="Calibri" pitchFamily="34" charset="-122"/>
+                <a:cs typeface="Calibri" pitchFamily="34" charset="-120"/>
               </a:rPr>
               <a:t>+30%</a:t>
             </a:r>
@@ -2006,7 +2006,7 @@
             <a:r>
               <a:rPr lang="en-US" sz="1000" dirty="0">
                 <a:solidFill>
-                  <a:srgbClr val="7A7A7A"/>
+                  <a:srgbClr val="5F6B7A"/>
                 </a:solidFill>
                 <a:latin typeface="Calibri" pitchFamily="34" charset="0"/>
                 <a:ea typeface="Calibri" pitchFamily="34" charset="-122"/>
@@ -2023,7 +2023,7 @@
             <a:r>
               <a:rPr lang="en-US" sz="1000" dirty="0">
                 <a:solidFill>
-                  <a:srgbClr val="7A7A7A"/>
+                  <a:srgbClr val="5F6B7A"/>
                 </a:solidFill>
                 <a:latin typeface="Calibri" pitchFamily="34" charset="0"/>
                 <a:ea typeface="Calibri" pitchFamily="34" charset="-122"/>
@@ -2096,11 +2096,11 @@
             <a:r>
               <a:rPr lang="en-US" sz="2800" b="1" dirty="0">
                 <a:solidFill>
-                  <a:srgbClr val="C0392B"/>
+                  <a:srgbClr val="D9472B"/>
                 </a:solidFill>
-                <a:latin typeface="Georgia" pitchFamily="34" charset="0"/>
-                <a:ea typeface="Georgia" pitchFamily="34" charset="-122"/>
-                <a:cs typeface="Georgia" pitchFamily="34" charset="-120"/>
+                <a:latin typeface="Calibri" pitchFamily="34" charset="0"/>
+                <a:ea typeface="Calibri" pitchFamily="34" charset="-122"/>
+                <a:cs typeface="Calibri" pitchFamily="34" charset="-120"/>
               </a:rPr>
               <a:t>-27%</a:t>
             </a:r>
@@ -2135,7 +2135,7 @@
             <a:r>
               <a:rPr lang="en-US" sz="1000" dirty="0">
                 <a:solidFill>
-                  <a:srgbClr val="7A7A7A"/>
+                  <a:srgbClr val="5F6B7A"/>
                 </a:solidFill>
                 <a:latin typeface="Calibri" pitchFamily="34" charset="0"/>
                 <a:ea typeface="Calibri" pitchFamily="34" charset="-122"/>
@@ -2152,7 +2152,7 @@
             <a:r>
               <a:rPr lang="en-US" sz="1000" dirty="0">
                 <a:solidFill>
-                  <a:srgbClr val="7A7A7A"/>
+                  <a:srgbClr val="5F6B7A"/>
                 </a:solidFill>
                 <a:latin typeface="Calibri" pitchFamily="34" charset="0"/>
                 <a:ea typeface="Calibri" pitchFamily="34" charset="-122"/>
@@ -2213,7 +2213,7 @@
             <a:avLst/>
           </a:prstGeom>
           <a:solidFill>
-            <a:srgbClr val="B85042"/>
+            <a:srgbClr val="2F6690"/>
           </a:solidFill>
           <a:ln/>
         </p:spPr>
@@ -2252,7 +2252,7 @@
             <a:r>
               <a:rPr lang="en-US" sz="1200" dirty="0">
                 <a:solidFill>
-                  <a:srgbClr val="2D2D2D"/>
+                  <a:srgbClr val="1F2A37"/>
                 </a:solidFill>
                 <a:latin typeface="Calibri" pitchFamily="34" charset="0"/>
                 <a:ea typeface="Calibri" pitchFamily="34" charset="-122"/>
@@ -2291,11 +2291,11 @@
             <a:r>
               <a:rPr lang="en-US" sz="1400" b="1" dirty="0">
                 <a:solidFill>
-                  <a:srgbClr val="2D2D2D"/>
+                  <a:srgbClr val="1F2A37"/>
                 </a:solidFill>
-                <a:latin typeface="Georgia" pitchFamily="34" charset="0"/>
-                <a:ea typeface="Georgia" pitchFamily="34" charset="-122"/>
-                <a:cs typeface="Georgia" pitchFamily="34" charset="-120"/>
+                <a:latin typeface="Calibri" pitchFamily="34" charset="0"/>
+                <a:ea typeface="Calibri" pitchFamily="34" charset="-122"/>
+                <a:cs typeface="Calibri" pitchFamily="34" charset="-120"/>
               </a:rPr>
               <a:t>Weather Recommendations:</a:t>
             </a:r>
@@ -2331,7 +2331,7 @@
             <a:r>
               <a:rPr lang="en-US" sz="1100" dirty="0">
                 <a:solidFill>
-                  <a:srgbClr val="2D2D2D"/>
+                  <a:srgbClr val="1F2A37"/>
                 </a:solidFill>
                 <a:latin typeface="Calibri" pitchFamily="34" charset="0"/>
                 <a:ea typeface="Calibri" pitchFamily="34" charset="-122"/>
@@ -2349,7 +2349,7 @@
             <a:r>
               <a:rPr lang="en-US" sz="1100" dirty="0">
                 <a:solidFill>
-                  <a:srgbClr val="2D2D2D"/>
+                  <a:srgbClr val="1F2A37"/>
                 </a:solidFill>
                 <a:latin typeface="Calibri" pitchFamily="34" charset="0"/>
                 <a:ea typeface="Calibri" pitchFamily="34" charset="-122"/>
@@ -2367,7 +2367,7 @@
             <a:r>
               <a:rPr lang="en-US" sz="1100" dirty="0">
                 <a:solidFill>
-                  <a:srgbClr val="2D2D2D"/>
+                  <a:srgbClr val="1F2A37"/>
                 </a:solidFill>
                 <a:latin typeface="Calibri" pitchFamily="34" charset="0"/>
                 <a:ea typeface="Calibri" pitchFamily="34" charset="-122"/>
@@ -2393,7 +2393,7 @@
     <p:bg>
       <p:bgPr>
         <a:solidFill>
-          <a:srgbClr val="FAF8F5"/>
+          <a:srgbClr val="FFFFFF"/>
         </a:solidFill>
         <a:effectLst/>
       </p:bgPr>
@@ -2439,11 +2439,11 @@
             <a:r>
               <a:rPr lang="en-US" sz="3200" b="1" dirty="0">
                 <a:solidFill>
-                  <a:srgbClr val="2D2D2D"/>
+                  <a:srgbClr val="1F2A37"/>
                 </a:solidFill>
-                <a:latin typeface="Georgia" pitchFamily="34" charset="0"/>
-                <a:ea typeface="Georgia" pitchFamily="34" charset="-122"/>
-                <a:cs typeface="Georgia" pitchFamily="34" charset="-120"/>
+                <a:latin typeface="Calibri" pitchFamily="34" charset="0"/>
+                <a:ea typeface="Calibri" pitchFamily="34" charset="-122"/>
+                <a:cs typeface="Calibri" pitchFamily="34" charset="-120"/>
               </a:rPr>
               <a:t>Executive Summary</a:t>
             </a:r>
@@ -2478,7 +2478,7 @@
             <a:r>
               <a:rPr lang="en-US" sz="1300" dirty="0">
                 <a:solidFill>
-                  <a:srgbClr val="7A7A7A"/>
+                  <a:srgbClr val="5F6B7A"/>
                 </a:solidFill>
                 <a:latin typeface="Calibri" pitchFamily="34" charset="0"/>
                 <a:ea typeface="Calibri" pitchFamily="34" charset="-122"/>
@@ -2539,7 +2539,7 @@
             <a:avLst/>
           </a:prstGeom>
           <a:solidFill>
-            <a:srgbClr val="B85042"/>
+            <a:srgbClr val="2F6690"/>
           </a:solidFill>
           <a:ln/>
         </p:spPr>
@@ -2578,11 +2578,11 @@
             <a:r>
               <a:rPr lang="en-US" sz="1600" b="1" dirty="0">
                 <a:solidFill>
-                  <a:srgbClr val="2D2D2D"/>
+                  <a:srgbClr val="1F2A37"/>
                 </a:solidFill>
-                <a:latin typeface="Georgia" pitchFamily="34" charset="0"/>
-                <a:ea typeface="Georgia" pitchFamily="34" charset="-122"/>
-                <a:cs typeface="Georgia" pitchFamily="34" charset="-120"/>
+                <a:latin typeface="Calibri" pitchFamily="34" charset="0"/>
+                <a:ea typeface="Calibri" pitchFamily="34" charset="-122"/>
+                <a:cs typeface="Calibri" pitchFamily="34" charset="-120"/>
               </a:rPr>
               <a:t>Expand Selectively</a:t>
             </a:r>
@@ -2617,7 +2617,7 @@
             <a:r>
               <a:rPr lang="en-US" sz="1200" dirty="0">
                 <a:solidFill>
-                  <a:srgbClr val="7A7A7A"/>
+                  <a:srgbClr val="5F6B7A"/>
                 </a:solidFill>
                 <a:latin typeface="Calibri" pitchFamily="34" charset="0"/>
                 <a:ea typeface="Calibri" pitchFamily="34" charset="-122"/>
@@ -2678,7 +2678,7 @@
             <a:avLst/>
           </a:prstGeom>
           <a:solidFill>
-            <a:srgbClr val="B85042"/>
+            <a:srgbClr val="2F6690"/>
           </a:solidFill>
           <a:ln/>
         </p:spPr>
@@ -2717,11 +2717,11 @@
             <a:r>
               <a:rPr lang="en-US" sz="1600" b="1" dirty="0">
                 <a:solidFill>
-                  <a:srgbClr val="2D2D2D"/>
+                  <a:srgbClr val="1F2A37"/>
                 </a:solidFill>
-                <a:latin typeface="Georgia" pitchFamily="34" charset="0"/>
-                <a:ea typeface="Georgia" pitchFamily="34" charset="-122"/>
-                <a:cs typeface="Georgia" pitchFamily="34" charset="-120"/>
+                <a:latin typeface="Calibri" pitchFamily="34" charset="0"/>
+                <a:ea typeface="Calibri" pitchFamily="34" charset="-122"/>
+                <a:cs typeface="Calibri" pitchFamily="34" charset="-120"/>
               </a:rPr>
               <a:t>Keep Eastleigh Open</a:t>
             </a:r>
@@ -2756,7 +2756,7 @@
             <a:r>
               <a:rPr lang="en-US" sz="1200" dirty="0">
                 <a:solidFill>
-                  <a:srgbClr val="7A7A7A"/>
+                  <a:srgbClr val="5F6B7A"/>
                 </a:solidFill>
                 <a:latin typeface="Calibri" pitchFamily="34" charset="0"/>
                 <a:ea typeface="Calibri" pitchFamily="34" charset="-122"/>
@@ -2817,7 +2817,7 @@
             <a:avLst/>
           </a:prstGeom>
           <a:solidFill>
-            <a:srgbClr val="B85042"/>
+            <a:srgbClr val="2F6690"/>
           </a:solidFill>
           <a:ln/>
         </p:spPr>
@@ -2856,11 +2856,11 @@
             <a:r>
               <a:rPr lang="en-US" sz="1600" b="1" dirty="0">
                 <a:solidFill>
-                  <a:srgbClr val="2D2D2D"/>
+                  <a:srgbClr val="1F2A37"/>
                 </a:solidFill>
-                <a:latin typeface="Georgia" pitchFamily="34" charset="0"/>
-                <a:ea typeface="Georgia" pitchFamily="34" charset="-122"/>
-                <a:cs typeface="Georgia" pitchFamily="34" charset="-120"/>
+                <a:latin typeface="Calibri" pitchFamily="34" charset="0"/>
+                <a:ea typeface="Calibri" pitchFamily="34" charset="-122"/>
+                <a:cs typeface="Calibri" pitchFamily="34" charset="-120"/>
               </a:rPr>
               <a:t>Optimize the Menu</a:t>
             </a:r>
@@ -2895,7 +2895,7 @@
             <a:r>
               <a:rPr lang="en-US" sz="1200" dirty="0">
                 <a:solidFill>
-                  <a:srgbClr val="7A7A7A"/>
+                  <a:srgbClr val="5F6B7A"/>
                 </a:solidFill>
                 <a:latin typeface="Calibri" pitchFamily="34" charset="0"/>
                 <a:ea typeface="Calibri" pitchFamily="34" charset="-122"/>
@@ -2921,7 +2921,7 @@
     <p:bg>
       <p:bgPr>
         <a:solidFill>
-          <a:srgbClr val="FAF8F5"/>
+          <a:srgbClr val="FFFFFF"/>
         </a:solidFill>
         <a:effectLst/>
       </p:bgPr>
@@ -2955,7 +2955,7 @@
             <a:avLst/>
           </a:prstGeom>
           <a:solidFill>
-            <a:srgbClr val="3B2F2F"/>
+            <a:srgbClr val="1B2A41"/>
           </a:solidFill>
           <a:ln/>
         </p:spPr>
@@ -3020,9 +3020,9 @@
                 <a:solidFill>
                   <a:srgbClr val="FFFFFF"/>
                 </a:solidFill>
-                <a:latin typeface="Georgia" pitchFamily="34" charset="0"/>
-                <a:ea typeface="Georgia" pitchFamily="34" charset="-122"/>
-                <a:cs typeface="Georgia" pitchFamily="34" charset="-120"/>
+                <a:latin typeface="Calibri" pitchFamily="34" charset="0"/>
+                <a:ea typeface="Calibri" pitchFamily="34" charset="-122"/>
+                <a:cs typeface="Calibri" pitchFamily="34" charset="-120"/>
               </a:rPr>
               <a:t>Q1: Should QuickBite Expand?</a:t>
             </a:r>
@@ -3057,11 +3057,11 @@
             <a:r>
               <a:rPr lang="en-US" sz="1800" b="1" dirty="0">
                 <a:solidFill>
-                  <a:srgbClr val="2D2D2D"/>
+                  <a:srgbClr val="1F2A37"/>
                 </a:solidFill>
-                <a:latin typeface="Georgia" pitchFamily="34" charset="0"/>
-                <a:ea typeface="Georgia" pitchFamily="34" charset="-122"/>
-                <a:cs typeface="Georgia" pitchFamily="34" charset="-120"/>
+                <a:latin typeface="Calibri" pitchFamily="34" charset="0"/>
+                <a:ea typeface="Calibri" pitchFamily="34" charset="-122"/>
+                <a:cs typeface="Calibri" pitchFamily="34" charset="-120"/>
               </a:rPr>
               <a:t>All Three Ghost Kitchens Are Profitable Over 6 Months</a:t>
             </a:r>
@@ -3158,7 +3158,7 @@
                   <a:tcPr>
                     <a:lnL w="6350" cap="flat" cmpd="sng" algn="ctr">
                       <a:solidFill>
-                        <a:srgbClr val="DDDDDD"/>
+                        <a:srgbClr val="D8DEE6"/>
                       </a:solidFill>
                       <a:prstDash val="solid"/>
                       <a:round/>
@@ -3167,7 +3167,7 @@
                     </a:lnL>
                     <a:lnR w="6350" cap="flat" cmpd="sng" algn="ctr">
                       <a:solidFill>
-                        <a:srgbClr val="DDDDDD"/>
+                        <a:srgbClr val="D8DEE6"/>
                       </a:solidFill>
                       <a:prstDash val="solid"/>
                       <a:round/>
@@ -3176,7 +3176,7 @@
                     </a:lnR>
                     <a:lnT w="6350" cap="flat" cmpd="sng" algn="ctr">
                       <a:solidFill>
-                        <a:srgbClr val="DDDDDD"/>
+                        <a:srgbClr val="D8DEE6"/>
                       </a:solidFill>
                       <a:prstDash val="solid"/>
                       <a:round/>
@@ -3185,7 +3185,7 @@
                     </a:lnT>
                     <a:lnB w="6350" cap="flat" cmpd="sng" algn="ctr">
                       <a:solidFill>
-                        <a:srgbClr val="DDDDDD"/>
+                        <a:srgbClr val="D8DEE6"/>
                       </a:solidFill>
                       <a:prstDash val="solid"/>
                       <a:round/>
@@ -3193,7 +3193,7 @@
                       <a:tailEnd type="none" w="med" len="med"/>
                     </a:lnB>
                     <a:solidFill>
-                      <a:srgbClr val="B85042"/>
+                      <a:srgbClr val="2F6690"/>
                     </a:solidFill>
                   </a:tcPr>
                 </a:tc>
@@ -3226,7 +3226,7 @@
                   <a:tcPr>
                     <a:lnL w="6350" cap="flat" cmpd="sng" algn="ctr">
                       <a:solidFill>
-                        <a:srgbClr val="DDDDDD"/>
+                        <a:srgbClr val="D8DEE6"/>
                       </a:solidFill>
                       <a:prstDash val="solid"/>
                       <a:round/>
@@ -3235,7 +3235,7 @@
                     </a:lnL>
                     <a:lnR w="6350" cap="flat" cmpd="sng" algn="ctr">
                       <a:solidFill>
-                        <a:srgbClr val="DDDDDD"/>
+                        <a:srgbClr val="D8DEE6"/>
                       </a:solidFill>
                       <a:prstDash val="solid"/>
                       <a:round/>
@@ -3244,7 +3244,7 @@
                     </a:lnR>
                     <a:lnT w="6350" cap="flat" cmpd="sng" algn="ctr">
                       <a:solidFill>
-                        <a:srgbClr val="DDDDDD"/>
+                        <a:srgbClr val="D8DEE6"/>
                       </a:solidFill>
                       <a:prstDash val="solid"/>
                       <a:round/>
@@ -3253,7 +3253,7 @@
                     </a:lnT>
                     <a:lnB w="6350" cap="flat" cmpd="sng" algn="ctr">
                       <a:solidFill>
-                        <a:srgbClr val="DDDDDD"/>
+                        <a:srgbClr val="D8DEE6"/>
                       </a:solidFill>
                       <a:prstDash val="solid"/>
                       <a:round/>
@@ -3261,7 +3261,7 @@
                       <a:tailEnd type="none" w="med" len="med"/>
                     </a:lnB>
                     <a:solidFill>
-                      <a:srgbClr val="B85042"/>
+                      <a:srgbClr val="2F6690"/>
                     </a:solidFill>
                   </a:tcPr>
                 </a:tc>
@@ -3294,7 +3294,7 @@
                   <a:tcPr>
                     <a:lnL w="6350" cap="flat" cmpd="sng" algn="ctr">
                       <a:solidFill>
-                        <a:srgbClr val="DDDDDD"/>
+                        <a:srgbClr val="D8DEE6"/>
                       </a:solidFill>
                       <a:prstDash val="solid"/>
                       <a:round/>
@@ -3303,7 +3303,7 @@
                     </a:lnL>
                     <a:lnR w="6350" cap="flat" cmpd="sng" algn="ctr">
                       <a:solidFill>
-                        <a:srgbClr val="DDDDDD"/>
+                        <a:srgbClr val="D8DEE6"/>
                       </a:solidFill>
                       <a:prstDash val="solid"/>
                       <a:round/>
@@ -3312,7 +3312,7 @@
                     </a:lnR>
                     <a:lnT w="6350" cap="flat" cmpd="sng" algn="ctr">
                       <a:solidFill>
-                        <a:srgbClr val="DDDDDD"/>
+                        <a:srgbClr val="D8DEE6"/>
                       </a:solidFill>
                       <a:prstDash val="solid"/>
                       <a:round/>
@@ -3321,7 +3321,7 @@
                     </a:lnT>
                     <a:lnB w="6350" cap="flat" cmpd="sng" algn="ctr">
                       <a:solidFill>
-                        <a:srgbClr val="DDDDDD"/>
+                        <a:srgbClr val="D8DEE6"/>
                       </a:solidFill>
                       <a:prstDash val="solid"/>
                       <a:round/>
@@ -3329,7 +3329,7 @@
                       <a:tailEnd type="none" w="med" len="med"/>
                     </a:lnB>
                     <a:solidFill>
-                      <a:srgbClr val="B85042"/>
+                      <a:srgbClr val="2F6690"/>
                     </a:solidFill>
                   </a:tcPr>
                 </a:tc>
@@ -3362,7 +3362,7 @@
                   <a:tcPr>
                     <a:lnL w="6350" cap="flat" cmpd="sng" algn="ctr">
                       <a:solidFill>
-                        <a:srgbClr val="DDDDDD"/>
+                        <a:srgbClr val="D8DEE6"/>
                       </a:solidFill>
                       <a:prstDash val="solid"/>
                       <a:round/>
@@ -3371,7 +3371,7 @@
                     </a:lnL>
                     <a:lnR w="6350" cap="flat" cmpd="sng" algn="ctr">
                       <a:solidFill>
-                        <a:srgbClr val="DDDDDD"/>
+                        <a:srgbClr val="D8DEE6"/>
                       </a:solidFill>
                       <a:prstDash val="solid"/>
                       <a:round/>
@@ -3380,7 +3380,7 @@
                     </a:lnR>
                     <a:lnT w="6350" cap="flat" cmpd="sng" algn="ctr">
                       <a:solidFill>
-                        <a:srgbClr val="DDDDDD"/>
+                        <a:srgbClr val="D8DEE6"/>
                       </a:solidFill>
                       <a:prstDash val="solid"/>
                       <a:round/>
@@ -3389,7 +3389,7 @@
                     </a:lnT>
                     <a:lnB w="6350" cap="flat" cmpd="sng" algn="ctr">
                       <a:solidFill>
-                        <a:srgbClr val="DDDDDD"/>
+                        <a:srgbClr val="D8DEE6"/>
                       </a:solidFill>
                       <a:prstDash val="solid"/>
                       <a:round/>
@@ -3397,7 +3397,7 @@
                       <a:tailEnd type="none" w="med" len="med"/>
                     </a:lnB>
                     <a:solidFill>
-                      <a:srgbClr val="B85042"/>
+                      <a:srgbClr val="2F6690"/>
                     </a:solidFill>
                   </a:tcPr>
                 </a:tc>
@@ -3430,7 +3430,7 @@
                   <a:tcPr>
                     <a:lnL w="6350" cap="flat" cmpd="sng" algn="ctr">
                       <a:solidFill>
-                        <a:srgbClr val="DDDDDD"/>
+                        <a:srgbClr val="D8DEE6"/>
                       </a:solidFill>
                       <a:prstDash val="solid"/>
                       <a:round/>
@@ -3439,7 +3439,7 @@
                     </a:lnL>
                     <a:lnR w="6350" cap="flat" cmpd="sng" algn="ctr">
                       <a:solidFill>
-                        <a:srgbClr val="DDDDDD"/>
+                        <a:srgbClr val="D8DEE6"/>
                       </a:solidFill>
                       <a:prstDash val="solid"/>
                       <a:round/>
@@ -3448,7 +3448,7 @@
                     </a:lnR>
                     <a:lnT w="6350" cap="flat" cmpd="sng" algn="ctr">
                       <a:solidFill>
-                        <a:srgbClr val="DDDDDD"/>
+                        <a:srgbClr val="D8DEE6"/>
                       </a:solidFill>
                       <a:prstDash val="solid"/>
                       <a:round/>
@@ -3457,7 +3457,7 @@
                     </a:lnT>
                     <a:lnB w="6350" cap="flat" cmpd="sng" algn="ctr">
                       <a:solidFill>
-                        <a:srgbClr val="DDDDDD"/>
+                        <a:srgbClr val="D8DEE6"/>
                       </a:solidFill>
                       <a:prstDash val="solid"/>
                       <a:round/>
@@ -3465,7 +3465,7 @@
                       <a:tailEnd type="none" w="med" len="med"/>
                     </a:lnB>
                     <a:solidFill>
-                      <a:srgbClr val="B85042"/>
+                      <a:srgbClr val="2F6690"/>
                     </a:solidFill>
                   </a:tcPr>
                 </a:tc>
@@ -3505,7 +3505,7 @@
                   <a:tcPr>
                     <a:lnL w="6350" cap="flat" cmpd="sng" algn="ctr">
                       <a:solidFill>
-                        <a:srgbClr val="DDDDDD"/>
+                        <a:srgbClr val="D8DEE6"/>
                       </a:solidFill>
                       <a:prstDash val="solid"/>
                       <a:round/>
@@ -3514,7 +3514,7 @@
                     </a:lnL>
                     <a:lnR w="6350" cap="flat" cmpd="sng" algn="ctr">
                       <a:solidFill>
-                        <a:srgbClr val="DDDDDD"/>
+                        <a:srgbClr val="D8DEE6"/>
                       </a:solidFill>
                       <a:prstDash val="solid"/>
                       <a:round/>
@@ -3523,7 +3523,7 @@
                     </a:lnR>
                     <a:lnT w="6350" cap="flat" cmpd="sng" algn="ctr">
                       <a:solidFill>
-                        <a:srgbClr val="DDDDDD"/>
+                        <a:srgbClr val="D8DEE6"/>
                       </a:solidFill>
                       <a:prstDash val="solid"/>
                       <a:round/>
@@ -3532,7 +3532,7 @@
                     </a:lnT>
                     <a:lnB w="6350" cap="flat" cmpd="sng" algn="ctr">
                       <a:solidFill>
-                        <a:srgbClr val="DDDDDD"/>
+                        <a:srgbClr val="D8DEE6"/>
                       </a:solidFill>
                       <a:prstDash val="solid"/>
                       <a:round/>
@@ -3570,7 +3570,7 @@
                   <a:tcPr>
                     <a:lnL w="6350" cap="flat" cmpd="sng" algn="ctr">
                       <a:solidFill>
-                        <a:srgbClr val="DDDDDD"/>
+                        <a:srgbClr val="D8DEE6"/>
                       </a:solidFill>
                       <a:prstDash val="solid"/>
                       <a:round/>
@@ -3579,7 +3579,7 @@
                     </a:lnL>
                     <a:lnR w="6350" cap="flat" cmpd="sng" algn="ctr">
                       <a:solidFill>
-                        <a:srgbClr val="DDDDDD"/>
+                        <a:srgbClr val="D8DEE6"/>
                       </a:solidFill>
                       <a:prstDash val="solid"/>
                       <a:round/>
@@ -3588,7 +3588,7 @@
                     </a:lnR>
                     <a:lnT w="6350" cap="flat" cmpd="sng" algn="ctr">
                       <a:solidFill>
-                        <a:srgbClr val="DDDDDD"/>
+                        <a:srgbClr val="D8DEE6"/>
                       </a:solidFill>
                       <a:prstDash val="solid"/>
                       <a:round/>
@@ -3597,7 +3597,7 @@
                     </a:lnT>
                     <a:lnB w="6350" cap="flat" cmpd="sng" algn="ctr">
                       <a:solidFill>
-                        <a:srgbClr val="DDDDDD"/>
+                        <a:srgbClr val="D8DEE6"/>
                       </a:solidFill>
                       <a:prstDash val="solid"/>
                       <a:round/>
@@ -3635,7 +3635,7 @@
                   <a:tcPr>
                     <a:lnL w="6350" cap="flat" cmpd="sng" algn="ctr">
                       <a:solidFill>
-                        <a:srgbClr val="DDDDDD"/>
+                        <a:srgbClr val="D8DEE6"/>
                       </a:solidFill>
                       <a:prstDash val="solid"/>
                       <a:round/>
@@ -3644,7 +3644,7 @@
                     </a:lnL>
                     <a:lnR w="6350" cap="flat" cmpd="sng" algn="ctr">
                       <a:solidFill>
-                        <a:srgbClr val="DDDDDD"/>
+                        <a:srgbClr val="D8DEE6"/>
                       </a:solidFill>
                       <a:prstDash val="solid"/>
                       <a:round/>
@@ -3653,7 +3653,7 @@
                     </a:lnR>
                     <a:lnT w="6350" cap="flat" cmpd="sng" algn="ctr">
                       <a:solidFill>
-                        <a:srgbClr val="DDDDDD"/>
+                        <a:srgbClr val="D8DEE6"/>
                       </a:solidFill>
                       <a:prstDash val="solid"/>
                       <a:round/>
@@ -3662,7 +3662,7 @@
                     </a:lnT>
                     <a:lnB w="6350" cap="flat" cmpd="sng" algn="ctr">
                       <a:solidFill>
-                        <a:srgbClr val="DDDDDD"/>
+                        <a:srgbClr val="D8DEE6"/>
                       </a:solidFill>
                       <a:prstDash val="solid"/>
                       <a:round/>
@@ -3700,7 +3700,7 @@
                   <a:tcPr>
                     <a:lnL w="6350" cap="flat" cmpd="sng" algn="ctr">
                       <a:solidFill>
-                        <a:srgbClr val="DDDDDD"/>
+                        <a:srgbClr val="D8DEE6"/>
                       </a:solidFill>
                       <a:prstDash val="solid"/>
                       <a:round/>
@@ -3709,7 +3709,7 @@
                     </a:lnL>
                     <a:lnR w="6350" cap="flat" cmpd="sng" algn="ctr">
                       <a:solidFill>
-                        <a:srgbClr val="DDDDDD"/>
+                        <a:srgbClr val="D8DEE6"/>
                       </a:solidFill>
                       <a:prstDash val="solid"/>
                       <a:round/>
@@ -3718,7 +3718,7 @@
                     </a:lnR>
                     <a:lnT w="6350" cap="flat" cmpd="sng" algn="ctr">
                       <a:solidFill>
-                        <a:srgbClr val="DDDDDD"/>
+                        <a:srgbClr val="D8DEE6"/>
                       </a:solidFill>
                       <a:prstDash val="solid"/>
                       <a:round/>
@@ -3727,7 +3727,7 @@
                     </a:lnT>
                     <a:lnB w="6350" cap="flat" cmpd="sng" algn="ctr">
                       <a:solidFill>
-                        <a:srgbClr val="DDDDDD"/>
+                        <a:srgbClr val="D8DEE6"/>
                       </a:solidFill>
                       <a:prstDash val="solid"/>
                       <a:round/>
@@ -3747,7 +3747,7 @@
                       <a:r>
                         <a:rPr lang="en-US" sz="1100" b="1" dirty="0">
                           <a:solidFill>
-                            <a:srgbClr val="4A9E6B"/>
+                            <a:srgbClr val="0F9D8A"/>
                           </a:solidFill>
                           <a:latin typeface="Calibri" pitchFamily="34" charset="0"/>
                           <a:ea typeface="Calibri" pitchFamily="34" charset="-122"/>
@@ -3765,7 +3765,7 @@
                   <a:tcPr>
                     <a:lnL w="6350" cap="flat" cmpd="sng" algn="ctr">
                       <a:solidFill>
-                        <a:srgbClr val="DDDDDD"/>
+                        <a:srgbClr val="D8DEE6"/>
                       </a:solidFill>
                       <a:prstDash val="solid"/>
                       <a:round/>
@@ -3774,7 +3774,7 @@
                     </a:lnL>
                     <a:lnR w="6350" cap="flat" cmpd="sng" algn="ctr">
                       <a:solidFill>
-                        <a:srgbClr val="DDDDDD"/>
+                        <a:srgbClr val="D8DEE6"/>
                       </a:solidFill>
                       <a:prstDash val="solid"/>
                       <a:round/>
@@ -3783,7 +3783,7 @@
                     </a:lnR>
                     <a:lnT w="6350" cap="flat" cmpd="sng" algn="ctr">
                       <a:solidFill>
-                        <a:srgbClr val="DDDDDD"/>
+                        <a:srgbClr val="D8DEE6"/>
                       </a:solidFill>
                       <a:prstDash val="solid"/>
                       <a:round/>
@@ -3792,7 +3792,7 @@
                     </a:lnT>
                     <a:lnB w="6350" cap="flat" cmpd="sng" algn="ctr">
                       <a:solidFill>
-                        <a:srgbClr val="DDDDDD"/>
+                        <a:srgbClr val="D8DEE6"/>
                       </a:solidFill>
                       <a:prstDash val="solid"/>
                       <a:round/>
@@ -3837,7 +3837,7 @@
                   <a:tcPr>
                     <a:lnL w="6350" cap="flat" cmpd="sng" algn="ctr">
                       <a:solidFill>
-                        <a:srgbClr val="DDDDDD"/>
+                        <a:srgbClr val="D8DEE6"/>
                       </a:solidFill>
                       <a:prstDash val="solid"/>
                       <a:round/>
@@ -3846,7 +3846,7 @@
                     </a:lnL>
                     <a:lnR w="6350" cap="flat" cmpd="sng" algn="ctr">
                       <a:solidFill>
-                        <a:srgbClr val="DDDDDD"/>
+                        <a:srgbClr val="D8DEE6"/>
                       </a:solidFill>
                       <a:prstDash val="solid"/>
                       <a:round/>
@@ -3855,7 +3855,7 @@
                     </a:lnR>
                     <a:lnT w="6350" cap="flat" cmpd="sng" algn="ctr">
                       <a:solidFill>
-                        <a:srgbClr val="DDDDDD"/>
+                        <a:srgbClr val="D8DEE6"/>
                       </a:solidFill>
                       <a:prstDash val="solid"/>
                       <a:round/>
@@ -3864,7 +3864,7 @@
                     </a:lnT>
                     <a:lnB w="6350" cap="flat" cmpd="sng" algn="ctr">
                       <a:solidFill>
-                        <a:srgbClr val="DDDDDD"/>
+                        <a:srgbClr val="D8DEE6"/>
                       </a:solidFill>
                       <a:prstDash val="solid"/>
                       <a:round/>
@@ -3872,7 +3872,7 @@
                       <a:tailEnd type="none" w="med" len="med"/>
                     </a:lnB>
                     <a:solidFill>
-                      <a:srgbClr val="F5F3EF"/>
+                      <a:srgbClr val="F2F5F9"/>
                     </a:solidFill>
                   </a:tcPr>
                 </a:tc>
@@ -3905,7 +3905,7 @@
                   <a:tcPr>
                     <a:lnL w="6350" cap="flat" cmpd="sng" algn="ctr">
                       <a:solidFill>
-                        <a:srgbClr val="DDDDDD"/>
+                        <a:srgbClr val="D8DEE6"/>
                       </a:solidFill>
                       <a:prstDash val="solid"/>
                       <a:round/>
@@ -3914,7 +3914,7 @@
                     </a:lnL>
                     <a:lnR w="6350" cap="flat" cmpd="sng" algn="ctr">
                       <a:solidFill>
-                        <a:srgbClr val="DDDDDD"/>
+                        <a:srgbClr val="D8DEE6"/>
                       </a:solidFill>
                       <a:prstDash val="solid"/>
                       <a:round/>
@@ -3923,7 +3923,7 @@
                     </a:lnR>
                     <a:lnT w="6350" cap="flat" cmpd="sng" algn="ctr">
                       <a:solidFill>
-                        <a:srgbClr val="DDDDDD"/>
+                        <a:srgbClr val="D8DEE6"/>
                       </a:solidFill>
                       <a:prstDash val="solid"/>
                       <a:round/>
@@ -3932,7 +3932,7 @@
                     </a:lnT>
                     <a:lnB w="6350" cap="flat" cmpd="sng" algn="ctr">
                       <a:solidFill>
-                        <a:srgbClr val="DDDDDD"/>
+                        <a:srgbClr val="D8DEE6"/>
                       </a:solidFill>
                       <a:prstDash val="solid"/>
                       <a:round/>
@@ -3940,7 +3940,7 @@
                       <a:tailEnd type="none" w="med" len="med"/>
                     </a:lnB>
                     <a:solidFill>
-                      <a:srgbClr val="F5F3EF"/>
+                      <a:srgbClr val="F2F5F9"/>
                     </a:solidFill>
                   </a:tcPr>
                 </a:tc>
@@ -3973,7 +3973,7 @@
                   <a:tcPr>
                     <a:lnL w="6350" cap="flat" cmpd="sng" algn="ctr">
                       <a:solidFill>
-                        <a:srgbClr val="DDDDDD"/>
+                        <a:srgbClr val="D8DEE6"/>
                       </a:solidFill>
                       <a:prstDash val="solid"/>
                       <a:round/>
@@ -3982,7 +3982,7 @@
                     </a:lnL>
                     <a:lnR w="6350" cap="flat" cmpd="sng" algn="ctr">
                       <a:solidFill>
-                        <a:srgbClr val="DDDDDD"/>
+                        <a:srgbClr val="D8DEE6"/>
                       </a:solidFill>
                       <a:prstDash val="solid"/>
                       <a:round/>
@@ -3991,7 +3991,7 @@
                     </a:lnR>
                     <a:lnT w="6350" cap="flat" cmpd="sng" algn="ctr">
                       <a:solidFill>
-                        <a:srgbClr val="DDDDDD"/>
+                        <a:srgbClr val="D8DEE6"/>
                       </a:solidFill>
                       <a:prstDash val="solid"/>
                       <a:round/>
@@ -4000,7 +4000,7 @@
                     </a:lnT>
                     <a:lnB w="6350" cap="flat" cmpd="sng" algn="ctr">
                       <a:solidFill>
-                        <a:srgbClr val="DDDDDD"/>
+                        <a:srgbClr val="D8DEE6"/>
                       </a:solidFill>
                       <a:prstDash val="solid"/>
                       <a:round/>
@@ -4008,7 +4008,7 @@
                       <a:tailEnd type="none" w="med" len="med"/>
                     </a:lnB>
                     <a:solidFill>
-                      <a:srgbClr val="F5F3EF"/>
+                      <a:srgbClr val="F2F5F9"/>
                     </a:solidFill>
                   </a:tcPr>
                 </a:tc>
@@ -4041,7 +4041,7 @@
                   <a:tcPr>
                     <a:lnL w="6350" cap="flat" cmpd="sng" algn="ctr">
                       <a:solidFill>
-                        <a:srgbClr val="DDDDDD"/>
+                        <a:srgbClr val="D8DEE6"/>
                       </a:solidFill>
                       <a:prstDash val="solid"/>
                       <a:round/>
@@ -4050,7 +4050,7 @@
                     </a:lnL>
                     <a:lnR w="6350" cap="flat" cmpd="sng" algn="ctr">
                       <a:solidFill>
-                        <a:srgbClr val="DDDDDD"/>
+                        <a:srgbClr val="D8DEE6"/>
                       </a:solidFill>
                       <a:prstDash val="solid"/>
                       <a:round/>
@@ -4059,7 +4059,7 @@
                     </a:lnR>
                     <a:lnT w="6350" cap="flat" cmpd="sng" algn="ctr">
                       <a:solidFill>
-                        <a:srgbClr val="DDDDDD"/>
+                        <a:srgbClr val="D8DEE6"/>
                       </a:solidFill>
                       <a:prstDash val="solid"/>
                       <a:round/>
@@ -4068,7 +4068,7 @@
                     </a:lnT>
                     <a:lnB w="6350" cap="flat" cmpd="sng" algn="ctr">
                       <a:solidFill>
-                        <a:srgbClr val="DDDDDD"/>
+                        <a:srgbClr val="D8DEE6"/>
                       </a:solidFill>
                       <a:prstDash val="solid"/>
                       <a:round/>
@@ -4076,7 +4076,7 @@
                       <a:tailEnd type="none" w="med" len="med"/>
                     </a:lnB>
                     <a:solidFill>
-                      <a:srgbClr val="F5F3EF"/>
+                      <a:srgbClr val="F2F5F9"/>
                     </a:solidFill>
                   </a:tcPr>
                 </a:tc>
@@ -4091,7 +4091,7 @@
                       <a:r>
                         <a:rPr lang="en-US" sz="1100" b="1" dirty="0">
                           <a:solidFill>
-                            <a:srgbClr val="4A9E6B"/>
+                            <a:srgbClr val="0F9D8A"/>
                           </a:solidFill>
                           <a:latin typeface="Calibri" pitchFamily="34" charset="0"/>
                           <a:ea typeface="Calibri" pitchFamily="34" charset="-122"/>
@@ -4109,7 +4109,7 @@
                   <a:tcPr>
                     <a:lnL w="6350" cap="flat" cmpd="sng" algn="ctr">
                       <a:solidFill>
-                        <a:srgbClr val="DDDDDD"/>
+                        <a:srgbClr val="D8DEE6"/>
                       </a:solidFill>
                       <a:prstDash val="solid"/>
                       <a:round/>
@@ -4118,7 +4118,7 @@
                     </a:lnL>
                     <a:lnR w="6350" cap="flat" cmpd="sng" algn="ctr">
                       <a:solidFill>
-                        <a:srgbClr val="DDDDDD"/>
+                        <a:srgbClr val="D8DEE6"/>
                       </a:solidFill>
                       <a:prstDash val="solid"/>
                       <a:round/>
@@ -4127,7 +4127,7 @@
                     </a:lnR>
                     <a:lnT w="6350" cap="flat" cmpd="sng" algn="ctr">
                       <a:solidFill>
-                        <a:srgbClr val="DDDDDD"/>
+                        <a:srgbClr val="D8DEE6"/>
                       </a:solidFill>
                       <a:prstDash val="solid"/>
                       <a:round/>
@@ -4136,7 +4136,7 @@
                     </a:lnT>
                     <a:lnB w="6350" cap="flat" cmpd="sng" algn="ctr">
                       <a:solidFill>
-                        <a:srgbClr val="DDDDDD"/>
+                        <a:srgbClr val="D8DEE6"/>
                       </a:solidFill>
                       <a:prstDash val="solid"/>
                       <a:round/>
@@ -4144,7 +4144,7 @@
                       <a:tailEnd type="none" w="med" len="med"/>
                     </a:lnB>
                     <a:solidFill>
-                      <a:srgbClr val="F5F3EF"/>
+                      <a:srgbClr val="F2F5F9"/>
                     </a:solidFill>
                   </a:tcPr>
                 </a:tc>
@@ -4184,7 +4184,7 @@
                   <a:tcPr>
                     <a:lnL w="6350" cap="flat" cmpd="sng" algn="ctr">
                       <a:solidFill>
-                        <a:srgbClr val="DDDDDD"/>
+                        <a:srgbClr val="D8DEE6"/>
                       </a:solidFill>
                       <a:prstDash val="solid"/>
                       <a:round/>
@@ -4193,7 +4193,7 @@
                     </a:lnL>
                     <a:lnR w="6350" cap="flat" cmpd="sng" algn="ctr">
                       <a:solidFill>
-                        <a:srgbClr val="DDDDDD"/>
+                        <a:srgbClr val="D8DEE6"/>
                       </a:solidFill>
                       <a:prstDash val="solid"/>
                       <a:round/>
@@ -4202,7 +4202,7 @@
                     </a:lnR>
                     <a:lnT w="6350" cap="flat" cmpd="sng" algn="ctr">
                       <a:solidFill>
-                        <a:srgbClr val="DDDDDD"/>
+                        <a:srgbClr val="D8DEE6"/>
                       </a:solidFill>
                       <a:prstDash val="solid"/>
                       <a:round/>
@@ -4211,7 +4211,7 @@
                     </a:lnT>
                     <a:lnB w="6350" cap="flat" cmpd="sng" algn="ctr">
                       <a:solidFill>
-                        <a:srgbClr val="DDDDDD"/>
+                        <a:srgbClr val="D8DEE6"/>
                       </a:solidFill>
                       <a:prstDash val="solid"/>
                       <a:round/>
@@ -4249,7 +4249,7 @@
                   <a:tcPr>
                     <a:lnL w="6350" cap="flat" cmpd="sng" algn="ctr">
                       <a:solidFill>
-                        <a:srgbClr val="DDDDDD"/>
+                        <a:srgbClr val="D8DEE6"/>
                       </a:solidFill>
                       <a:prstDash val="solid"/>
                       <a:round/>
@@ -4258,7 +4258,7 @@
                     </a:lnL>
                     <a:lnR w="6350" cap="flat" cmpd="sng" algn="ctr">
                       <a:solidFill>
-                        <a:srgbClr val="DDDDDD"/>
+                        <a:srgbClr val="D8DEE6"/>
                       </a:solidFill>
                       <a:prstDash val="solid"/>
                       <a:round/>
@@ -4267,7 +4267,7 @@
                     </a:lnR>
                     <a:lnT w="6350" cap="flat" cmpd="sng" algn="ctr">
                       <a:solidFill>
-                        <a:srgbClr val="DDDDDD"/>
+                        <a:srgbClr val="D8DEE6"/>
                       </a:solidFill>
                       <a:prstDash val="solid"/>
                       <a:round/>
@@ -4276,7 +4276,7 @@
                     </a:lnT>
                     <a:lnB w="6350" cap="flat" cmpd="sng" algn="ctr">
                       <a:solidFill>
-                        <a:srgbClr val="DDDDDD"/>
+                        <a:srgbClr val="D8DEE6"/>
                       </a:solidFill>
                       <a:prstDash val="solid"/>
                       <a:round/>
@@ -4314,7 +4314,7 @@
                   <a:tcPr>
                     <a:lnL w="6350" cap="flat" cmpd="sng" algn="ctr">
                       <a:solidFill>
-                        <a:srgbClr val="DDDDDD"/>
+                        <a:srgbClr val="D8DEE6"/>
                       </a:solidFill>
                       <a:prstDash val="solid"/>
                       <a:round/>
@@ -4323,7 +4323,7 @@
                     </a:lnL>
                     <a:lnR w="6350" cap="flat" cmpd="sng" algn="ctr">
                       <a:solidFill>
-                        <a:srgbClr val="DDDDDD"/>
+                        <a:srgbClr val="D8DEE6"/>
                       </a:solidFill>
                       <a:prstDash val="solid"/>
                       <a:round/>
@@ -4332,7 +4332,7 @@
                     </a:lnR>
                     <a:lnT w="6350" cap="flat" cmpd="sng" algn="ctr">
                       <a:solidFill>
-                        <a:srgbClr val="DDDDDD"/>
+                        <a:srgbClr val="D8DEE6"/>
                       </a:solidFill>
                       <a:prstDash val="solid"/>
                       <a:round/>
@@ -4341,7 +4341,7 @@
                     </a:lnT>
                     <a:lnB w="6350" cap="flat" cmpd="sng" algn="ctr">
                       <a:solidFill>
-                        <a:srgbClr val="DDDDDD"/>
+                        <a:srgbClr val="D8DEE6"/>
                       </a:solidFill>
                       <a:prstDash val="solid"/>
                       <a:round/>
@@ -4379,7 +4379,7 @@
                   <a:tcPr>
                     <a:lnL w="6350" cap="flat" cmpd="sng" algn="ctr">
                       <a:solidFill>
-                        <a:srgbClr val="DDDDDD"/>
+                        <a:srgbClr val="D8DEE6"/>
                       </a:solidFill>
                       <a:prstDash val="solid"/>
                       <a:round/>
@@ -4388,7 +4388,7 @@
                     </a:lnL>
                     <a:lnR w="6350" cap="flat" cmpd="sng" algn="ctr">
                       <a:solidFill>
-                        <a:srgbClr val="DDDDDD"/>
+                        <a:srgbClr val="D8DEE6"/>
                       </a:solidFill>
                       <a:prstDash val="solid"/>
                       <a:round/>
@@ -4397,7 +4397,7 @@
                     </a:lnR>
                     <a:lnT w="6350" cap="flat" cmpd="sng" algn="ctr">
                       <a:solidFill>
-                        <a:srgbClr val="DDDDDD"/>
+                        <a:srgbClr val="D8DEE6"/>
                       </a:solidFill>
                       <a:prstDash val="solid"/>
                       <a:round/>
@@ -4406,7 +4406,7 @@
                     </a:lnT>
                     <a:lnB w="6350" cap="flat" cmpd="sng" algn="ctr">
                       <a:solidFill>
-                        <a:srgbClr val="DDDDDD"/>
+                        <a:srgbClr val="D8DEE6"/>
                       </a:solidFill>
                       <a:prstDash val="solid"/>
                       <a:round/>
@@ -4426,7 +4426,7 @@
                       <a:r>
                         <a:rPr lang="en-US" sz="1100" b="1" dirty="0">
                           <a:solidFill>
-                            <a:srgbClr val="C0392B"/>
+                            <a:srgbClr val="D9472B"/>
                           </a:solidFill>
                           <a:latin typeface="Calibri" pitchFamily="34" charset="0"/>
                           <a:ea typeface="Calibri" pitchFamily="34" charset="-122"/>
@@ -4444,7 +4444,7 @@
                   <a:tcPr>
                     <a:lnL w="6350" cap="flat" cmpd="sng" algn="ctr">
                       <a:solidFill>
-                        <a:srgbClr val="DDDDDD"/>
+                        <a:srgbClr val="D8DEE6"/>
                       </a:solidFill>
                       <a:prstDash val="solid"/>
                       <a:round/>
@@ -4453,7 +4453,7 @@
                     </a:lnL>
                     <a:lnR w="6350" cap="flat" cmpd="sng" algn="ctr">
                       <a:solidFill>
-                        <a:srgbClr val="DDDDDD"/>
+                        <a:srgbClr val="D8DEE6"/>
                       </a:solidFill>
                       <a:prstDash val="solid"/>
                       <a:round/>
@@ -4462,7 +4462,7 @@
                     </a:lnR>
                     <a:lnT w="6350" cap="flat" cmpd="sng" algn="ctr">
                       <a:solidFill>
-                        <a:srgbClr val="DDDDDD"/>
+                        <a:srgbClr val="D8DEE6"/>
                       </a:solidFill>
                       <a:prstDash val="solid"/>
                       <a:round/>
@@ -4471,7 +4471,7 @@
                     </a:lnT>
                     <a:lnB w="6350" cap="flat" cmpd="sng" algn="ctr">
                       <a:solidFill>
-                        <a:srgbClr val="DDDDDD"/>
+                        <a:srgbClr val="D8DEE6"/>
                       </a:solidFill>
                       <a:prstDash val="solid"/>
                       <a:round/>
@@ -4587,11 +4587,11 @@
             <a:r>
               <a:rPr lang="en-US" sz="2200" b="1" dirty="0">
                 <a:solidFill>
-                  <a:srgbClr val="4A9E6B"/>
+                  <a:srgbClr val="0F9D8A"/>
                 </a:solidFill>
-                <a:latin typeface="Georgia" pitchFamily="34" charset="0"/>
-                <a:ea typeface="Georgia" pitchFamily="34" charset="-122"/>
-                <a:cs typeface="Georgia" pitchFamily="34" charset="-120"/>
+                <a:latin typeface="Calibri" pitchFamily="34" charset="0"/>
+                <a:ea typeface="Calibri" pitchFamily="34" charset="-122"/>
+                <a:cs typeface="Calibri" pitchFamily="34" charset="-120"/>
               </a:rPr>
               <a:t>KES 1.6M</a:t>
             </a:r>
@@ -4626,7 +4626,7 @@
             <a:r>
               <a:rPr lang="en-US" sz="1100" dirty="0">
                 <a:solidFill>
-                  <a:srgbClr val="7A7A7A"/>
+                  <a:srgbClr val="5F6B7A"/>
                 </a:solidFill>
                 <a:latin typeface="Calibri" pitchFamily="34" charset="0"/>
                 <a:ea typeface="Calibri" pitchFamily="34" charset="-122"/>
@@ -4699,11 +4699,11 @@
             <a:r>
               <a:rPr lang="en-US" sz="2200" b="1" dirty="0">
                 <a:solidFill>
-                  <a:srgbClr val="4A9E6B"/>
+                  <a:srgbClr val="0F9D8A"/>
                 </a:solidFill>
-                <a:latin typeface="Georgia" pitchFamily="34" charset="0"/>
-                <a:ea typeface="Georgia" pitchFamily="34" charset="-122"/>
-                <a:cs typeface="Georgia" pitchFamily="34" charset="-120"/>
+                <a:latin typeface="Calibri" pitchFamily="34" charset="0"/>
+                <a:ea typeface="Calibri" pitchFamily="34" charset="-122"/>
+                <a:cs typeface="Calibri" pitchFamily="34" charset="-120"/>
               </a:rPr>
               <a:t>KES 722K</a:t>
             </a:r>
@@ -4738,7 +4738,7 @@
             <a:r>
               <a:rPr lang="en-US" sz="1100" dirty="0">
                 <a:solidFill>
-                  <a:srgbClr val="7A7A7A"/>
+                  <a:srgbClr val="5F6B7A"/>
                 </a:solidFill>
                 <a:latin typeface="Calibri" pitchFamily="34" charset="0"/>
                 <a:ea typeface="Calibri" pitchFamily="34" charset="-122"/>
@@ -4811,11 +4811,11 @@
             <a:r>
               <a:rPr lang="en-US" sz="2200" b="1" dirty="0">
                 <a:solidFill>
-                  <a:srgbClr val="C0392B"/>
+                  <a:srgbClr val="D9472B"/>
                 </a:solidFill>
-                <a:latin typeface="Georgia" pitchFamily="34" charset="0"/>
-                <a:ea typeface="Georgia" pitchFamily="34" charset="-122"/>
-                <a:cs typeface="Georgia" pitchFamily="34" charset="-120"/>
+                <a:latin typeface="Calibri" pitchFamily="34" charset="0"/>
+                <a:ea typeface="Calibri" pitchFamily="34" charset="-122"/>
+                <a:cs typeface="Calibri" pitchFamily="34" charset="-120"/>
               </a:rPr>
               <a:t>KES 387K</a:t>
             </a:r>
@@ -4850,7 +4850,7 @@
             <a:r>
               <a:rPr lang="en-US" sz="1100" dirty="0">
                 <a:solidFill>
-                  <a:srgbClr val="7A7A7A"/>
+                  <a:srgbClr val="5F6B7A"/>
                 </a:solidFill>
                 <a:latin typeface="Calibri" pitchFamily="34" charset="0"/>
                 <a:ea typeface="Calibri" pitchFamily="34" charset="-122"/>
@@ -4876,7 +4876,7 @@
     <p:bg>
       <p:bgPr>
         <a:solidFill>
-          <a:srgbClr val="FAF8F5"/>
+          <a:srgbClr val="FFFFFF"/>
         </a:solidFill>
         <a:effectLst/>
       </p:bgPr>
@@ -4910,7 +4910,7 @@
             <a:avLst/>
           </a:prstGeom>
           <a:solidFill>
-            <a:srgbClr val="3B2F2F"/>
+            <a:srgbClr val="1B2A41"/>
           </a:solidFill>
           <a:ln/>
         </p:spPr>
@@ -4975,9 +4975,9 @@
                 <a:solidFill>
                   <a:srgbClr val="FFFFFF"/>
                 </a:solidFill>
-                <a:latin typeface="Georgia" pitchFamily="34" charset="0"/>
-                <a:ea typeface="Georgia" pitchFamily="34" charset="-122"/>
-                <a:cs typeface="Georgia" pitchFamily="34" charset="-120"/>
+                <a:latin typeface="Calibri" pitchFamily="34" charset="0"/>
+                <a:ea typeface="Calibri" pitchFamily="34" charset="-122"/>
+                <a:cs typeface="Calibri" pitchFamily="34" charset="-120"/>
               </a:rPr>
               <a:t>What Makes a Location Work?</a:t>
             </a:r>
@@ -5056,7 +5056,7 @@
                   <a:tcPr>
                     <a:lnL w="6350" cap="flat" cmpd="sng" algn="ctr">
                       <a:solidFill>
-                        <a:srgbClr val="DDDDDD"/>
+                        <a:srgbClr val="D8DEE6"/>
                       </a:solidFill>
                       <a:prstDash val="solid"/>
                       <a:round/>
@@ -5065,7 +5065,7 @@
                     </a:lnL>
                     <a:lnR w="6350" cap="flat" cmpd="sng" algn="ctr">
                       <a:solidFill>
-                        <a:srgbClr val="DDDDDD"/>
+                        <a:srgbClr val="D8DEE6"/>
                       </a:solidFill>
                       <a:prstDash val="solid"/>
                       <a:round/>
@@ -5074,7 +5074,7 @@
                     </a:lnR>
                     <a:lnT w="6350" cap="flat" cmpd="sng" algn="ctr">
                       <a:solidFill>
-                        <a:srgbClr val="DDDDDD"/>
+                        <a:srgbClr val="D8DEE6"/>
                       </a:solidFill>
                       <a:prstDash val="solid"/>
                       <a:round/>
@@ -5083,7 +5083,7 @@
                     </a:lnT>
                     <a:lnB w="6350" cap="flat" cmpd="sng" algn="ctr">
                       <a:solidFill>
-                        <a:srgbClr val="DDDDDD"/>
+                        <a:srgbClr val="D8DEE6"/>
                       </a:solidFill>
                       <a:prstDash val="solid"/>
                       <a:round/>
@@ -5091,7 +5091,7 @@
                       <a:tailEnd type="none" w="med" len="med"/>
                     </a:lnB>
                     <a:solidFill>
-                      <a:srgbClr val="B85042"/>
+                      <a:srgbClr val="2F6690"/>
                     </a:solidFill>
                   </a:tcPr>
                 </a:tc>
@@ -5145,7 +5145,7 @@
                   <a:tcPr>
                     <a:lnL w="6350" cap="flat" cmpd="sng" algn="ctr">
                       <a:solidFill>
-                        <a:srgbClr val="DDDDDD"/>
+                        <a:srgbClr val="D8DEE6"/>
                       </a:solidFill>
                       <a:prstDash val="solid"/>
                       <a:round/>
@@ -5154,7 +5154,7 @@
                     </a:lnL>
                     <a:lnR w="6350" cap="flat" cmpd="sng" algn="ctr">
                       <a:solidFill>
-                        <a:srgbClr val="DDDDDD"/>
+                        <a:srgbClr val="D8DEE6"/>
                       </a:solidFill>
                       <a:prstDash val="solid"/>
                       <a:round/>
@@ -5163,7 +5163,7 @@
                     </a:lnR>
                     <a:lnT w="6350" cap="flat" cmpd="sng" algn="ctr">
                       <a:solidFill>
-                        <a:srgbClr val="DDDDDD"/>
+                        <a:srgbClr val="D8DEE6"/>
                       </a:solidFill>
                       <a:prstDash val="solid"/>
                       <a:round/>
@@ -5172,7 +5172,7 @@
                     </a:lnT>
                     <a:lnB w="6350" cap="flat" cmpd="sng" algn="ctr">
                       <a:solidFill>
-                        <a:srgbClr val="DDDDDD"/>
+                        <a:srgbClr val="D8DEE6"/>
                       </a:solidFill>
                       <a:prstDash val="solid"/>
                       <a:round/>
@@ -5180,7 +5180,7 @@
                       <a:tailEnd type="none" w="med" len="med"/>
                     </a:lnB>
                     <a:solidFill>
-                      <a:srgbClr val="B85042"/>
+                      <a:srgbClr val="2F6690"/>
                     </a:solidFill>
                   </a:tcPr>
                 </a:tc>
@@ -5234,7 +5234,7 @@
                   <a:tcPr>
                     <a:lnL w="6350" cap="flat" cmpd="sng" algn="ctr">
                       <a:solidFill>
-                        <a:srgbClr val="DDDDDD"/>
+                        <a:srgbClr val="D8DEE6"/>
                       </a:solidFill>
                       <a:prstDash val="solid"/>
                       <a:round/>
@@ -5243,7 +5243,7 @@
                     </a:lnL>
                     <a:lnR w="6350" cap="flat" cmpd="sng" algn="ctr">
                       <a:solidFill>
-                        <a:srgbClr val="DDDDDD"/>
+                        <a:srgbClr val="D8DEE6"/>
                       </a:solidFill>
                       <a:prstDash val="solid"/>
                       <a:round/>
@@ -5252,7 +5252,7 @@
                     </a:lnR>
                     <a:lnT w="6350" cap="flat" cmpd="sng" algn="ctr">
                       <a:solidFill>
-                        <a:srgbClr val="DDDDDD"/>
+                        <a:srgbClr val="D8DEE6"/>
                       </a:solidFill>
                       <a:prstDash val="solid"/>
                       <a:round/>
@@ -5261,7 +5261,7 @@
                     </a:lnT>
                     <a:lnB w="6350" cap="flat" cmpd="sng" algn="ctr">
                       <a:solidFill>
-                        <a:srgbClr val="DDDDDD"/>
+                        <a:srgbClr val="D8DEE6"/>
                       </a:solidFill>
                       <a:prstDash val="solid"/>
                       <a:round/>
@@ -5269,7 +5269,7 @@
                       <a:tailEnd type="none" w="med" len="med"/>
                     </a:lnB>
                     <a:solidFill>
-                      <a:srgbClr val="B85042"/>
+                      <a:srgbClr val="2F6690"/>
                     </a:solidFill>
                   </a:tcPr>
                 </a:tc>
@@ -5323,7 +5323,7 @@
                   <a:tcPr>
                     <a:lnL w="6350" cap="flat" cmpd="sng" algn="ctr">
                       <a:solidFill>
-                        <a:srgbClr val="DDDDDD"/>
+                        <a:srgbClr val="D8DEE6"/>
                       </a:solidFill>
                       <a:prstDash val="solid"/>
                       <a:round/>
@@ -5332,7 +5332,7 @@
                     </a:lnL>
                     <a:lnR w="6350" cap="flat" cmpd="sng" algn="ctr">
                       <a:solidFill>
-                        <a:srgbClr val="DDDDDD"/>
+                        <a:srgbClr val="D8DEE6"/>
                       </a:solidFill>
                       <a:prstDash val="solid"/>
                       <a:round/>
@@ -5341,7 +5341,7 @@
                     </a:lnR>
                     <a:lnT w="6350" cap="flat" cmpd="sng" algn="ctr">
                       <a:solidFill>
-                        <a:srgbClr val="DDDDDD"/>
+                        <a:srgbClr val="D8DEE6"/>
                       </a:solidFill>
                       <a:prstDash val="solid"/>
                       <a:round/>
@@ -5350,7 +5350,7 @@
                     </a:lnT>
                     <a:lnB w="6350" cap="flat" cmpd="sng" algn="ctr">
                       <a:solidFill>
-                        <a:srgbClr val="DDDDDD"/>
+                        <a:srgbClr val="D8DEE6"/>
                       </a:solidFill>
                       <a:prstDash val="solid"/>
                       <a:round/>
@@ -5358,7 +5358,7 @@
                       <a:tailEnd type="none" w="med" len="med"/>
                     </a:lnB>
                     <a:solidFill>
-                      <a:srgbClr val="B85042"/>
+                      <a:srgbClr val="2F6690"/>
                     </a:solidFill>
                   </a:tcPr>
                 </a:tc>
@@ -5398,7 +5398,7 @@
                   <a:tcPr>
                     <a:lnL w="6350" cap="flat" cmpd="sng" algn="ctr">
                       <a:solidFill>
-                        <a:srgbClr val="DDDDDD"/>
+                        <a:srgbClr val="D8DEE6"/>
                       </a:solidFill>
                       <a:prstDash val="solid"/>
                       <a:round/>
@@ -5407,7 +5407,7 @@
                     </a:lnL>
                     <a:lnR w="6350" cap="flat" cmpd="sng" algn="ctr">
                       <a:solidFill>
-                        <a:srgbClr val="DDDDDD"/>
+                        <a:srgbClr val="D8DEE6"/>
                       </a:solidFill>
                       <a:prstDash val="solid"/>
                       <a:round/>
@@ -5416,7 +5416,7 @@
                     </a:lnR>
                     <a:lnT w="6350" cap="flat" cmpd="sng" algn="ctr">
                       <a:solidFill>
-                        <a:srgbClr val="DDDDDD"/>
+                        <a:srgbClr val="D8DEE6"/>
                       </a:solidFill>
                       <a:prstDash val="solid"/>
                       <a:round/>
@@ -5425,7 +5425,7 @@
                     </a:lnT>
                     <a:lnB w="6350" cap="flat" cmpd="sng" algn="ctr">
                       <a:solidFill>
-                        <a:srgbClr val="DDDDDD"/>
+                        <a:srgbClr val="D8DEE6"/>
                       </a:solidFill>
                       <a:prstDash val="solid"/>
                       <a:round/>
@@ -5445,7 +5445,7 @@
                       <a:r>
                         <a:rPr lang="en-US" sz="1000" b="1" dirty="0">
                           <a:solidFill>
-                            <a:srgbClr val="4A9E6B"/>
+                            <a:srgbClr val="0F9D8A"/>
                           </a:solidFill>
                           <a:latin typeface="Calibri" pitchFamily="34" charset="0"/>
                           <a:ea typeface="Calibri" pitchFamily="34" charset="-122"/>
@@ -5463,7 +5463,7 @@
                   <a:tcPr>
                     <a:lnL w="6350" cap="flat" cmpd="sng" algn="ctr">
                       <a:solidFill>
-                        <a:srgbClr val="DDDDDD"/>
+                        <a:srgbClr val="D8DEE6"/>
                       </a:solidFill>
                       <a:prstDash val="solid"/>
                       <a:round/>
@@ -5472,7 +5472,7 @@
                     </a:lnL>
                     <a:lnR w="6350" cap="flat" cmpd="sng" algn="ctr">
                       <a:solidFill>
-                        <a:srgbClr val="DDDDDD"/>
+                        <a:srgbClr val="D8DEE6"/>
                       </a:solidFill>
                       <a:prstDash val="solid"/>
                       <a:round/>
@@ -5481,7 +5481,7 @@
                     </a:lnR>
                     <a:lnT w="6350" cap="flat" cmpd="sng" algn="ctr">
                       <a:solidFill>
-                        <a:srgbClr val="DDDDDD"/>
+                        <a:srgbClr val="D8DEE6"/>
                       </a:solidFill>
                       <a:prstDash val="solid"/>
                       <a:round/>
@@ -5490,7 +5490,7 @@
                     </a:lnT>
                     <a:lnB w="6350" cap="flat" cmpd="sng" algn="ctr">
                       <a:solidFill>
-                        <a:srgbClr val="DDDDDD"/>
+                        <a:srgbClr val="D8DEE6"/>
                       </a:solidFill>
                       <a:prstDash val="solid"/>
                       <a:round/>
@@ -5510,7 +5510,7 @@
                       <a:r>
                         <a:rPr lang="en-US" sz="1000" b="1" dirty="0">
                           <a:solidFill>
-                            <a:srgbClr val="4A9E6B"/>
+                            <a:srgbClr val="0F9D8A"/>
                           </a:solidFill>
                           <a:latin typeface="Calibri" pitchFamily="34" charset="0"/>
                           <a:ea typeface="Calibri" pitchFamily="34" charset="-122"/>
@@ -5528,7 +5528,7 @@
                   <a:tcPr>
                     <a:lnL w="6350" cap="flat" cmpd="sng" algn="ctr">
                       <a:solidFill>
-                        <a:srgbClr val="DDDDDD"/>
+                        <a:srgbClr val="D8DEE6"/>
                       </a:solidFill>
                       <a:prstDash val="solid"/>
                       <a:round/>
@@ -5537,7 +5537,7 @@
                     </a:lnL>
                     <a:lnR w="6350" cap="flat" cmpd="sng" algn="ctr">
                       <a:solidFill>
-                        <a:srgbClr val="DDDDDD"/>
+                        <a:srgbClr val="D8DEE6"/>
                       </a:solidFill>
                       <a:prstDash val="solid"/>
                       <a:round/>
@@ -5546,7 +5546,7 @@
                     </a:lnR>
                     <a:lnT w="6350" cap="flat" cmpd="sng" algn="ctr">
                       <a:solidFill>
-                        <a:srgbClr val="DDDDDD"/>
+                        <a:srgbClr val="D8DEE6"/>
                       </a:solidFill>
                       <a:prstDash val="solid"/>
                       <a:round/>
@@ -5555,7 +5555,7 @@
                     </a:lnT>
                     <a:lnB w="6350" cap="flat" cmpd="sng" algn="ctr">
                       <a:solidFill>
-                        <a:srgbClr val="DDDDDD"/>
+                        <a:srgbClr val="D8DEE6"/>
                       </a:solidFill>
                       <a:prstDash val="solid"/>
                       <a:round/>
@@ -5575,7 +5575,7 @@
                       <a:r>
                         <a:rPr lang="en-US" sz="1000" b="1" dirty="0">
                           <a:solidFill>
-                            <a:srgbClr val="C0392B"/>
+                            <a:srgbClr val="D9472B"/>
                           </a:solidFill>
                           <a:latin typeface="Calibri" pitchFamily="34" charset="0"/>
                           <a:ea typeface="Calibri" pitchFamily="34" charset="-122"/>
@@ -5593,7 +5593,7 @@
                   <a:tcPr>
                     <a:lnL w="6350" cap="flat" cmpd="sng" algn="ctr">
                       <a:solidFill>
-                        <a:srgbClr val="DDDDDD"/>
+                        <a:srgbClr val="D8DEE6"/>
                       </a:solidFill>
                       <a:prstDash val="solid"/>
                       <a:round/>
@@ -5602,7 +5602,7 @@
                     </a:lnL>
                     <a:lnR w="6350" cap="flat" cmpd="sng" algn="ctr">
                       <a:solidFill>
-                        <a:srgbClr val="DDDDDD"/>
+                        <a:srgbClr val="D8DEE6"/>
                       </a:solidFill>
                       <a:prstDash val="solid"/>
                       <a:round/>
@@ -5611,7 +5611,7 @@
                     </a:lnR>
                     <a:lnT w="6350" cap="flat" cmpd="sng" algn="ctr">
                       <a:solidFill>
-                        <a:srgbClr val="DDDDDD"/>
+                        <a:srgbClr val="D8DEE6"/>
                       </a:solidFill>
                       <a:prstDash val="solid"/>
                       <a:round/>
@@ -5620,7 +5620,7 @@
                     </a:lnT>
                     <a:lnB w="6350" cap="flat" cmpd="sng" algn="ctr">
                       <a:solidFill>
-                        <a:srgbClr val="DDDDDD"/>
+                        <a:srgbClr val="D8DEE6"/>
                       </a:solidFill>
                       <a:prstDash val="solid"/>
                       <a:round/>
@@ -5665,7 +5665,7 @@
                   <a:tcPr>
                     <a:lnL w="6350" cap="flat" cmpd="sng" algn="ctr">
                       <a:solidFill>
-                        <a:srgbClr val="DDDDDD"/>
+                        <a:srgbClr val="D8DEE6"/>
                       </a:solidFill>
                       <a:prstDash val="solid"/>
                       <a:round/>
@@ -5674,7 +5674,7 @@
                     </a:lnL>
                     <a:lnR w="6350" cap="flat" cmpd="sng" algn="ctr">
                       <a:solidFill>
-                        <a:srgbClr val="DDDDDD"/>
+                        <a:srgbClr val="D8DEE6"/>
                       </a:solidFill>
                       <a:prstDash val="solid"/>
                       <a:round/>
@@ -5683,7 +5683,7 @@
                     </a:lnR>
                     <a:lnT w="6350" cap="flat" cmpd="sng" algn="ctr">
                       <a:solidFill>
-                        <a:srgbClr val="DDDDDD"/>
+                        <a:srgbClr val="D8DEE6"/>
                       </a:solidFill>
                       <a:prstDash val="solid"/>
                       <a:round/>
@@ -5692,7 +5692,7 @@
                     </a:lnT>
                     <a:lnB w="6350" cap="flat" cmpd="sng" algn="ctr">
                       <a:solidFill>
-                        <a:srgbClr val="DDDDDD"/>
+                        <a:srgbClr val="D8DEE6"/>
                       </a:solidFill>
                       <a:prstDash val="solid"/>
                       <a:round/>
@@ -5700,7 +5700,7 @@
                       <a:tailEnd type="none" w="med" len="med"/>
                     </a:lnB>
                     <a:solidFill>
-                      <a:srgbClr val="F5F3EF"/>
+                      <a:srgbClr val="F2F5F9"/>
                     </a:solidFill>
                   </a:tcPr>
                 </a:tc>
@@ -5715,7 +5715,7 @@
                       <a:r>
                         <a:rPr lang="en-US" sz="1000" dirty="0">
                           <a:solidFill>
-                            <a:srgbClr val="4A9E6B"/>
+                            <a:srgbClr val="0F9D8A"/>
                           </a:solidFill>
                           <a:latin typeface="Calibri" pitchFamily="34" charset="0"/>
                           <a:ea typeface="Calibri" pitchFamily="34" charset="-122"/>
@@ -5733,7 +5733,7 @@
                   <a:tcPr>
                     <a:lnL w="6350" cap="flat" cmpd="sng" algn="ctr">
                       <a:solidFill>
-                        <a:srgbClr val="DDDDDD"/>
+                        <a:srgbClr val="D8DEE6"/>
                       </a:solidFill>
                       <a:prstDash val="solid"/>
                       <a:round/>
@@ -5742,7 +5742,7 @@
                     </a:lnL>
                     <a:lnR w="6350" cap="flat" cmpd="sng" algn="ctr">
                       <a:solidFill>
-                        <a:srgbClr val="DDDDDD"/>
+                        <a:srgbClr val="D8DEE6"/>
                       </a:solidFill>
                       <a:prstDash val="solid"/>
                       <a:round/>
@@ -5751,7 +5751,7 @@
                     </a:lnR>
                     <a:lnT w="6350" cap="flat" cmpd="sng" algn="ctr">
                       <a:solidFill>
-                        <a:srgbClr val="DDDDDD"/>
+                        <a:srgbClr val="D8DEE6"/>
                       </a:solidFill>
                       <a:prstDash val="solid"/>
                       <a:round/>
@@ -5760,7 +5760,7 @@
                     </a:lnT>
                     <a:lnB w="6350" cap="flat" cmpd="sng" algn="ctr">
                       <a:solidFill>
-                        <a:srgbClr val="DDDDDD"/>
+                        <a:srgbClr val="D8DEE6"/>
                       </a:solidFill>
                       <a:prstDash val="solid"/>
                       <a:round/>
@@ -5768,7 +5768,7 @@
                       <a:tailEnd type="none" w="med" len="med"/>
                     </a:lnB>
                     <a:solidFill>
-                      <a:srgbClr val="F5F3EF"/>
+                      <a:srgbClr val="F2F5F9"/>
                     </a:solidFill>
                   </a:tcPr>
                 </a:tc>
@@ -5801,7 +5801,7 @@
                   <a:tcPr>
                     <a:lnL w="6350" cap="flat" cmpd="sng" algn="ctr">
                       <a:solidFill>
-                        <a:srgbClr val="DDDDDD"/>
+                        <a:srgbClr val="D8DEE6"/>
                       </a:solidFill>
                       <a:prstDash val="solid"/>
                       <a:round/>
@@ -5810,7 +5810,7 @@
                     </a:lnL>
                     <a:lnR w="6350" cap="flat" cmpd="sng" algn="ctr">
                       <a:solidFill>
-                        <a:srgbClr val="DDDDDD"/>
+                        <a:srgbClr val="D8DEE6"/>
                       </a:solidFill>
                       <a:prstDash val="solid"/>
                       <a:round/>
@@ -5819,7 +5819,7 @@
                     </a:lnR>
                     <a:lnT w="6350" cap="flat" cmpd="sng" algn="ctr">
                       <a:solidFill>
-                        <a:srgbClr val="DDDDDD"/>
+                        <a:srgbClr val="D8DEE6"/>
                       </a:solidFill>
                       <a:prstDash val="solid"/>
                       <a:round/>
@@ -5828,7 +5828,7 @@
                     </a:lnT>
                     <a:lnB w="6350" cap="flat" cmpd="sng" algn="ctr">
                       <a:solidFill>
-                        <a:srgbClr val="DDDDDD"/>
+                        <a:srgbClr val="D8DEE6"/>
                       </a:solidFill>
                       <a:prstDash val="solid"/>
                       <a:round/>
@@ -5836,7 +5836,7 @@
                       <a:tailEnd type="none" w="med" len="med"/>
                     </a:lnB>
                     <a:solidFill>
-                      <a:srgbClr val="F5F3EF"/>
+                      <a:srgbClr val="F2F5F9"/>
                     </a:solidFill>
                   </a:tcPr>
                 </a:tc>
@@ -5851,7 +5851,7 @@
                       <a:r>
                         <a:rPr lang="en-US" sz="1000" dirty="0">
                           <a:solidFill>
-                            <a:srgbClr val="C0392B"/>
+                            <a:srgbClr val="D9472B"/>
                           </a:solidFill>
                           <a:latin typeface="Calibri" pitchFamily="34" charset="0"/>
                           <a:ea typeface="Calibri" pitchFamily="34" charset="-122"/>
@@ -5869,7 +5869,7 @@
                   <a:tcPr>
                     <a:lnL w="6350" cap="flat" cmpd="sng" algn="ctr">
                       <a:solidFill>
-                        <a:srgbClr val="DDDDDD"/>
+                        <a:srgbClr val="D8DEE6"/>
                       </a:solidFill>
                       <a:prstDash val="solid"/>
                       <a:round/>
@@ -5878,7 +5878,7 @@
                     </a:lnL>
                     <a:lnR w="6350" cap="flat" cmpd="sng" algn="ctr">
                       <a:solidFill>
-                        <a:srgbClr val="DDDDDD"/>
+                        <a:srgbClr val="D8DEE6"/>
                       </a:solidFill>
                       <a:prstDash val="solid"/>
                       <a:round/>
@@ -5887,7 +5887,7 @@
                     </a:lnR>
                     <a:lnT w="6350" cap="flat" cmpd="sng" algn="ctr">
                       <a:solidFill>
-                        <a:srgbClr val="DDDDDD"/>
+                        <a:srgbClr val="D8DEE6"/>
                       </a:solidFill>
                       <a:prstDash val="solid"/>
                       <a:round/>
@@ -5896,7 +5896,7 @@
                     </a:lnT>
                     <a:lnB w="6350" cap="flat" cmpd="sng" algn="ctr">
                       <a:solidFill>
-                        <a:srgbClr val="DDDDDD"/>
+                        <a:srgbClr val="D8DEE6"/>
                       </a:solidFill>
                       <a:prstDash val="solid"/>
                       <a:round/>
@@ -5904,7 +5904,7 @@
                       <a:tailEnd type="none" w="med" len="med"/>
                     </a:lnB>
                     <a:solidFill>
-                      <a:srgbClr val="F5F3EF"/>
+                      <a:srgbClr val="F2F5F9"/>
                     </a:solidFill>
                   </a:tcPr>
                 </a:tc>
@@ -5944,7 +5944,7 @@
                   <a:tcPr>
                     <a:lnL w="6350" cap="flat" cmpd="sng" algn="ctr">
                       <a:solidFill>
-                        <a:srgbClr val="DDDDDD"/>
+                        <a:srgbClr val="D8DEE6"/>
                       </a:solidFill>
                       <a:prstDash val="solid"/>
                       <a:round/>
@@ -5953,7 +5953,7 @@
                     </a:lnL>
                     <a:lnR w="6350" cap="flat" cmpd="sng" algn="ctr">
                       <a:solidFill>
-                        <a:srgbClr val="DDDDDD"/>
+                        <a:srgbClr val="D8DEE6"/>
                       </a:solidFill>
                       <a:prstDash val="solid"/>
                       <a:round/>
@@ -5962,7 +5962,7 @@
                     </a:lnR>
                     <a:lnT w="6350" cap="flat" cmpd="sng" algn="ctr">
                       <a:solidFill>
-                        <a:srgbClr val="DDDDDD"/>
+                        <a:srgbClr val="D8DEE6"/>
                       </a:solidFill>
                       <a:prstDash val="solid"/>
                       <a:round/>
@@ -5971,7 +5971,7 @@
                     </a:lnT>
                     <a:lnB w="6350" cap="flat" cmpd="sng" algn="ctr">
                       <a:solidFill>
-                        <a:srgbClr val="DDDDDD"/>
+                        <a:srgbClr val="D8DEE6"/>
                       </a:solidFill>
                       <a:prstDash val="solid"/>
                       <a:round/>
@@ -5991,7 +5991,7 @@
                       <a:r>
                         <a:rPr lang="en-US" sz="1000" b="1" dirty="0">
                           <a:solidFill>
-                            <a:srgbClr val="4A9E6B"/>
+                            <a:srgbClr val="0F9D8A"/>
                           </a:solidFill>
                           <a:latin typeface="Calibri" pitchFamily="34" charset="0"/>
                           <a:ea typeface="Calibri" pitchFamily="34" charset="-122"/>
@@ -6009,7 +6009,7 @@
                   <a:tcPr>
                     <a:lnL w="6350" cap="flat" cmpd="sng" algn="ctr">
                       <a:solidFill>
-                        <a:srgbClr val="DDDDDD"/>
+                        <a:srgbClr val="D8DEE6"/>
                       </a:solidFill>
                       <a:prstDash val="solid"/>
                       <a:round/>
@@ -6018,7 +6018,7 @@
                     </a:lnL>
                     <a:lnR w="6350" cap="flat" cmpd="sng" algn="ctr">
                       <a:solidFill>
-                        <a:srgbClr val="DDDDDD"/>
+                        <a:srgbClr val="D8DEE6"/>
                       </a:solidFill>
                       <a:prstDash val="solid"/>
                       <a:round/>
@@ -6027,7 +6027,7 @@
                     </a:lnR>
                     <a:lnT w="6350" cap="flat" cmpd="sng" algn="ctr">
                       <a:solidFill>
-                        <a:srgbClr val="DDDDDD"/>
+                        <a:srgbClr val="D8DEE6"/>
                       </a:solidFill>
                       <a:prstDash val="solid"/>
                       <a:round/>
@@ -6036,7 +6036,7 @@
                     </a:lnT>
                     <a:lnB w="6350" cap="flat" cmpd="sng" algn="ctr">
                       <a:solidFill>
-                        <a:srgbClr val="DDDDDD"/>
+                        <a:srgbClr val="D8DEE6"/>
                       </a:solidFill>
                       <a:prstDash val="solid"/>
                       <a:round/>
@@ -6074,7 +6074,7 @@
                   <a:tcPr>
                     <a:lnL w="6350" cap="flat" cmpd="sng" algn="ctr">
                       <a:solidFill>
-                        <a:srgbClr val="DDDDDD"/>
+                        <a:srgbClr val="D8DEE6"/>
                       </a:solidFill>
                       <a:prstDash val="solid"/>
                       <a:round/>
@@ -6083,7 +6083,7 @@
                     </a:lnL>
                     <a:lnR w="6350" cap="flat" cmpd="sng" algn="ctr">
                       <a:solidFill>
-                        <a:srgbClr val="DDDDDD"/>
+                        <a:srgbClr val="D8DEE6"/>
                       </a:solidFill>
                       <a:prstDash val="solid"/>
                       <a:round/>
@@ -6092,7 +6092,7 @@
                     </a:lnR>
                     <a:lnT w="6350" cap="flat" cmpd="sng" algn="ctr">
                       <a:solidFill>
-                        <a:srgbClr val="DDDDDD"/>
+                        <a:srgbClr val="D8DEE6"/>
                       </a:solidFill>
                       <a:prstDash val="solid"/>
                       <a:round/>
@@ -6101,7 +6101,7 @@
                     </a:lnT>
                     <a:lnB w="6350" cap="flat" cmpd="sng" algn="ctr">
                       <a:solidFill>
-                        <a:srgbClr val="DDDDDD"/>
+                        <a:srgbClr val="D8DEE6"/>
                       </a:solidFill>
                       <a:prstDash val="solid"/>
                       <a:round/>
@@ -6121,7 +6121,7 @@
                       <a:r>
                         <a:rPr lang="en-US" sz="1000" b="1" dirty="0">
                           <a:solidFill>
-                            <a:srgbClr val="C0392B"/>
+                            <a:srgbClr val="D9472B"/>
                           </a:solidFill>
                           <a:latin typeface="Calibri" pitchFamily="34" charset="0"/>
                           <a:ea typeface="Calibri" pitchFamily="34" charset="-122"/>
@@ -6139,7 +6139,7 @@
                   <a:tcPr>
                     <a:lnL w="6350" cap="flat" cmpd="sng" algn="ctr">
                       <a:solidFill>
-                        <a:srgbClr val="DDDDDD"/>
+                        <a:srgbClr val="D8DEE6"/>
                       </a:solidFill>
                       <a:prstDash val="solid"/>
                       <a:round/>
@@ -6148,7 +6148,7 @@
                     </a:lnL>
                     <a:lnR w="6350" cap="flat" cmpd="sng" algn="ctr">
                       <a:solidFill>
-                        <a:srgbClr val="DDDDDD"/>
+                        <a:srgbClr val="D8DEE6"/>
                       </a:solidFill>
                       <a:prstDash val="solid"/>
                       <a:round/>
@@ -6157,7 +6157,7 @@
                     </a:lnR>
                     <a:lnT w="6350" cap="flat" cmpd="sng" algn="ctr">
                       <a:solidFill>
-                        <a:srgbClr val="DDDDDD"/>
+                        <a:srgbClr val="D8DEE6"/>
                       </a:solidFill>
                       <a:prstDash val="solid"/>
                       <a:round/>
@@ -6166,7 +6166,7 @@
                     </a:lnT>
                     <a:lnB w="6350" cap="flat" cmpd="sng" algn="ctr">
                       <a:solidFill>
-                        <a:srgbClr val="DDDDDD"/>
+                        <a:srgbClr val="D8DEE6"/>
                       </a:solidFill>
                       <a:prstDash val="solid"/>
                       <a:round/>
@@ -6211,7 +6211,7 @@
                   <a:tcPr>
                     <a:lnL w="6350" cap="flat" cmpd="sng" algn="ctr">
                       <a:solidFill>
-                        <a:srgbClr val="DDDDDD"/>
+                        <a:srgbClr val="D8DEE6"/>
                       </a:solidFill>
                       <a:prstDash val="solid"/>
                       <a:round/>
@@ -6220,7 +6220,7 @@
                     </a:lnL>
                     <a:lnR w="6350" cap="flat" cmpd="sng" algn="ctr">
                       <a:solidFill>
-                        <a:srgbClr val="DDDDDD"/>
+                        <a:srgbClr val="D8DEE6"/>
                       </a:solidFill>
                       <a:prstDash val="solid"/>
                       <a:round/>
@@ -6229,7 +6229,7 @@
                     </a:lnR>
                     <a:lnT w="6350" cap="flat" cmpd="sng" algn="ctr">
                       <a:solidFill>
-                        <a:srgbClr val="DDDDDD"/>
+                        <a:srgbClr val="D8DEE6"/>
                       </a:solidFill>
                       <a:prstDash val="solid"/>
                       <a:round/>
@@ -6238,7 +6238,7 @@
                     </a:lnT>
                     <a:lnB w="6350" cap="flat" cmpd="sng" algn="ctr">
                       <a:solidFill>
-                        <a:srgbClr val="DDDDDD"/>
+                        <a:srgbClr val="D8DEE6"/>
                       </a:solidFill>
                       <a:prstDash val="solid"/>
                       <a:round/>
@@ -6246,7 +6246,7 @@
                       <a:tailEnd type="none" w="med" len="med"/>
                     </a:lnB>
                     <a:solidFill>
-                      <a:srgbClr val="F5F3EF"/>
+                      <a:srgbClr val="F2F5F9"/>
                     </a:solidFill>
                   </a:tcPr>
                 </a:tc>
@@ -6261,7 +6261,7 @@
                       <a:r>
                         <a:rPr lang="en-US" sz="1000" b="1" dirty="0">
                           <a:solidFill>
-                            <a:srgbClr val="4A9E6B"/>
+                            <a:srgbClr val="0F9D8A"/>
                           </a:solidFill>
                           <a:latin typeface="Calibri" pitchFamily="34" charset="0"/>
                           <a:ea typeface="Calibri" pitchFamily="34" charset="-122"/>
@@ -6279,7 +6279,7 @@
                   <a:tcPr>
                     <a:lnL w="6350" cap="flat" cmpd="sng" algn="ctr">
                       <a:solidFill>
-                        <a:srgbClr val="DDDDDD"/>
+                        <a:srgbClr val="D8DEE6"/>
                       </a:solidFill>
                       <a:prstDash val="solid"/>
                       <a:round/>
@@ -6288,7 +6288,7 @@
                     </a:lnL>
                     <a:lnR w="6350" cap="flat" cmpd="sng" algn="ctr">
                       <a:solidFill>
-                        <a:srgbClr val="DDDDDD"/>
+                        <a:srgbClr val="D8DEE6"/>
                       </a:solidFill>
                       <a:prstDash val="solid"/>
                       <a:round/>
@@ -6297,7 +6297,7 @@
                     </a:lnR>
                     <a:lnT w="6350" cap="flat" cmpd="sng" algn="ctr">
                       <a:solidFill>
-                        <a:srgbClr val="DDDDDD"/>
+                        <a:srgbClr val="D8DEE6"/>
                       </a:solidFill>
                       <a:prstDash val="solid"/>
                       <a:round/>
@@ -6306,7 +6306,7 @@
                     </a:lnT>
                     <a:lnB w="6350" cap="flat" cmpd="sng" algn="ctr">
                       <a:solidFill>
-                        <a:srgbClr val="DDDDDD"/>
+                        <a:srgbClr val="D8DEE6"/>
                       </a:solidFill>
                       <a:prstDash val="solid"/>
                       <a:round/>
@@ -6314,7 +6314,7 @@
                       <a:tailEnd type="none" w="med" len="med"/>
                     </a:lnB>
                     <a:solidFill>
-                      <a:srgbClr val="F5F3EF"/>
+                      <a:srgbClr val="F2F5F9"/>
                     </a:solidFill>
                   </a:tcPr>
                 </a:tc>
@@ -6347,7 +6347,7 @@
                   <a:tcPr>
                     <a:lnL w="6350" cap="flat" cmpd="sng" algn="ctr">
                       <a:solidFill>
-                        <a:srgbClr val="DDDDDD"/>
+                        <a:srgbClr val="D8DEE6"/>
                       </a:solidFill>
                       <a:prstDash val="solid"/>
                       <a:round/>
@@ -6356,7 +6356,7 @@
                     </a:lnL>
                     <a:lnR w="6350" cap="flat" cmpd="sng" algn="ctr">
                       <a:solidFill>
-                        <a:srgbClr val="DDDDDD"/>
+                        <a:srgbClr val="D8DEE6"/>
                       </a:solidFill>
                       <a:prstDash val="solid"/>
                       <a:round/>
@@ -6365,7 +6365,7 @@
                     </a:lnR>
                     <a:lnT w="6350" cap="flat" cmpd="sng" algn="ctr">
                       <a:solidFill>
-                        <a:srgbClr val="DDDDDD"/>
+                        <a:srgbClr val="D8DEE6"/>
                       </a:solidFill>
                       <a:prstDash val="solid"/>
                       <a:round/>
@@ -6374,7 +6374,7 @@
                     </a:lnT>
                     <a:lnB w="6350" cap="flat" cmpd="sng" algn="ctr">
                       <a:solidFill>
-                        <a:srgbClr val="DDDDDD"/>
+                        <a:srgbClr val="D8DEE6"/>
                       </a:solidFill>
                       <a:prstDash val="solid"/>
                       <a:round/>
@@ -6382,7 +6382,7 @@
                       <a:tailEnd type="none" w="med" len="med"/>
                     </a:lnB>
                     <a:solidFill>
-                      <a:srgbClr val="F5F3EF"/>
+                      <a:srgbClr val="F2F5F9"/>
                     </a:solidFill>
                   </a:tcPr>
                 </a:tc>
@@ -6415,7 +6415,7 @@
                   <a:tcPr>
                     <a:lnL w="6350" cap="flat" cmpd="sng" algn="ctr">
                       <a:solidFill>
-                        <a:srgbClr val="DDDDDD"/>
+                        <a:srgbClr val="D8DEE6"/>
                       </a:solidFill>
                       <a:prstDash val="solid"/>
                       <a:round/>
@@ -6424,7 +6424,7 @@
                     </a:lnL>
                     <a:lnR w="6350" cap="flat" cmpd="sng" algn="ctr">
                       <a:solidFill>
-                        <a:srgbClr val="DDDDDD"/>
+                        <a:srgbClr val="D8DEE6"/>
                       </a:solidFill>
                       <a:prstDash val="solid"/>
                       <a:round/>
@@ -6433,7 +6433,7 @@
                     </a:lnR>
                     <a:lnT w="6350" cap="flat" cmpd="sng" algn="ctr">
                       <a:solidFill>
-                        <a:srgbClr val="DDDDDD"/>
+                        <a:srgbClr val="D8DEE6"/>
                       </a:solidFill>
                       <a:prstDash val="solid"/>
                       <a:round/>
@@ -6442,7 +6442,7 @@
                     </a:lnT>
                     <a:lnB w="6350" cap="flat" cmpd="sng" algn="ctr">
                       <a:solidFill>
-                        <a:srgbClr val="DDDDDD"/>
+                        <a:srgbClr val="D8DEE6"/>
                       </a:solidFill>
                       <a:prstDash val="solid"/>
                       <a:round/>
@@ -6450,7 +6450,7 @@
                       <a:tailEnd type="none" w="med" len="med"/>
                     </a:lnB>
                     <a:solidFill>
-                      <a:srgbClr val="F5F3EF"/>
+                      <a:srgbClr val="F2F5F9"/>
                     </a:solidFill>
                   </a:tcPr>
                 </a:tc>
@@ -6490,7 +6490,7 @@
                   <a:tcPr>
                     <a:lnL w="6350" cap="flat" cmpd="sng" algn="ctr">
                       <a:solidFill>
-                        <a:srgbClr val="DDDDDD"/>
+                        <a:srgbClr val="D8DEE6"/>
                       </a:solidFill>
                       <a:prstDash val="solid"/>
                       <a:round/>
@@ -6499,7 +6499,7 @@
                     </a:lnL>
                     <a:lnR w="6350" cap="flat" cmpd="sng" algn="ctr">
                       <a:solidFill>
-                        <a:srgbClr val="DDDDDD"/>
+                        <a:srgbClr val="D8DEE6"/>
                       </a:solidFill>
                       <a:prstDash val="solid"/>
                       <a:round/>
@@ -6508,7 +6508,7 @@
                     </a:lnR>
                     <a:lnT w="6350" cap="flat" cmpd="sng" algn="ctr">
                       <a:solidFill>
-                        <a:srgbClr val="DDDDDD"/>
+                        <a:srgbClr val="D8DEE6"/>
                       </a:solidFill>
                       <a:prstDash val="solid"/>
                       <a:round/>
@@ -6517,7 +6517,7 @@
                     </a:lnT>
                     <a:lnB w="6350" cap="flat" cmpd="sng" algn="ctr">
                       <a:solidFill>
-                        <a:srgbClr val="DDDDDD"/>
+                        <a:srgbClr val="D8DEE6"/>
                       </a:solidFill>
                       <a:prstDash val="solid"/>
                       <a:round/>
@@ -6537,7 +6537,7 @@
                       <a:r>
                         <a:rPr lang="en-US" sz="1000" b="1" dirty="0">
                           <a:solidFill>
-                            <a:srgbClr val="4A9E6B"/>
+                            <a:srgbClr val="0F9D8A"/>
                           </a:solidFill>
                           <a:latin typeface="Calibri" pitchFamily="34" charset="0"/>
                           <a:ea typeface="Calibri" pitchFamily="34" charset="-122"/>
@@ -6555,7 +6555,7 @@
                   <a:tcPr>
                     <a:lnL w="6350" cap="flat" cmpd="sng" algn="ctr">
                       <a:solidFill>
-                        <a:srgbClr val="DDDDDD"/>
+                        <a:srgbClr val="D8DEE6"/>
                       </a:solidFill>
                       <a:prstDash val="solid"/>
                       <a:round/>
@@ -6564,7 +6564,7 @@
                     </a:lnL>
                     <a:lnR w="6350" cap="flat" cmpd="sng" algn="ctr">
                       <a:solidFill>
-                        <a:srgbClr val="DDDDDD"/>
+                        <a:srgbClr val="D8DEE6"/>
                       </a:solidFill>
                       <a:prstDash val="solid"/>
                       <a:round/>
@@ -6573,7 +6573,7 @@
                     </a:lnR>
                     <a:lnT w="6350" cap="flat" cmpd="sng" algn="ctr">
                       <a:solidFill>
-                        <a:srgbClr val="DDDDDD"/>
+                        <a:srgbClr val="D8DEE6"/>
                       </a:solidFill>
                       <a:prstDash val="solid"/>
                       <a:round/>
@@ -6582,7 +6582,7 @@
                     </a:lnT>
                     <a:lnB w="6350" cap="flat" cmpd="sng" algn="ctr">
                       <a:solidFill>
-                        <a:srgbClr val="DDDDDD"/>
+                        <a:srgbClr val="D8DEE6"/>
                       </a:solidFill>
                       <a:prstDash val="solid"/>
                       <a:round/>
@@ -6620,7 +6620,7 @@
                   <a:tcPr>
                     <a:lnL w="6350" cap="flat" cmpd="sng" algn="ctr">
                       <a:solidFill>
-                        <a:srgbClr val="DDDDDD"/>
+                        <a:srgbClr val="D8DEE6"/>
                       </a:solidFill>
                       <a:prstDash val="solid"/>
                       <a:round/>
@@ -6629,7 +6629,7 @@
                     </a:lnL>
                     <a:lnR w="6350" cap="flat" cmpd="sng" algn="ctr">
                       <a:solidFill>
-                        <a:srgbClr val="DDDDDD"/>
+                        <a:srgbClr val="D8DEE6"/>
                       </a:solidFill>
                       <a:prstDash val="solid"/>
                       <a:round/>
@@ -6638,7 +6638,7 @@
                     </a:lnR>
                     <a:lnT w="6350" cap="flat" cmpd="sng" algn="ctr">
                       <a:solidFill>
-                        <a:srgbClr val="DDDDDD"/>
+                        <a:srgbClr val="D8DEE6"/>
                       </a:solidFill>
                       <a:prstDash val="solid"/>
                       <a:round/>
@@ -6647,7 +6647,7 @@
                     </a:lnT>
                     <a:lnB w="6350" cap="flat" cmpd="sng" algn="ctr">
                       <a:solidFill>
-                        <a:srgbClr val="DDDDDD"/>
+                        <a:srgbClr val="D8DEE6"/>
                       </a:solidFill>
                       <a:prstDash val="solid"/>
                       <a:round/>
@@ -6685,7 +6685,7 @@
                   <a:tcPr>
                     <a:lnL w="6350" cap="flat" cmpd="sng" algn="ctr">
                       <a:solidFill>
-                        <a:srgbClr val="DDDDDD"/>
+                        <a:srgbClr val="D8DEE6"/>
                       </a:solidFill>
                       <a:prstDash val="solid"/>
                       <a:round/>
@@ -6694,7 +6694,7 @@
                     </a:lnL>
                     <a:lnR w="6350" cap="flat" cmpd="sng" algn="ctr">
                       <a:solidFill>
-                        <a:srgbClr val="DDDDDD"/>
+                        <a:srgbClr val="D8DEE6"/>
                       </a:solidFill>
                       <a:prstDash val="solid"/>
                       <a:round/>
@@ -6703,7 +6703,7 @@
                     </a:lnR>
                     <a:lnT w="6350" cap="flat" cmpd="sng" algn="ctr">
                       <a:solidFill>
-                        <a:srgbClr val="DDDDDD"/>
+                        <a:srgbClr val="D8DEE6"/>
                       </a:solidFill>
                       <a:prstDash val="solid"/>
                       <a:round/>
@@ -6712,7 +6712,7 @@
                     </a:lnT>
                     <a:lnB w="6350" cap="flat" cmpd="sng" algn="ctr">
                       <a:solidFill>
-                        <a:srgbClr val="DDDDDD"/>
+                        <a:srgbClr val="D8DEE6"/>
                       </a:solidFill>
                       <a:prstDash val="solid"/>
                       <a:round/>
@@ -6780,7 +6780,7 @@
             <a:avLst/>
           </a:prstGeom>
           <a:solidFill>
-            <a:srgbClr val="B85042"/>
+            <a:srgbClr val="2F6690"/>
           </a:solidFill>
           <a:ln/>
         </p:spPr>
@@ -6819,11 +6819,11 @@
             <a:r>
               <a:rPr lang="en-US" sz="1400" b="1" dirty="0">
                 <a:solidFill>
-                  <a:srgbClr val="B85042"/>
+                  <a:srgbClr val="2F6690"/>
                 </a:solidFill>
-                <a:latin typeface="Georgia" pitchFamily="34" charset="0"/>
-                <a:ea typeface="Georgia" pitchFamily="34" charset="-122"/>
-                <a:cs typeface="Georgia" pitchFamily="34" charset="-120"/>
+                <a:latin typeface="Calibri" pitchFamily="34" charset="0"/>
+                <a:ea typeface="Calibri" pitchFamily="34" charset="-122"/>
+                <a:cs typeface="Calibri" pitchFamily="34" charset="-120"/>
               </a:rPr>
               <a:t>Expansion Recommendation</a:t>
             </a:r>
@@ -6858,7 +6858,7 @@
             <a:r>
               <a:rPr lang="en-US" sz="1100" b="1" dirty="0">
                 <a:solidFill>
-                  <a:srgbClr val="2D2D2D"/>
+                  <a:srgbClr val="1F2A37"/>
                 </a:solidFill>
                 <a:latin typeface="Calibri" pitchFamily="34" charset="0"/>
                 <a:ea typeface="Calibri" pitchFamily="34" charset="-122"/>
@@ -6875,7 +6875,7 @@
             <a:r>
               <a:rPr lang="en-US" sz="1100" dirty="0">
                 <a:solidFill>
-                  <a:srgbClr val="2D2D2D"/>
+                  <a:srgbClr val="1F2A37"/>
                 </a:solidFill>
                 <a:latin typeface="Calibri" pitchFamily="34" charset="0"/>
                 <a:ea typeface="Calibri" pitchFamily="34" charset="-122"/>
@@ -6892,7 +6892,7 @@
             <a:r>
               <a:rPr lang="en-US" sz="1100" i="1" dirty="0">
                 <a:solidFill>
-                  <a:srgbClr val="7A7A7A"/>
+                  <a:srgbClr val="5F6B7A"/>
                 </a:solidFill>
                 <a:latin typeface="Calibri" pitchFamily="34" charset="0"/>
                 <a:ea typeface="Calibri" pitchFamily="34" charset="-122"/>
@@ -6918,7 +6918,7 @@
     <p:bg>
       <p:bgPr>
         <a:solidFill>
-          <a:srgbClr val="FAF8F5"/>
+          <a:srgbClr val="FFFFFF"/>
         </a:solidFill>
         <a:effectLst/>
       </p:bgPr>
@@ -6952,7 +6952,7 @@
             <a:avLst/>
           </a:prstGeom>
           <a:solidFill>
-            <a:srgbClr val="3B2F2F"/>
+            <a:srgbClr val="1B2A41"/>
           </a:solidFill>
           <a:ln/>
         </p:spPr>
@@ -7017,9 +7017,9 @@
                 <a:solidFill>
                   <a:srgbClr val="FFFFFF"/>
                 </a:solidFill>
-                <a:latin typeface="Georgia" pitchFamily="34" charset="0"/>
-                <a:ea typeface="Georgia" pitchFamily="34" charset="-122"/>
-                <a:cs typeface="Georgia" pitchFamily="34" charset="-120"/>
+                <a:latin typeface="Calibri" pitchFamily="34" charset="0"/>
+                <a:ea typeface="Calibri" pitchFamily="34" charset="-122"/>
+                <a:cs typeface="Calibri" pitchFamily="34" charset="-120"/>
               </a:rPr>
               <a:t>Q2: The Real Story with Eastleigh</a:t>
             </a:r>
@@ -7112,7 +7112,7 @@
             <a:avLst/>
           </a:prstGeom>
           <a:solidFill>
-            <a:srgbClr val="C0392B"/>
+            <a:srgbClr val="D9472B"/>
           </a:solidFill>
           <a:ln/>
         </p:spPr>
@@ -7151,11 +7151,11 @@
             <a:r>
               <a:rPr lang="en-US" sz="1300" b="1" dirty="0">
                 <a:solidFill>
-                  <a:srgbClr val="C0392B"/>
+                  <a:srgbClr val="D9472B"/>
                 </a:solidFill>
-                <a:latin typeface="Georgia" pitchFamily="34" charset="0"/>
-                <a:ea typeface="Georgia" pitchFamily="34" charset="-122"/>
-                <a:cs typeface="Georgia" pitchFamily="34" charset="-120"/>
+                <a:latin typeface="Calibri" pitchFamily="34" charset="0"/>
+                <a:ea typeface="Calibri" pitchFamily="34" charset="-122"/>
+                <a:cs typeface="Calibri" pitchFamily="34" charset="-120"/>
               </a:rPr>
               <a:t>CFO's View (Volume)</a:t>
             </a:r>
@@ -7190,7 +7190,7 @@
             <a:r>
               <a:rPr lang="en-US" sz="1100" dirty="0">
                 <a:solidFill>
-                  <a:srgbClr val="2D2D2D"/>
+                  <a:srgbClr val="1F2A37"/>
                 </a:solidFill>
                 <a:latin typeface="Calibri" pitchFamily="34" charset="0"/>
                 <a:ea typeface="Calibri" pitchFamily="34" charset="-122"/>
@@ -7207,7 +7207,7 @@
             <a:r>
               <a:rPr lang="en-US" sz="1100" dirty="0">
                 <a:solidFill>
-                  <a:srgbClr val="2D2D2D"/>
+                  <a:srgbClr val="1F2A37"/>
                 </a:solidFill>
                 <a:latin typeface="Calibri" pitchFamily="34" charset="0"/>
                 <a:ea typeface="Calibri" pitchFamily="34" charset="-122"/>
@@ -7224,7 +7224,7 @@
             <a:r>
               <a:rPr lang="en-US" sz="1100" dirty="0">
                 <a:solidFill>
-                  <a:srgbClr val="2D2D2D"/>
+                  <a:srgbClr val="1F2A37"/>
                 </a:solidFill>
                 <a:latin typeface="Calibri" pitchFamily="34" charset="0"/>
                 <a:ea typeface="Calibri" pitchFamily="34" charset="-122"/>
@@ -7285,7 +7285,7 @@
             <a:avLst/>
           </a:prstGeom>
           <a:solidFill>
-            <a:srgbClr val="4A9E6B"/>
+            <a:srgbClr val="0F9D8A"/>
           </a:solidFill>
           <a:ln/>
         </p:spPr>
@@ -7324,11 +7324,11 @@
             <a:r>
               <a:rPr lang="en-US" sz="1300" b="1" dirty="0">
                 <a:solidFill>
-                  <a:srgbClr val="4A9E6B"/>
+                  <a:srgbClr val="0F9D8A"/>
                 </a:solidFill>
-                <a:latin typeface="Georgia" pitchFamily="34" charset="0"/>
-                <a:ea typeface="Georgia" pitchFamily="34" charset="-122"/>
-                <a:cs typeface="Georgia" pitchFamily="34" charset="-120"/>
+                <a:latin typeface="Calibri" pitchFamily="34" charset="0"/>
+                <a:ea typeface="Calibri" pitchFamily="34" charset="-122"/>
+                <a:cs typeface="Calibri" pitchFamily="34" charset="-120"/>
               </a:rPr>
               <a:t>GM's View (Quality &amp; Growth)</a:t>
             </a:r>
@@ -7363,7 +7363,7 @@
             <a:r>
               <a:rPr lang="en-US" sz="1100" dirty="0">
                 <a:solidFill>
-                  <a:srgbClr val="2D2D2D"/>
+                  <a:srgbClr val="1F2A37"/>
                 </a:solidFill>
                 <a:latin typeface="Calibri" pitchFamily="34" charset="0"/>
                 <a:ea typeface="Calibri" pitchFamily="34" charset="-122"/>
@@ -7380,7 +7380,7 @@
             <a:r>
               <a:rPr lang="en-US" sz="1100" dirty="0">
                 <a:solidFill>
-                  <a:srgbClr val="2D2D2D"/>
+                  <a:srgbClr val="1F2A37"/>
                 </a:solidFill>
                 <a:latin typeface="Calibri" pitchFamily="34" charset="0"/>
                 <a:ea typeface="Calibri" pitchFamily="34" charset="-122"/>
@@ -7397,7 +7397,7 @@
             <a:r>
               <a:rPr lang="en-US" sz="1100" dirty="0">
                 <a:solidFill>
-                  <a:srgbClr val="2D2D2D"/>
+                  <a:srgbClr val="1F2A37"/>
                 </a:solidFill>
                 <a:latin typeface="Calibri" pitchFamily="34" charset="0"/>
                 <a:ea typeface="Calibri" pitchFamily="34" charset="-122"/>
@@ -7414,7 +7414,7 @@
             <a:r>
               <a:rPr lang="en-US" sz="1100" dirty="0">
                 <a:solidFill>
-                  <a:srgbClr val="2D2D2D"/>
+                  <a:srgbClr val="1F2A37"/>
                 </a:solidFill>
                 <a:latin typeface="Calibri" pitchFamily="34" charset="0"/>
                 <a:ea typeface="Calibri" pitchFamily="34" charset="-122"/>
@@ -7487,11 +7487,11 @@
             <a:r>
               <a:rPr lang="en-US" sz="2000" b="1" dirty="0">
                 <a:solidFill>
-                  <a:srgbClr val="4A9E6B"/>
+                  <a:srgbClr val="0F9D8A"/>
                 </a:solidFill>
-                <a:latin typeface="Georgia" pitchFamily="34" charset="0"/>
-                <a:ea typeface="Georgia" pitchFamily="34" charset="-122"/>
-                <a:cs typeface="Georgia" pitchFamily="34" charset="-120"/>
+                <a:latin typeface="Calibri" pitchFamily="34" charset="0"/>
+                <a:ea typeface="Calibri" pitchFamily="34" charset="-122"/>
+                <a:cs typeface="Calibri" pitchFamily="34" charset="-120"/>
               </a:rPr>
               <a:t>4.13</a:t>
             </a:r>
@@ -7526,7 +7526,7 @@
             <a:r>
               <a:rPr lang="en-US" sz="900" dirty="0">
                 <a:solidFill>
-                  <a:srgbClr val="7A7A7A"/>
+                  <a:srgbClr val="5F6B7A"/>
                 </a:solidFill>
                 <a:latin typeface="Calibri" pitchFamily="34" charset="0"/>
                 <a:ea typeface="Calibri" pitchFamily="34" charset="-122"/>
@@ -7543,7 +7543,7 @@
             <a:r>
               <a:rPr lang="en-US" sz="900" dirty="0">
                 <a:solidFill>
-                  <a:srgbClr val="7A7A7A"/>
+                  <a:srgbClr val="5F6B7A"/>
                 </a:solidFill>
                 <a:latin typeface="Calibri" pitchFamily="34" charset="0"/>
                 <a:ea typeface="Calibri" pitchFamily="34" charset="-122"/>
@@ -7616,11 +7616,11 @@
             <a:r>
               <a:rPr lang="en-US" sz="2000" b="1" dirty="0">
                 <a:solidFill>
-                  <a:srgbClr val="4A9E6B"/>
+                  <a:srgbClr val="0F9D8A"/>
                 </a:solidFill>
-                <a:latin typeface="Georgia" pitchFamily="34" charset="0"/>
-                <a:ea typeface="Georgia" pitchFamily="34" charset="-122"/>
-                <a:cs typeface="Georgia" pitchFamily="34" charset="-120"/>
+                <a:latin typeface="Calibri" pitchFamily="34" charset="0"/>
+                <a:ea typeface="Calibri" pitchFamily="34" charset="-122"/>
+                <a:cs typeface="Calibri" pitchFamily="34" charset="-120"/>
               </a:rPr>
               <a:t>56 min</a:t>
             </a:r>
@@ -7655,7 +7655,7 @@
             <a:r>
               <a:rPr lang="en-US" sz="900" dirty="0">
                 <a:solidFill>
-                  <a:srgbClr val="7A7A7A"/>
+                  <a:srgbClr val="5F6B7A"/>
                 </a:solidFill>
                 <a:latin typeface="Calibri" pitchFamily="34" charset="0"/>
                 <a:ea typeface="Calibri" pitchFamily="34" charset="-122"/>
@@ -7672,7 +7672,7 @@
             <a:r>
               <a:rPr lang="en-US" sz="900" dirty="0">
                 <a:solidFill>
-                  <a:srgbClr val="7A7A7A"/>
+                  <a:srgbClr val="5F6B7A"/>
                 </a:solidFill>
                 <a:latin typeface="Calibri" pitchFamily="34" charset="0"/>
                 <a:ea typeface="Calibri" pitchFamily="34" charset="-122"/>
@@ -7745,11 +7745,11 @@
             <a:r>
               <a:rPr lang="en-US" sz="2000" b="1" dirty="0">
                 <a:solidFill>
-                  <a:srgbClr val="4A9E6B"/>
+                  <a:srgbClr val="0F9D8A"/>
                 </a:solidFill>
-                <a:latin typeface="Georgia" pitchFamily="34" charset="0"/>
-                <a:ea typeface="Georgia" pitchFamily="34" charset="-122"/>
-                <a:cs typeface="Georgia" pitchFamily="34" charset="-120"/>
+                <a:latin typeface="Calibri" pitchFamily="34" charset="0"/>
+                <a:ea typeface="Calibri" pitchFamily="34" charset="-122"/>
+                <a:cs typeface="Calibri" pitchFamily="34" charset="-120"/>
               </a:rPr>
               <a:t>+38%</a:t>
             </a:r>
@@ -7784,7 +7784,7 @@
             <a:r>
               <a:rPr lang="en-US" sz="900" dirty="0">
                 <a:solidFill>
-                  <a:srgbClr val="7A7A7A"/>
+                  <a:srgbClr val="5F6B7A"/>
                 </a:solidFill>
                 <a:latin typeface="Calibri" pitchFamily="34" charset="0"/>
                 <a:ea typeface="Calibri" pitchFamily="34" charset="-122"/>
@@ -7801,7 +7801,7 @@
             <a:r>
               <a:rPr lang="en-US" sz="900" dirty="0">
                 <a:solidFill>
-                  <a:srgbClr val="7A7A7A"/>
+                  <a:srgbClr val="5F6B7A"/>
                 </a:solidFill>
                 <a:latin typeface="Calibri" pitchFamily="34" charset="0"/>
                 <a:ea typeface="Calibri" pitchFamily="34" charset="-122"/>
@@ -7874,11 +7874,11 @@
             <a:r>
               <a:rPr lang="en-US" sz="2000" b="1" dirty="0">
                 <a:solidFill>
-                  <a:srgbClr val="4A9E6B"/>
+                  <a:srgbClr val="0F9D8A"/>
                 </a:solidFill>
-                <a:latin typeface="Georgia" pitchFamily="34" charset="0"/>
-                <a:ea typeface="Georgia" pitchFamily="34" charset="-122"/>
-                <a:cs typeface="Georgia" pitchFamily="34" charset="-120"/>
+                <a:latin typeface="Calibri" pitchFamily="34" charset="0"/>
+                <a:ea typeface="Calibri" pitchFamily="34" charset="-122"/>
+                <a:cs typeface="Calibri" pitchFamily="34" charset="-120"/>
               </a:rPr>
               <a:t>KES 722K</a:t>
             </a:r>
@@ -7913,7 +7913,7 @@
             <a:r>
               <a:rPr lang="en-US" sz="900" dirty="0">
                 <a:solidFill>
-                  <a:srgbClr val="7A7A7A"/>
+                  <a:srgbClr val="5F6B7A"/>
                 </a:solidFill>
                 <a:latin typeface="Calibri" pitchFamily="34" charset="0"/>
                 <a:ea typeface="Calibri" pitchFamily="34" charset="-122"/>
@@ -7930,7 +7930,7 @@
             <a:r>
               <a:rPr lang="en-US" sz="900" dirty="0">
                 <a:solidFill>
-                  <a:srgbClr val="7A7A7A"/>
+                  <a:srgbClr val="5F6B7A"/>
                 </a:solidFill>
                 <a:latin typeface="Calibri" pitchFamily="34" charset="0"/>
                 <a:ea typeface="Calibri" pitchFamily="34" charset="-122"/>
@@ -7992,7 +7992,7 @@
     <p:bg>
       <p:bgPr>
         <a:solidFill>
-          <a:srgbClr val="FAF8F5"/>
+          <a:srgbClr val="FFFFFF"/>
         </a:solidFill>
         <a:effectLst/>
       </p:bgPr>
@@ -8026,7 +8026,7 @@
             <a:avLst/>
           </a:prstGeom>
           <a:solidFill>
-            <a:srgbClr val="3B2F2F"/>
+            <a:srgbClr val="1B2A41"/>
           </a:solidFill>
           <a:ln/>
         </p:spPr>
@@ -8067,9 +8067,9 @@
                 <a:solidFill>
                   <a:srgbClr val="FFFFFF"/>
                 </a:solidFill>
-                <a:latin typeface="Georgia" pitchFamily="34" charset="0"/>
-                <a:ea typeface="Georgia" pitchFamily="34" charset="-122"/>
-                <a:cs typeface="Georgia" pitchFamily="34" charset="-120"/>
+                <a:latin typeface="Calibri" pitchFamily="34" charset="0"/>
+                <a:ea typeface="Calibri" pitchFamily="34" charset="-122"/>
+                <a:cs typeface="Calibri" pitchFamily="34" charset="-120"/>
               </a:rPr>
               <a:t>Eastleigh Is the Only Location With Consistent Growth</a:t>
             </a:r>
@@ -8104,11 +8104,11 @@
             <a:r>
               <a:rPr lang="en-US" sz="1300" b="1" dirty="0">
                 <a:solidFill>
-                  <a:srgbClr val="2D2D2D"/>
+                  <a:srgbClr val="1F2A37"/>
                 </a:solidFill>
-                <a:latin typeface="Georgia" pitchFamily="34" charset="0"/>
-                <a:ea typeface="Georgia" pitchFamily="34" charset="-122"/>
-                <a:cs typeface="Georgia" pitchFamily="34" charset="-120"/>
+                <a:latin typeface="Calibri" pitchFamily="34" charset="0"/>
+                <a:ea typeface="Calibri" pitchFamily="34" charset="-122"/>
+                <a:cs typeface="Calibri" pitchFamily="34" charset="-120"/>
               </a:rPr>
               <a:t>Month-over-Month Order Growth</a:t>
             </a:r>
@@ -8198,7 +8198,7 @@
                   <a:tcPr>
                     <a:lnL w="6350" cap="flat" cmpd="sng" algn="ctr">
                       <a:solidFill>
-                        <a:srgbClr val="DDDDDD"/>
+                        <a:srgbClr val="D8DEE6"/>
                       </a:solidFill>
                       <a:prstDash val="solid"/>
                       <a:round/>
@@ -8207,7 +8207,7 @@
                     </a:lnL>
                     <a:lnR w="6350" cap="flat" cmpd="sng" algn="ctr">
                       <a:solidFill>
-                        <a:srgbClr val="DDDDDD"/>
+                        <a:srgbClr val="D8DEE6"/>
                       </a:solidFill>
                       <a:prstDash val="solid"/>
                       <a:round/>
@@ -8216,7 +8216,7 @@
                     </a:lnR>
                     <a:lnT w="6350" cap="flat" cmpd="sng" algn="ctr">
                       <a:solidFill>
-                        <a:srgbClr val="DDDDDD"/>
+                        <a:srgbClr val="D8DEE6"/>
                       </a:solidFill>
                       <a:prstDash val="solid"/>
                       <a:round/>
@@ -8225,7 +8225,7 @@
                     </a:lnT>
                     <a:lnB w="6350" cap="flat" cmpd="sng" algn="ctr">
                       <a:solidFill>
-                        <a:srgbClr val="DDDDDD"/>
+                        <a:srgbClr val="D8DEE6"/>
                       </a:solidFill>
                       <a:prstDash val="solid"/>
                       <a:round/>
@@ -8233,7 +8233,7 @@
                       <a:tailEnd type="none" w="med" len="med"/>
                     </a:lnB>
                     <a:solidFill>
-                      <a:srgbClr val="B85042"/>
+                      <a:srgbClr val="2F6690"/>
                     </a:solidFill>
                   </a:tcPr>
                 </a:tc>
@@ -8266,7 +8266,7 @@
                   <a:tcPr>
                     <a:lnL w="6350" cap="flat" cmpd="sng" algn="ctr">
                       <a:solidFill>
-                        <a:srgbClr val="DDDDDD"/>
+                        <a:srgbClr val="D8DEE6"/>
                       </a:solidFill>
                       <a:prstDash val="solid"/>
                       <a:round/>
@@ -8275,7 +8275,7 @@
                     </a:lnL>
                     <a:lnR w="6350" cap="flat" cmpd="sng" algn="ctr">
                       <a:solidFill>
-                        <a:srgbClr val="DDDDDD"/>
+                        <a:srgbClr val="D8DEE6"/>
                       </a:solidFill>
                       <a:prstDash val="solid"/>
                       <a:round/>
@@ -8284,7 +8284,7 @@
                     </a:lnR>
                     <a:lnT w="6350" cap="flat" cmpd="sng" algn="ctr">
                       <a:solidFill>
-                        <a:srgbClr val="DDDDDD"/>
+                        <a:srgbClr val="D8DEE6"/>
                       </a:solidFill>
                       <a:prstDash val="solid"/>
                       <a:round/>
@@ -8293,7 +8293,7 @@
                     </a:lnT>
                     <a:lnB w="6350" cap="flat" cmpd="sng" algn="ctr">
                       <a:solidFill>
-                        <a:srgbClr val="DDDDDD"/>
+                        <a:srgbClr val="D8DEE6"/>
                       </a:solidFill>
                       <a:prstDash val="solid"/>
                       <a:round/>
@@ -8301,7 +8301,7 @@
                       <a:tailEnd type="none" w="med" len="med"/>
                     </a:lnB>
                     <a:solidFill>
-                      <a:srgbClr val="B85042"/>
+                      <a:srgbClr val="2F6690"/>
                     </a:solidFill>
                   </a:tcPr>
                 </a:tc>
@@ -8334,7 +8334,7 @@
                   <a:tcPr>
                     <a:lnL w="6350" cap="flat" cmpd="sng" algn="ctr">
                       <a:solidFill>
-                        <a:srgbClr val="DDDDDD"/>
+                        <a:srgbClr val="D8DEE6"/>
                       </a:solidFill>
                       <a:prstDash val="solid"/>
                       <a:round/>
@@ -8343,7 +8343,7 @@
                     </a:lnL>
                     <a:lnR w="6350" cap="flat" cmpd="sng" algn="ctr">
                       <a:solidFill>
-                        <a:srgbClr val="DDDDDD"/>
+                        <a:srgbClr val="D8DEE6"/>
                       </a:solidFill>
                       <a:prstDash val="solid"/>
                       <a:round/>
@@ -8352,7 +8352,7 @@
                     </a:lnR>
                     <a:lnT w="6350" cap="flat" cmpd="sng" algn="ctr">
                       <a:solidFill>
-                        <a:srgbClr val="DDDDDD"/>
+                        <a:srgbClr val="D8DEE6"/>
                       </a:solidFill>
                       <a:prstDash val="solid"/>
                       <a:round/>
@@ -8361,7 +8361,7 @@
                     </a:lnT>
                     <a:lnB w="6350" cap="flat" cmpd="sng" algn="ctr">
                       <a:solidFill>
-                        <a:srgbClr val="DDDDDD"/>
+                        <a:srgbClr val="D8DEE6"/>
                       </a:solidFill>
                       <a:prstDash val="solid"/>
                       <a:round/>
@@ -8369,7 +8369,7 @@
                       <a:tailEnd type="none" w="med" len="med"/>
                     </a:lnB>
                     <a:solidFill>
-                      <a:srgbClr val="B85042"/>
+                      <a:srgbClr val="2F6690"/>
                     </a:solidFill>
                   </a:tcPr>
                 </a:tc>
@@ -8402,7 +8402,7 @@
                   <a:tcPr>
                     <a:lnL w="6350" cap="flat" cmpd="sng" algn="ctr">
                       <a:solidFill>
-                        <a:srgbClr val="DDDDDD"/>
+                        <a:srgbClr val="D8DEE6"/>
                       </a:solidFill>
                       <a:prstDash val="solid"/>
                       <a:round/>
@@ -8411,7 +8411,7 @@
                     </a:lnL>
                     <a:lnR w="6350" cap="flat" cmpd="sng" algn="ctr">
                       <a:solidFill>
-                        <a:srgbClr val="DDDDDD"/>
+                        <a:srgbClr val="D8DEE6"/>
                       </a:solidFill>
                       <a:prstDash val="solid"/>
                       <a:round/>
@@ -8420,7 +8420,7 @@
                     </a:lnR>
                     <a:lnT w="6350" cap="flat" cmpd="sng" algn="ctr">
                       <a:solidFill>
-                        <a:srgbClr val="DDDDDD"/>
+                        <a:srgbClr val="D8DEE6"/>
                       </a:solidFill>
                       <a:prstDash val="solid"/>
                       <a:round/>
@@ -8429,7 +8429,7 @@
                     </a:lnT>
                     <a:lnB w="6350" cap="flat" cmpd="sng" algn="ctr">
                       <a:solidFill>
-                        <a:srgbClr val="DDDDDD"/>
+                        <a:srgbClr val="D8DEE6"/>
                       </a:solidFill>
                       <a:prstDash val="solid"/>
                       <a:round/>
@@ -8437,7 +8437,7 @@
                       <a:tailEnd type="none" w="med" len="med"/>
                     </a:lnB>
                     <a:solidFill>
-                      <a:srgbClr val="B85042"/>
+                      <a:srgbClr val="2F6690"/>
                     </a:solidFill>
                   </a:tcPr>
                 </a:tc>
@@ -8459,7 +8459,7 @@
                       <a:r>
                         <a:rPr lang="en-US" sz="900" dirty="0">
                           <a:solidFill>
-                            <a:srgbClr val="2D2D2D"/>
+                            <a:srgbClr val="1F2A37"/>
                           </a:solidFill>
                           <a:latin typeface="Calibri" pitchFamily="34" charset="0"/>
                           <a:ea typeface="Calibri" pitchFamily="34" charset="-122"/>
@@ -8477,7 +8477,7 @@
                   <a:tcPr>
                     <a:lnL w="6350" cap="flat" cmpd="sng" algn="ctr">
                       <a:solidFill>
-                        <a:srgbClr val="DDDDDD"/>
+                        <a:srgbClr val="D8DEE6"/>
                       </a:solidFill>
                       <a:prstDash val="solid"/>
                       <a:round/>
@@ -8486,7 +8486,7 @@
                     </a:lnL>
                     <a:lnR w="6350" cap="flat" cmpd="sng" algn="ctr">
                       <a:solidFill>
-                        <a:srgbClr val="DDDDDD"/>
+                        <a:srgbClr val="D8DEE6"/>
                       </a:solidFill>
                       <a:prstDash val="solid"/>
                       <a:round/>
@@ -8495,7 +8495,7 @@
                     </a:lnR>
                     <a:lnT w="6350" cap="flat" cmpd="sng" algn="ctr">
                       <a:solidFill>
-                        <a:srgbClr val="DDDDDD"/>
+                        <a:srgbClr val="D8DEE6"/>
                       </a:solidFill>
                       <a:prstDash val="solid"/>
                       <a:round/>
@@ -8504,7 +8504,7 @@
                     </a:lnT>
                     <a:lnB w="6350" cap="flat" cmpd="sng" algn="ctr">
                       <a:solidFill>
-                        <a:srgbClr val="DDDDDD"/>
+                        <a:srgbClr val="D8DEE6"/>
                       </a:solidFill>
                       <a:prstDash val="solid"/>
                       <a:round/>
@@ -8512,7 +8512,7 @@
                       <a:tailEnd type="none" w="med" len="med"/>
                     </a:lnB>
                     <a:solidFill>
-                      <a:srgbClr val="F5F3EF"/>
+                      <a:srgbClr val="F2F5F9"/>
                     </a:solidFill>
                   </a:tcPr>
                 </a:tc>
@@ -8527,7 +8527,7 @@
                       <a:r>
                         <a:rPr lang="en-US" sz="900" b="1" dirty="0">
                           <a:solidFill>
-                            <a:srgbClr val="4A9E6B"/>
+                            <a:srgbClr val="0F9D8A"/>
                           </a:solidFill>
                           <a:latin typeface="Calibri" pitchFamily="34" charset="0"/>
                           <a:ea typeface="Calibri" pitchFamily="34" charset="-122"/>
@@ -8545,7 +8545,7 @@
                   <a:tcPr>
                     <a:lnL w="6350" cap="flat" cmpd="sng" algn="ctr">
                       <a:solidFill>
-                        <a:srgbClr val="DDDDDD"/>
+                        <a:srgbClr val="D8DEE6"/>
                       </a:solidFill>
                       <a:prstDash val="solid"/>
                       <a:round/>
@@ -8554,7 +8554,7 @@
                     </a:lnL>
                     <a:lnR w="6350" cap="flat" cmpd="sng" algn="ctr">
                       <a:solidFill>
-                        <a:srgbClr val="DDDDDD"/>
+                        <a:srgbClr val="D8DEE6"/>
                       </a:solidFill>
                       <a:prstDash val="solid"/>
                       <a:round/>
@@ -8563,7 +8563,7 @@
                     </a:lnR>
                     <a:lnT w="6350" cap="flat" cmpd="sng" algn="ctr">
                       <a:solidFill>
-                        <a:srgbClr val="DDDDDD"/>
+                        <a:srgbClr val="D8DEE6"/>
                       </a:solidFill>
                       <a:prstDash val="solid"/>
                       <a:round/>
@@ -8572,7 +8572,7 @@
                     </a:lnT>
                     <a:lnB w="6350" cap="flat" cmpd="sng" algn="ctr">
                       <a:solidFill>
-                        <a:srgbClr val="DDDDDD"/>
+                        <a:srgbClr val="D8DEE6"/>
                       </a:solidFill>
                       <a:prstDash val="solid"/>
                       <a:round/>
@@ -8580,7 +8580,7 @@
                       <a:tailEnd type="none" w="med" len="med"/>
                     </a:lnB>
                     <a:solidFill>
-                      <a:srgbClr val="F5F3EF"/>
+                      <a:srgbClr val="F2F5F9"/>
                     </a:solidFill>
                   </a:tcPr>
                 </a:tc>
@@ -8595,7 +8595,7 @@
                       <a:r>
                         <a:rPr lang="en-US" sz="900" dirty="0">
                           <a:solidFill>
-                            <a:srgbClr val="C0392B"/>
+                            <a:srgbClr val="D9472B"/>
                           </a:solidFill>
                           <a:latin typeface="Calibri" pitchFamily="34" charset="0"/>
                           <a:ea typeface="Calibri" pitchFamily="34" charset="-122"/>
@@ -8613,7 +8613,7 @@
                   <a:tcPr>
                     <a:lnL w="6350" cap="flat" cmpd="sng" algn="ctr">
                       <a:solidFill>
-                        <a:srgbClr val="DDDDDD"/>
+                        <a:srgbClr val="D8DEE6"/>
                       </a:solidFill>
                       <a:prstDash val="solid"/>
                       <a:round/>
@@ -8622,7 +8622,7 @@
                     </a:lnL>
                     <a:lnR w="6350" cap="flat" cmpd="sng" algn="ctr">
                       <a:solidFill>
-                        <a:srgbClr val="DDDDDD"/>
+                        <a:srgbClr val="D8DEE6"/>
                       </a:solidFill>
                       <a:prstDash val="solid"/>
                       <a:round/>
@@ -8631,7 +8631,7 @@
                     </a:lnR>
                     <a:lnT w="6350" cap="flat" cmpd="sng" algn="ctr">
                       <a:solidFill>
-                        <a:srgbClr val="DDDDDD"/>
+                        <a:srgbClr val="D8DEE6"/>
                       </a:solidFill>
                       <a:prstDash val="solid"/>
                       <a:round/>
@@ -8640,7 +8640,7 @@
                     </a:lnT>
                     <a:lnB w="6350" cap="flat" cmpd="sng" algn="ctr">
                       <a:solidFill>
-                        <a:srgbClr val="DDDDDD"/>
+                        <a:srgbClr val="D8DEE6"/>
                       </a:solidFill>
                       <a:prstDash val="solid"/>
                       <a:round/>
@@ -8648,7 +8648,7 @@
                       <a:tailEnd type="none" w="med" len="med"/>
                     </a:lnB>
                     <a:solidFill>
-                      <a:srgbClr val="F5F3EF"/>
+                      <a:srgbClr val="F2F5F9"/>
                     </a:solidFill>
                   </a:tcPr>
                 </a:tc>
@@ -8663,7 +8663,7 @@
                       <a:r>
                         <a:rPr lang="en-US" sz="900" dirty="0">
                           <a:solidFill>
-                            <a:srgbClr val="C0392B"/>
+                            <a:srgbClr val="D9472B"/>
                           </a:solidFill>
                           <a:latin typeface="Calibri" pitchFamily="34" charset="0"/>
                           <a:ea typeface="Calibri" pitchFamily="34" charset="-122"/>
@@ -8681,7 +8681,7 @@
                   <a:tcPr>
                     <a:lnL w="6350" cap="flat" cmpd="sng" algn="ctr">
                       <a:solidFill>
-                        <a:srgbClr val="DDDDDD"/>
+                        <a:srgbClr val="D8DEE6"/>
                       </a:solidFill>
                       <a:prstDash val="solid"/>
                       <a:round/>
@@ -8690,7 +8690,7 @@
                     </a:lnL>
                     <a:lnR w="6350" cap="flat" cmpd="sng" algn="ctr">
                       <a:solidFill>
-                        <a:srgbClr val="DDDDDD"/>
+                        <a:srgbClr val="D8DEE6"/>
                       </a:solidFill>
                       <a:prstDash val="solid"/>
                       <a:round/>
@@ -8699,7 +8699,7 @@
                     </a:lnR>
                     <a:lnT w="6350" cap="flat" cmpd="sng" algn="ctr">
                       <a:solidFill>
-                        <a:srgbClr val="DDDDDD"/>
+                        <a:srgbClr val="D8DEE6"/>
                       </a:solidFill>
                       <a:prstDash val="solid"/>
                       <a:round/>
@@ -8708,7 +8708,7 @@
                     </a:lnT>
                     <a:lnB w="6350" cap="flat" cmpd="sng" algn="ctr">
                       <a:solidFill>
-                        <a:srgbClr val="DDDDDD"/>
+                        <a:srgbClr val="D8DEE6"/>
                       </a:solidFill>
                       <a:prstDash val="solid"/>
                       <a:round/>
@@ -8716,7 +8716,7 @@
                       <a:tailEnd type="none" w="med" len="med"/>
                     </a:lnB>
                     <a:solidFill>
-                      <a:srgbClr val="F5F3EF"/>
+                      <a:srgbClr val="F2F5F9"/>
                     </a:solidFill>
                   </a:tcPr>
                 </a:tc>
@@ -8738,7 +8738,7 @@
                       <a:r>
                         <a:rPr lang="en-US" sz="900" dirty="0">
                           <a:solidFill>
-                            <a:srgbClr val="2D2D2D"/>
+                            <a:srgbClr val="1F2A37"/>
                           </a:solidFill>
                           <a:latin typeface="Calibri" pitchFamily="34" charset="0"/>
                           <a:ea typeface="Calibri" pitchFamily="34" charset="-122"/>
@@ -8756,7 +8756,7 @@
                   <a:tcPr>
                     <a:lnL w="6350" cap="flat" cmpd="sng" algn="ctr">
                       <a:solidFill>
-                        <a:srgbClr val="DDDDDD"/>
+                        <a:srgbClr val="D8DEE6"/>
                       </a:solidFill>
                       <a:prstDash val="solid"/>
                       <a:round/>
@@ -8765,7 +8765,7 @@
                     </a:lnL>
                     <a:lnR w="6350" cap="flat" cmpd="sng" algn="ctr">
                       <a:solidFill>
-                        <a:srgbClr val="DDDDDD"/>
+                        <a:srgbClr val="D8DEE6"/>
                       </a:solidFill>
                       <a:prstDash val="solid"/>
                       <a:round/>
@@ -8774,7 +8774,7 @@
                     </a:lnR>
                     <a:lnT w="6350" cap="flat" cmpd="sng" algn="ctr">
                       <a:solidFill>
-                        <a:srgbClr val="DDDDDD"/>
+                        <a:srgbClr val="D8DEE6"/>
                       </a:solidFill>
                       <a:prstDash val="solid"/>
                       <a:round/>
@@ -8783,7 +8783,7 @@
                     </a:lnT>
                     <a:lnB w="6350" cap="flat" cmpd="sng" algn="ctr">
                       <a:solidFill>
-                        <a:srgbClr val="DDDDDD"/>
+                        <a:srgbClr val="D8DEE6"/>
                       </a:solidFill>
                       <a:prstDash val="solid"/>
                       <a:round/>
@@ -8806,7 +8806,7 @@
                       <a:r>
                         <a:rPr lang="en-US" sz="900" b="1" dirty="0">
                           <a:solidFill>
-                            <a:srgbClr val="4A9E6B"/>
+                            <a:srgbClr val="0F9D8A"/>
                           </a:solidFill>
                           <a:latin typeface="Calibri" pitchFamily="34" charset="0"/>
                           <a:ea typeface="Calibri" pitchFamily="34" charset="-122"/>
@@ -8824,7 +8824,7 @@
                   <a:tcPr>
                     <a:lnL w="6350" cap="flat" cmpd="sng" algn="ctr">
                       <a:solidFill>
-                        <a:srgbClr val="DDDDDD"/>
+                        <a:srgbClr val="D8DEE6"/>
                       </a:solidFill>
                       <a:prstDash val="solid"/>
                       <a:round/>
@@ -8833,7 +8833,7 @@
                     </a:lnL>
                     <a:lnR w="6350" cap="flat" cmpd="sng" algn="ctr">
                       <a:solidFill>
-                        <a:srgbClr val="DDDDDD"/>
+                        <a:srgbClr val="D8DEE6"/>
                       </a:solidFill>
                       <a:prstDash val="solid"/>
                       <a:round/>
@@ -8842,7 +8842,7 @@
                     </a:lnR>
                     <a:lnT w="6350" cap="flat" cmpd="sng" algn="ctr">
                       <a:solidFill>
-                        <a:srgbClr val="DDDDDD"/>
+                        <a:srgbClr val="D8DEE6"/>
                       </a:solidFill>
                       <a:prstDash val="solid"/>
                       <a:round/>
@@ -8851,7 +8851,7 @@
                     </a:lnT>
                     <a:lnB w="6350" cap="flat" cmpd="sng" algn="ctr">
                       <a:solidFill>
-                        <a:srgbClr val="DDDDDD"/>
+                        <a:srgbClr val="D8DEE6"/>
                       </a:solidFill>
                       <a:prstDash val="solid"/>
                       <a:round/>
@@ -8874,7 +8874,7 @@
                       <a:r>
                         <a:rPr lang="en-US" sz="900" dirty="0">
                           <a:solidFill>
-                            <a:srgbClr val="4A9E6B"/>
+                            <a:srgbClr val="0F9D8A"/>
                           </a:solidFill>
                           <a:latin typeface="Calibri" pitchFamily="34" charset="0"/>
                           <a:ea typeface="Calibri" pitchFamily="34" charset="-122"/>
@@ -8892,7 +8892,7 @@
                   <a:tcPr>
                     <a:lnL w="6350" cap="flat" cmpd="sng" algn="ctr">
                       <a:solidFill>
-                        <a:srgbClr val="DDDDDD"/>
+                        <a:srgbClr val="D8DEE6"/>
                       </a:solidFill>
                       <a:prstDash val="solid"/>
                       <a:round/>
@@ -8901,7 +8901,7 @@
                     </a:lnL>
                     <a:lnR w="6350" cap="flat" cmpd="sng" algn="ctr">
                       <a:solidFill>
-                        <a:srgbClr val="DDDDDD"/>
+                        <a:srgbClr val="D8DEE6"/>
                       </a:solidFill>
                       <a:prstDash val="solid"/>
                       <a:round/>
@@ -8910,7 +8910,7 @@
                     </a:lnR>
                     <a:lnT w="6350" cap="flat" cmpd="sng" algn="ctr">
                       <a:solidFill>
-                        <a:srgbClr val="DDDDDD"/>
+                        <a:srgbClr val="D8DEE6"/>
                       </a:solidFill>
                       <a:prstDash val="solid"/>
                       <a:round/>
@@ -8919,7 +8919,7 @@
                     </a:lnT>
                     <a:lnB w="6350" cap="flat" cmpd="sng" algn="ctr">
                       <a:solidFill>
-                        <a:srgbClr val="DDDDDD"/>
+                        <a:srgbClr val="D8DEE6"/>
                       </a:solidFill>
                       <a:prstDash val="solid"/>
                       <a:round/>
@@ -8942,7 +8942,7 @@
                       <a:r>
                         <a:rPr lang="en-US" sz="900" dirty="0">
                           <a:solidFill>
-                            <a:srgbClr val="4A9E6B"/>
+                            <a:srgbClr val="0F9D8A"/>
                           </a:solidFill>
                           <a:latin typeface="Calibri" pitchFamily="34" charset="0"/>
                           <a:ea typeface="Calibri" pitchFamily="34" charset="-122"/>
@@ -8960,7 +8960,7 @@
                   <a:tcPr>
                     <a:lnL w="6350" cap="flat" cmpd="sng" algn="ctr">
                       <a:solidFill>
-                        <a:srgbClr val="DDDDDD"/>
+                        <a:srgbClr val="D8DEE6"/>
                       </a:solidFill>
                       <a:prstDash val="solid"/>
                       <a:round/>
@@ -8969,7 +8969,7 @@
                     </a:lnL>
                     <a:lnR w="6350" cap="flat" cmpd="sng" algn="ctr">
                       <a:solidFill>
-                        <a:srgbClr val="DDDDDD"/>
+                        <a:srgbClr val="D8DEE6"/>
                       </a:solidFill>
                       <a:prstDash val="solid"/>
                       <a:round/>
@@ -8978,7 +8978,7 @@
                     </a:lnR>
                     <a:lnT w="6350" cap="flat" cmpd="sng" algn="ctr">
                       <a:solidFill>
-                        <a:srgbClr val="DDDDDD"/>
+                        <a:srgbClr val="D8DEE6"/>
                       </a:solidFill>
                       <a:prstDash val="solid"/>
                       <a:round/>
@@ -8987,7 +8987,7 @@
                     </a:lnT>
                     <a:lnB w="6350" cap="flat" cmpd="sng" algn="ctr">
                       <a:solidFill>
-                        <a:srgbClr val="DDDDDD"/>
+                        <a:srgbClr val="D8DEE6"/>
                       </a:solidFill>
                       <a:prstDash val="solid"/>
                       <a:round/>
@@ -9017,7 +9017,7 @@
                       <a:r>
                         <a:rPr lang="en-US" sz="900" dirty="0">
                           <a:solidFill>
-                            <a:srgbClr val="2D2D2D"/>
+                            <a:srgbClr val="1F2A37"/>
                           </a:solidFill>
                           <a:latin typeface="Calibri" pitchFamily="34" charset="0"/>
                           <a:ea typeface="Calibri" pitchFamily="34" charset="-122"/>
@@ -9035,7 +9035,7 @@
                   <a:tcPr>
                     <a:lnL w="6350" cap="flat" cmpd="sng" algn="ctr">
                       <a:solidFill>
-                        <a:srgbClr val="DDDDDD"/>
+                        <a:srgbClr val="D8DEE6"/>
                       </a:solidFill>
                       <a:prstDash val="solid"/>
                       <a:round/>
@@ -9044,7 +9044,7 @@
                     </a:lnL>
                     <a:lnR w="6350" cap="flat" cmpd="sng" algn="ctr">
                       <a:solidFill>
-                        <a:srgbClr val="DDDDDD"/>
+                        <a:srgbClr val="D8DEE6"/>
                       </a:solidFill>
                       <a:prstDash val="solid"/>
                       <a:round/>
@@ -9053,7 +9053,7 @@
                     </a:lnR>
                     <a:lnT w="6350" cap="flat" cmpd="sng" algn="ctr">
                       <a:solidFill>
-                        <a:srgbClr val="DDDDDD"/>
+                        <a:srgbClr val="D8DEE6"/>
                       </a:solidFill>
                       <a:prstDash val="solid"/>
                       <a:round/>
@@ -9062,7 +9062,7 @@
                     </a:lnT>
                     <a:lnB w="6350" cap="flat" cmpd="sng" algn="ctr">
                       <a:solidFill>
-                        <a:srgbClr val="DDDDDD"/>
+                        <a:srgbClr val="D8DEE6"/>
                       </a:solidFill>
                       <a:prstDash val="solid"/>
                       <a:round/>
@@ -9070,7 +9070,7 @@
                       <a:tailEnd type="none" w="med" len="med"/>
                     </a:lnB>
                     <a:solidFill>
-                      <a:srgbClr val="F5F3EF"/>
+                      <a:srgbClr val="F2F5F9"/>
                     </a:solidFill>
                   </a:tcPr>
                 </a:tc>
@@ -9085,7 +9085,7 @@
                       <a:r>
                         <a:rPr lang="en-US" sz="900" b="1" dirty="0">
                           <a:solidFill>
-                            <a:srgbClr val="4A9E6B"/>
+                            <a:srgbClr val="0F9D8A"/>
                           </a:solidFill>
                           <a:latin typeface="Calibri" pitchFamily="34" charset="0"/>
                           <a:ea typeface="Calibri" pitchFamily="34" charset="-122"/>
@@ -9103,7 +9103,7 @@
                   <a:tcPr>
                     <a:lnL w="6350" cap="flat" cmpd="sng" algn="ctr">
                       <a:solidFill>
-                        <a:srgbClr val="DDDDDD"/>
+                        <a:srgbClr val="D8DEE6"/>
                       </a:solidFill>
                       <a:prstDash val="solid"/>
                       <a:round/>
@@ -9112,7 +9112,7 @@
                     </a:lnL>
                     <a:lnR w="6350" cap="flat" cmpd="sng" algn="ctr">
                       <a:solidFill>
-                        <a:srgbClr val="DDDDDD"/>
+                        <a:srgbClr val="D8DEE6"/>
                       </a:solidFill>
                       <a:prstDash val="solid"/>
                       <a:round/>
@@ -9121,7 +9121,7 @@
                     </a:lnR>
                     <a:lnT w="6350" cap="flat" cmpd="sng" algn="ctr">
                       <a:solidFill>
-                        <a:srgbClr val="DDDDDD"/>
+                        <a:srgbClr val="D8DEE6"/>
                       </a:solidFill>
                       <a:prstDash val="solid"/>
                       <a:round/>
@@ -9130,7 +9130,7 @@
                     </a:lnT>
                     <a:lnB w="6350" cap="flat" cmpd="sng" algn="ctr">
                       <a:solidFill>
-                        <a:srgbClr val="DDDDDD"/>
+                        <a:srgbClr val="D8DEE6"/>
                       </a:solidFill>
                       <a:prstDash val="solid"/>
                       <a:round/>
@@ -9138,7 +9138,7 @@
                       <a:tailEnd type="none" w="med" len="med"/>
                     </a:lnB>
                     <a:solidFill>
-                      <a:srgbClr val="F5F3EF"/>
+                      <a:srgbClr val="F2F5F9"/>
                     </a:solidFill>
                   </a:tcPr>
                 </a:tc>
@@ -9153,7 +9153,7 @@
                       <a:r>
                         <a:rPr lang="en-US" sz="900" dirty="0">
                           <a:solidFill>
-                            <a:srgbClr val="C0392B"/>
+                            <a:srgbClr val="D9472B"/>
                           </a:solidFill>
                           <a:latin typeface="Calibri" pitchFamily="34" charset="0"/>
                           <a:ea typeface="Calibri" pitchFamily="34" charset="-122"/>
@@ -9171,7 +9171,7 @@
                   <a:tcPr>
                     <a:lnL w="6350" cap="flat" cmpd="sng" algn="ctr">
                       <a:solidFill>
-                        <a:srgbClr val="DDDDDD"/>
+                        <a:srgbClr val="D8DEE6"/>
                       </a:solidFill>
                       <a:prstDash val="solid"/>
                       <a:round/>
@@ -9180,7 +9180,7 @@
                     </a:lnL>
                     <a:lnR w="6350" cap="flat" cmpd="sng" algn="ctr">
                       <a:solidFill>
-                        <a:srgbClr val="DDDDDD"/>
+                        <a:srgbClr val="D8DEE6"/>
                       </a:solidFill>
                       <a:prstDash val="solid"/>
                       <a:round/>
@@ -9189,7 +9189,7 @@
                     </a:lnR>
                     <a:lnT w="6350" cap="flat" cmpd="sng" algn="ctr">
                       <a:solidFill>
-                        <a:srgbClr val="DDDDDD"/>
+                        <a:srgbClr val="D8DEE6"/>
                       </a:solidFill>
                       <a:prstDash val="solid"/>
                       <a:round/>
@@ -9198,7 +9198,7 @@
                     </a:lnT>
                     <a:lnB w="6350" cap="flat" cmpd="sng" algn="ctr">
                       <a:solidFill>
-                        <a:srgbClr val="DDDDDD"/>
+                        <a:srgbClr val="D8DEE6"/>
                       </a:solidFill>
                       <a:prstDash val="solid"/>
                       <a:round/>
@@ -9206,7 +9206,7 @@
                       <a:tailEnd type="none" w="med" len="med"/>
                     </a:lnB>
                     <a:solidFill>
-                      <a:srgbClr val="F5F3EF"/>
+                      <a:srgbClr val="F2F5F9"/>
                     </a:solidFill>
                   </a:tcPr>
                 </a:tc>
@@ -9221,7 +9221,7 @@
                       <a:r>
                         <a:rPr lang="en-US" sz="900" dirty="0">
                           <a:solidFill>
-                            <a:srgbClr val="C0392B"/>
+                            <a:srgbClr val="D9472B"/>
                           </a:solidFill>
                           <a:latin typeface="Calibri" pitchFamily="34" charset="0"/>
                           <a:ea typeface="Calibri" pitchFamily="34" charset="-122"/>
@@ -9239,7 +9239,7 @@
                   <a:tcPr>
                     <a:lnL w="6350" cap="flat" cmpd="sng" algn="ctr">
                       <a:solidFill>
-                        <a:srgbClr val="DDDDDD"/>
+                        <a:srgbClr val="D8DEE6"/>
                       </a:solidFill>
                       <a:prstDash val="solid"/>
                       <a:round/>
@@ -9248,7 +9248,7 @@
                     </a:lnL>
                     <a:lnR w="6350" cap="flat" cmpd="sng" algn="ctr">
                       <a:solidFill>
-                        <a:srgbClr val="DDDDDD"/>
+                        <a:srgbClr val="D8DEE6"/>
                       </a:solidFill>
                       <a:prstDash val="solid"/>
                       <a:round/>
@@ -9257,7 +9257,7 @@
                     </a:lnR>
                     <a:lnT w="6350" cap="flat" cmpd="sng" algn="ctr">
                       <a:solidFill>
-                        <a:srgbClr val="DDDDDD"/>
+                        <a:srgbClr val="D8DEE6"/>
                       </a:solidFill>
                       <a:prstDash val="solid"/>
                       <a:round/>
@@ -9266,7 +9266,7 @@
                     </a:lnT>
                     <a:lnB w="6350" cap="flat" cmpd="sng" algn="ctr">
                       <a:solidFill>
-                        <a:srgbClr val="DDDDDD"/>
+                        <a:srgbClr val="D8DEE6"/>
                       </a:solidFill>
                       <a:prstDash val="solid"/>
                       <a:round/>
@@ -9274,7 +9274,7 @@
                       <a:tailEnd type="none" w="med" len="med"/>
                     </a:lnB>
                     <a:solidFill>
-                      <a:srgbClr val="F5F3EF"/>
+                      <a:srgbClr val="F2F5F9"/>
                     </a:solidFill>
                   </a:tcPr>
                 </a:tc>
@@ -9296,7 +9296,7 @@
                       <a:r>
                         <a:rPr lang="en-US" sz="900" dirty="0">
                           <a:solidFill>
-                            <a:srgbClr val="2D2D2D"/>
+                            <a:srgbClr val="1F2A37"/>
                           </a:solidFill>
                           <a:latin typeface="Calibri" pitchFamily="34" charset="0"/>
                           <a:ea typeface="Calibri" pitchFamily="34" charset="-122"/>
@@ -9314,7 +9314,7 @@
                   <a:tcPr>
                     <a:lnL w="6350" cap="flat" cmpd="sng" algn="ctr">
                       <a:solidFill>
-                        <a:srgbClr val="DDDDDD"/>
+                        <a:srgbClr val="D8DEE6"/>
                       </a:solidFill>
                       <a:prstDash val="solid"/>
                       <a:round/>
@@ -9323,7 +9323,7 @@
                     </a:lnL>
                     <a:lnR w="6350" cap="flat" cmpd="sng" algn="ctr">
                       <a:solidFill>
-                        <a:srgbClr val="DDDDDD"/>
+                        <a:srgbClr val="D8DEE6"/>
                       </a:solidFill>
                       <a:prstDash val="solid"/>
                       <a:round/>
@@ -9332,7 +9332,7 @@
                     </a:lnR>
                     <a:lnT w="6350" cap="flat" cmpd="sng" algn="ctr">
                       <a:solidFill>
-                        <a:srgbClr val="DDDDDD"/>
+                        <a:srgbClr val="D8DEE6"/>
                       </a:solidFill>
                       <a:prstDash val="solid"/>
                       <a:round/>
@@ -9341,7 +9341,7 @@
                     </a:lnT>
                     <a:lnB w="6350" cap="flat" cmpd="sng" algn="ctr">
                       <a:solidFill>
-                        <a:srgbClr val="DDDDDD"/>
+                        <a:srgbClr val="D8DEE6"/>
                       </a:solidFill>
                       <a:prstDash val="solid"/>
                       <a:round/>
@@ -9364,7 +9364,7 @@
                       <a:r>
                         <a:rPr lang="en-US" sz="900" b="1" dirty="0">
                           <a:solidFill>
-                            <a:srgbClr val="4A9E6B"/>
+                            <a:srgbClr val="0F9D8A"/>
                           </a:solidFill>
                           <a:latin typeface="Calibri" pitchFamily="34" charset="0"/>
                           <a:ea typeface="Calibri" pitchFamily="34" charset="-122"/>
@@ -9382,7 +9382,7 @@
                   <a:tcPr>
                     <a:lnL w="6350" cap="flat" cmpd="sng" algn="ctr">
                       <a:solidFill>
-                        <a:srgbClr val="DDDDDD"/>
+                        <a:srgbClr val="D8DEE6"/>
                       </a:solidFill>
                       <a:prstDash val="solid"/>
                       <a:round/>
@@ -9391,7 +9391,7 @@
                     </a:lnL>
                     <a:lnR w="6350" cap="flat" cmpd="sng" algn="ctr">
                       <a:solidFill>
-                        <a:srgbClr val="DDDDDD"/>
+                        <a:srgbClr val="D8DEE6"/>
                       </a:solidFill>
                       <a:prstDash val="solid"/>
                       <a:round/>
@@ -9400,7 +9400,7 @@
                     </a:lnR>
                     <a:lnT w="6350" cap="flat" cmpd="sng" algn="ctr">
                       <a:solidFill>
-                        <a:srgbClr val="DDDDDD"/>
+                        <a:srgbClr val="D8DEE6"/>
                       </a:solidFill>
                       <a:prstDash val="solid"/>
                       <a:round/>
@@ -9409,7 +9409,7 @@
                     </a:lnT>
                     <a:lnB w="6350" cap="flat" cmpd="sng" algn="ctr">
                       <a:solidFill>
-                        <a:srgbClr val="DDDDDD"/>
+                        <a:srgbClr val="D8DEE6"/>
                       </a:solidFill>
                       <a:prstDash val="solid"/>
                       <a:round/>
@@ -9432,7 +9432,7 @@
                       <a:r>
                         <a:rPr lang="en-US" sz="900" dirty="0">
                           <a:solidFill>
-                            <a:srgbClr val="4A9E6B"/>
+                            <a:srgbClr val="0F9D8A"/>
                           </a:solidFill>
                           <a:latin typeface="Calibri" pitchFamily="34" charset="0"/>
                           <a:ea typeface="Calibri" pitchFamily="34" charset="-122"/>
@@ -9450,7 +9450,7 @@
                   <a:tcPr>
                     <a:lnL w="6350" cap="flat" cmpd="sng" algn="ctr">
                       <a:solidFill>
-                        <a:srgbClr val="DDDDDD"/>
+                        <a:srgbClr val="D8DEE6"/>
                       </a:solidFill>
                       <a:prstDash val="solid"/>
                       <a:round/>
@@ -9459,7 +9459,7 @@
                     </a:lnL>
                     <a:lnR w="6350" cap="flat" cmpd="sng" algn="ctr">
                       <a:solidFill>
-                        <a:srgbClr val="DDDDDD"/>
+                        <a:srgbClr val="D8DEE6"/>
                       </a:solidFill>
                       <a:prstDash val="solid"/>
                       <a:round/>
@@ -9468,7 +9468,7 @@
                     </a:lnR>
                     <a:lnT w="6350" cap="flat" cmpd="sng" algn="ctr">
                       <a:solidFill>
-                        <a:srgbClr val="DDDDDD"/>
+                        <a:srgbClr val="D8DEE6"/>
                       </a:solidFill>
                       <a:prstDash val="solid"/>
                       <a:round/>
@@ -9477,7 +9477,7 @@
                     </a:lnT>
                     <a:lnB w="6350" cap="flat" cmpd="sng" algn="ctr">
                       <a:solidFill>
-                        <a:srgbClr val="DDDDDD"/>
+                        <a:srgbClr val="D8DEE6"/>
                       </a:solidFill>
                       <a:prstDash val="solid"/>
                       <a:round/>
@@ -9500,7 +9500,7 @@
                       <a:r>
                         <a:rPr lang="en-US" sz="900" dirty="0">
                           <a:solidFill>
-                            <a:srgbClr val="4A9E6B"/>
+                            <a:srgbClr val="0F9D8A"/>
                           </a:solidFill>
                           <a:latin typeface="Calibri" pitchFamily="34" charset="0"/>
                           <a:ea typeface="Calibri" pitchFamily="34" charset="-122"/>
@@ -9518,7 +9518,7 @@
                   <a:tcPr>
                     <a:lnL w="6350" cap="flat" cmpd="sng" algn="ctr">
                       <a:solidFill>
-                        <a:srgbClr val="DDDDDD"/>
+                        <a:srgbClr val="D8DEE6"/>
                       </a:solidFill>
                       <a:prstDash val="solid"/>
                       <a:round/>
@@ -9527,7 +9527,7 @@
                     </a:lnL>
                     <a:lnR w="6350" cap="flat" cmpd="sng" algn="ctr">
                       <a:solidFill>
-                        <a:srgbClr val="DDDDDD"/>
+                        <a:srgbClr val="D8DEE6"/>
                       </a:solidFill>
                       <a:prstDash val="solid"/>
                       <a:round/>
@@ -9536,7 +9536,7 @@
                     </a:lnR>
                     <a:lnT w="6350" cap="flat" cmpd="sng" algn="ctr">
                       <a:solidFill>
-                        <a:srgbClr val="DDDDDD"/>
+                        <a:srgbClr val="D8DEE6"/>
                       </a:solidFill>
                       <a:prstDash val="solid"/>
                       <a:round/>
@@ -9545,7 +9545,7 @@
                     </a:lnT>
                     <a:lnB w="6350" cap="flat" cmpd="sng" algn="ctr">
                       <a:solidFill>
-                        <a:srgbClr val="DDDDDD"/>
+                        <a:srgbClr val="D8DEE6"/>
                       </a:solidFill>
                       <a:prstDash val="solid"/>
                       <a:round/>
@@ -9575,7 +9575,7 @@
                       <a:r>
                         <a:rPr lang="en-US" sz="900" dirty="0">
                           <a:solidFill>
-                            <a:srgbClr val="2D2D2D"/>
+                            <a:srgbClr val="1F2A37"/>
                           </a:solidFill>
                           <a:latin typeface="Calibri" pitchFamily="34" charset="0"/>
                           <a:ea typeface="Calibri" pitchFamily="34" charset="-122"/>
@@ -9593,7 +9593,7 @@
                   <a:tcPr>
                     <a:lnL w="6350" cap="flat" cmpd="sng" algn="ctr">
                       <a:solidFill>
-                        <a:srgbClr val="DDDDDD"/>
+                        <a:srgbClr val="D8DEE6"/>
                       </a:solidFill>
                       <a:prstDash val="solid"/>
                       <a:round/>
@@ -9602,7 +9602,7 @@
                     </a:lnL>
                     <a:lnR w="6350" cap="flat" cmpd="sng" algn="ctr">
                       <a:solidFill>
-                        <a:srgbClr val="DDDDDD"/>
+                        <a:srgbClr val="D8DEE6"/>
                       </a:solidFill>
                       <a:prstDash val="solid"/>
                       <a:round/>
@@ -9611,7 +9611,7 @@
                     </a:lnR>
                     <a:lnT w="6350" cap="flat" cmpd="sng" algn="ctr">
                       <a:solidFill>
-                        <a:srgbClr val="DDDDDD"/>
+                        <a:srgbClr val="D8DEE6"/>
                       </a:solidFill>
                       <a:prstDash val="solid"/>
                       <a:round/>
@@ -9620,7 +9620,7 @@
                     </a:lnT>
                     <a:lnB w="6350" cap="flat" cmpd="sng" algn="ctr">
                       <a:solidFill>
-                        <a:srgbClr val="DDDDDD"/>
+                        <a:srgbClr val="D8DEE6"/>
                       </a:solidFill>
                       <a:prstDash val="solid"/>
                       <a:round/>
@@ -9628,7 +9628,7 @@
                       <a:tailEnd type="none" w="med" len="med"/>
                     </a:lnB>
                     <a:solidFill>
-                      <a:srgbClr val="F5F3EF"/>
+                      <a:srgbClr val="F2F5F9"/>
                     </a:solidFill>
                   </a:tcPr>
                 </a:tc>
@@ -9643,7 +9643,7 @@
                       <a:r>
                         <a:rPr lang="en-US" sz="900" b="1" dirty="0">
                           <a:solidFill>
-                            <a:srgbClr val="4A9E6B"/>
+                            <a:srgbClr val="0F9D8A"/>
                           </a:solidFill>
                           <a:latin typeface="Calibri" pitchFamily="34" charset="0"/>
                           <a:ea typeface="Calibri" pitchFamily="34" charset="-122"/>
@@ -9661,7 +9661,7 @@
                   <a:tcPr>
                     <a:lnL w="6350" cap="flat" cmpd="sng" algn="ctr">
                       <a:solidFill>
-                        <a:srgbClr val="DDDDDD"/>
+                        <a:srgbClr val="D8DEE6"/>
                       </a:solidFill>
                       <a:prstDash val="solid"/>
                       <a:round/>
@@ -9670,7 +9670,7 @@
                     </a:lnL>
                     <a:lnR w="6350" cap="flat" cmpd="sng" algn="ctr">
                       <a:solidFill>
-                        <a:srgbClr val="DDDDDD"/>
+                        <a:srgbClr val="D8DEE6"/>
                       </a:solidFill>
                       <a:prstDash val="solid"/>
                       <a:round/>
@@ -9679,7 +9679,7 @@
                     </a:lnR>
                     <a:lnT w="6350" cap="flat" cmpd="sng" algn="ctr">
                       <a:solidFill>
-                        <a:srgbClr val="DDDDDD"/>
+                        <a:srgbClr val="D8DEE6"/>
                       </a:solidFill>
                       <a:prstDash val="solid"/>
                       <a:round/>
@@ -9688,7 +9688,7 @@
                     </a:lnT>
                     <a:lnB w="6350" cap="flat" cmpd="sng" algn="ctr">
                       <a:solidFill>
-                        <a:srgbClr val="DDDDDD"/>
+                        <a:srgbClr val="D8DEE6"/>
                       </a:solidFill>
                       <a:prstDash val="solid"/>
                       <a:round/>
@@ -9696,7 +9696,7 @@
                       <a:tailEnd type="none" w="med" len="med"/>
                     </a:lnB>
                     <a:solidFill>
-                      <a:srgbClr val="F5F3EF"/>
+                      <a:srgbClr val="F2F5F9"/>
                     </a:solidFill>
                   </a:tcPr>
                 </a:tc>
@@ -9711,7 +9711,7 @@
                       <a:r>
                         <a:rPr lang="en-US" sz="900" dirty="0">
                           <a:solidFill>
-                            <a:srgbClr val="C0392B"/>
+                            <a:srgbClr val="D9472B"/>
                           </a:solidFill>
                           <a:latin typeface="Calibri" pitchFamily="34" charset="0"/>
                           <a:ea typeface="Calibri" pitchFamily="34" charset="-122"/>
@@ -9729,7 +9729,7 @@
                   <a:tcPr>
                     <a:lnL w="6350" cap="flat" cmpd="sng" algn="ctr">
                       <a:solidFill>
-                        <a:srgbClr val="DDDDDD"/>
+                        <a:srgbClr val="D8DEE6"/>
                       </a:solidFill>
                       <a:prstDash val="solid"/>
                       <a:round/>
@@ -9738,7 +9738,7 @@
                     </a:lnL>
                     <a:lnR w="6350" cap="flat" cmpd="sng" algn="ctr">
                       <a:solidFill>
-                        <a:srgbClr val="DDDDDD"/>
+                        <a:srgbClr val="D8DEE6"/>
                       </a:solidFill>
                       <a:prstDash val="solid"/>
                       <a:round/>
@@ -9747,7 +9747,7 @@
                     </a:lnR>
                     <a:lnT w="6350" cap="flat" cmpd="sng" algn="ctr">
                       <a:solidFill>
-                        <a:srgbClr val="DDDDDD"/>
+                        <a:srgbClr val="D8DEE6"/>
                       </a:solidFill>
                       <a:prstDash val="solid"/>
                       <a:round/>
@@ -9756,7 +9756,7 @@
                     </a:lnT>
                     <a:lnB w="6350" cap="flat" cmpd="sng" algn="ctr">
                       <a:solidFill>
-                        <a:srgbClr val="DDDDDD"/>
+                        <a:srgbClr val="D8DEE6"/>
                       </a:solidFill>
                       <a:prstDash val="solid"/>
                       <a:round/>
@@ -9764,7 +9764,7 @@
                       <a:tailEnd type="none" w="med" len="med"/>
                     </a:lnB>
                     <a:solidFill>
-                      <a:srgbClr val="F5F3EF"/>
+                      <a:srgbClr val="F2F5F9"/>
                     </a:solidFill>
                   </a:tcPr>
                 </a:tc>
@@ -9779,7 +9779,7 @@
                       <a:r>
                         <a:rPr lang="en-US" sz="900" dirty="0">
                           <a:solidFill>
-                            <a:srgbClr val="C0392B"/>
+                            <a:srgbClr val="D9472B"/>
                           </a:solidFill>
                           <a:latin typeface="Calibri" pitchFamily="34" charset="0"/>
                           <a:ea typeface="Calibri" pitchFamily="34" charset="-122"/>
@@ -9797,7 +9797,7 @@
                   <a:tcPr>
                     <a:lnL w="6350" cap="flat" cmpd="sng" algn="ctr">
                       <a:solidFill>
-                        <a:srgbClr val="DDDDDD"/>
+                        <a:srgbClr val="D8DEE6"/>
                       </a:solidFill>
                       <a:prstDash val="solid"/>
                       <a:round/>
@@ -9806,7 +9806,7 @@
                     </a:lnL>
                     <a:lnR w="6350" cap="flat" cmpd="sng" algn="ctr">
                       <a:solidFill>
-                        <a:srgbClr val="DDDDDD"/>
+                        <a:srgbClr val="D8DEE6"/>
                       </a:solidFill>
                       <a:prstDash val="solid"/>
                       <a:round/>
@@ -9815,7 +9815,7 @@
                     </a:lnR>
                     <a:lnT w="6350" cap="flat" cmpd="sng" algn="ctr">
                       <a:solidFill>
-                        <a:srgbClr val="DDDDDD"/>
+                        <a:srgbClr val="D8DEE6"/>
                       </a:solidFill>
                       <a:prstDash val="solid"/>
                       <a:round/>
@@ -9824,7 +9824,7 @@
                     </a:lnT>
                     <a:lnB w="6350" cap="flat" cmpd="sng" algn="ctr">
                       <a:solidFill>
-                        <a:srgbClr val="DDDDDD"/>
+                        <a:srgbClr val="D8DEE6"/>
                       </a:solidFill>
                       <a:prstDash val="solid"/>
                       <a:round/>
@@ -9832,7 +9832,7 @@
                       <a:tailEnd type="none" w="med" len="med"/>
                     </a:lnB>
                     <a:solidFill>
-                      <a:srgbClr val="F5F3EF"/>
+                      <a:srgbClr val="F2F5F9"/>
                     </a:solidFill>
                   </a:tcPr>
                 </a:tc>
@@ -9873,11 +9873,11 @@
             <a:r>
               <a:rPr lang="en-US" sz="1300" b="1" dirty="0">
                 <a:solidFill>
-                  <a:srgbClr val="2D2D2D"/>
+                  <a:srgbClr val="1F2A37"/>
                 </a:solidFill>
-                <a:latin typeface="Georgia" pitchFamily="34" charset="0"/>
-                <a:ea typeface="Georgia" pitchFamily="34" charset="-122"/>
-                <a:cs typeface="Georgia" pitchFamily="34" charset="-120"/>
+                <a:latin typeface="Calibri" pitchFamily="34" charset="0"/>
+                <a:ea typeface="Calibri" pitchFamily="34" charset="-122"/>
+                <a:cs typeface="Calibri" pitchFamily="34" charset="-120"/>
               </a:rPr>
               <a:t>Breakeven Safety Buffer</a:t>
             </a:r>
@@ -9960,7 +9960,7 @@
                   <a:tcPr>
                     <a:lnL w="6350" cap="flat" cmpd="sng" algn="ctr">
                       <a:solidFill>
-                        <a:srgbClr val="DDDDDD"/>
+                        <a:srgbClr val="D8DEE6"/>
                       </a:solidFill>
                       <a:prstDash val="solid"/>
                       <a:round/>
@@ -9969,7 +9969,7 @@
                     </a:lnL>
                     <a:lnR w="6350" cap="flat" cmpd="sng" algn="ctr">
                       <a:solidFill>
-                        <a:srgbClr val="DDDDDD"/>
+                        <a:srgbClr val="D8DEE6"/>
                       </a:solidFill>
                       <a:prstDash val="solid"/>
                       <a:round/>
@@ -9978,7 +9978,7 @@
                     </a:lnR>
                     <a:lnT w="6350" cap="flat" cmpd="sng" algn="ctr">
                       <a:solidFill>
-                        <a:srgbClr val="DDDDDD"/>
+                        <a:srgbClr val="D8DEE6"/>
                       </a:solidFill>
                       <a:prstDash val="solid"/>
                       <a:round/>
@@ -9987,7 +9987,7 @@
                     </a:lnT>
                     <a:lnB w="6350" cap="flat" cmpd="sng" algn="ctr">
                       <a:solidFill>
-                        <a:srgbClr val="DDDDDD"/>
+                        <a:srgbClr val="D8DEE6"/>
                       </a:solidFill>
                       <a:prstDash val="solid"/>
                       <a:round/>
@@ -9995,7 +9995,7 @@
                       <a:tailEnd type="none" w="med" len="med"/>
                     </a:lnB>
                     <a:solidFill>
-                      <a:srgbClr val="B85042"/>
+                      <a:srgbClr val="2F6690"/>
                     </a:solidFill>
                   </a:tcPr>
                 </a:tc>
@@ -10028,7 +10028,7 @@
                   <a:tcPr>
                     <a:lnL w="6350" cap="flat" cmpd="sng" algn="ctr">
                       <a:solidFill>
-                        <a:srgbClr val="DDDDDD"/>
+                        <a:srgbClr val="D8DEE6"/>
                       </a:solidFill>
                       <a:prstDash val="solid"/>
                       <a:round/>
@@ -10037,7 +10037,7 @@
                     </a:lnL>
                     <a:lnR w="6350" cap="flat" cmpd="sng" algn="ctr">
                       <a:solidFill>
-                        <a:srgbClr val="DDDDDD"/>
+                        <a:srgbClr val="D8DEE6"/>
                       </a:solidFill>
                       <a:prstDash val="solid"/>
                       <a:round/>
@@ -10046,7 +10046,7 @@
                     </a:lnR>
                     <a:lnT w="6350" cap="flat" cmpd="sng" algn="ctr">
                       <a:solidFill>
-                        <a:srgbClr val="DDDDDD"/>
+                        <a:srgbClr val="D8DEE6"/>
                       </a:solidFill>
                       <a:prstDash val="solid"/>
                       <a:round/>
@@ -10055,7 +10055,7 @@
                     </a:lnT>
                     <a:lnB w="6350" cap="flat" cmpd="sng" algn="ctr">
                       <a:solidFill>
-                        <a:srgbClr val="DDDDDD"/>
+                        <a:srgbClr val="D8DEE6"/>
                       </a:solidFill>
                       <a:prstDash val="solid"/>
                       <a:round/>
@@ -10063,7 +10063,7 @@
                       <a:tailEnd type="none" w="med" len="med"/>
                     </a:lnB>
                     <a:solidFill>
-                      <a:srgbClr val="B85042"/>
+                      <a:srgbClr val="2F6690"/>
                     </a:solidFill>
                   </a:tcPr>
                 </a:tc>
@@ -10096,7 +10096,7 @@
                   <a:tcPr>
                     <a:lnL w="6350" cap="flat" cmpd="sng" algn="ctr">
                       <a:solidFill>
-                        <a:srgbClr val="DDDDDD"/>
+                        <a:srgbClr val="D8DEE6"/>
                       </a:solidFill>
                       <a:prstDash val="solid"/>
                       <a:round/>
@@ -10105,7 +10105,7 @@
                     </a:lnL>
                     <a:lnR w="6350" cap="flat" cmpd="sng" algn="ctr">
                       <a:solidFill>
-                        <a:srgbClr val="DDDDDD"/>
+                        <a:srgbClr val="D8DEE6"/>
                       </a:solidFill>
                       <a:prstDash val="solid"/>
                       <a:round/>
@@ -10114,7 +10114,7 @@
                     </a:lnR>
                     <a:lnT w="6350" cap="flat" cmpd="sng" algn="ctr">
                       <a:solidFill>
-                        <a:srgbClr val="DDDDDD"/>
+                        <a:srgbClr val="D8DEE6"/>
                       </a:solidFill>
                       <a:prstDash val="solid"/>
                       <a:round/>
@@ -10123,7 +10123,7 @@
                     </a:lnT>
                     <a:lnB w="6350" cap="flat" cmpd="sng" algn="ctr">
                       <a:solidFill>
-                        <a:srgbClr val="DDDDDD"/>
+                        <a:srgbClr val="D8DEE6"/>
                       </a:solidFill>
                       <a:prstDash val="solid"/>
                       <a:round/>
@@ -10131,7 +10131,7 @@
                       <a:tailEnd type="none" w="med" len="med"/>
                     </a:lnB>
                     <a:solidFill>
-                      <a:srgbClr val="B85042"/>
+                      <a:srgbClr val="2F6690"/>
                     </a:solidFill>
                   </a:tcPr>
                 </a:tc>
@@ -10171,7 +10171,7 @@
                   <a:tcPr>
                     <a:lnL w="6350" cap="flat" cmpd="sng" algn="ctr">
                       <a:solidFill>
-                        <a:srgbClr val="DDDDDD"/>
+                        <a:srgbClr val="D8DEE6"/>
                       </a:solidFill>
                       <a:prstDash val="solid"/>
                       <a:round/>
@@ -10180,7 +10180,7 @@
                     </a:lnL>
                     <a:lnR w="6350" cap="flat" cmpd="sng" algn="ctr">
                       <a:solidFill>
-                        <a:srgbClr val="DDDDDD"/>
+                        <a:srgbClr val="D8DEE6"/>
                       </a:solidFill>
                       <a:prstDash val="solid"/>
                       <a:round/>
@@ -10189,7 +10189,7 @@
                     </a:lnR>
                     <a:lnT w="6350" cap="flat" cmpd="sng" algn="ctr">
                       <a:solidFill>
-                        <a:srgbClr val="DDDDDD"/>
+                        <a:srgbClr val="D8DEE6"/>
                       </a:solidFill>
                       <a:prstDash val="solid"/>
                       <a:round/>
@@ -10198,7 +10198,7 @@
                     </a:lnT>
                     <a:lnB w="6350" cap="flat" cmpd="sng" algn="ctr">
                       <a:solidFill>
-                        <a:srgbClr val="DDDDDD"/>
+                        <a:srgbClr val="D8DEE6"/>
                       </a:solidFill>
                       <a:prstDash val="solid"/>
                       <a:round/>
@@ -10236,7 +10236,7 @@
                   <a:tcPr>
                     <a:lnL w="6350" cap="flat" cmpd="sng" algn="ctr">
                       <a:solidFill>
-                        <a:srgbClr val="DDDDDD"/>
+                        <a:srgbClr val="D8DEE6"/>
                       </a:solidFill>
                       <a:prstDash val="solid"/>
                       <a:round/>
@@ -10245,7 +10245,7 @@
                     </a:lnL>
                     <a:lnR w="6350" cap="flat" cmpd="sng" algn="ctr">
                       <a:solidFill>
-                        <a:srgbClr val="DDDDDD"/>
+                        <a:srgbClr val="D8DEE6"/>
                       </a:solidFill>
                       <a:prstDash val="solid"/>
                       <a:round/>
@@ -10254,7 +10254,7 @@
                     </a:lnR>
                     <a:lnT w="6350" cap="flat" cmpd="sng" algn="ctr">
                       <a:solidFill>
-                        <a:srgbClr val="DDDDDD"/>
+                        <a:srgbClr val="D8DEE6"/>
                       </a:solidFill>
                       <a:prstDash val="solid"/>
                       <a:round/>
@@ -10263,7 +10263,7 @@
                     </a:lnT>
                     <a:lnB w="6350" cap="flat" cmpd="sng" algn="ctr">
                       <a:solidFill>
-                        <a:srgbClr val="DDDDDD"/>
+                        <a:srgbClr val="D8DEE6"/>
                       </a:solidFill>
                       <a:prstDash val="solid"/>
                       <a:round/>
@@ -10283,7 +10283,7 @@
                       <a:r>
                         <a:rPr lang="en-US" sz="900" b="1" dirty="0">
                           <a:solidFill>
-                            <a:srgbClr val="4A9E6B"/>
+                            <a:srgbClr val="0F9D8A"/>
                           </a:solidFill>
                           <a:latin typeface="Calibri" pitchFamily="34" charset="0"/>
                           <a:ea typeface="Calibri" pitchFamily="34" charset="-122"/>
@@ -10301,7 +10301,7 @@
                   <a:tcPr>
                     <a:lnL w="6350" cap="flat" cmpd="sng" algn="ctr">
                       <a:solidFill>
-                        <a:srgbClr val="DDDDDD"/>
+                        <a:srgbClr val="D8DEE6"/>
                       </a:solidFill>
                       <a:prstDash val="solid"/>
                       <a:round/>
@@ -10310,7 +10310,7 @@
                     </a:lnL>
                     <a:lnR w="6350" cap="flat" cmpd="sng" algn="ctr">
                       <a:solidFill>
-                        <a:srgbClr val="DDDDDD"/>
+                        <a:srgbClr val="D8DEE6"/>
                       </a:solidFill>
                       <a:prstDash val="solid"/>
                       <a:round/>
@@ -10319,7 +10319,7 @@
                     </a:lnR>
                     <a:lnT w="6350" cap="flat" cmpd="sng" algn="ctr">
                       <a:solidFill>
-                        <a:srgbClr val="DDDDDD"/>
+                        <a:srgbClr val="D8DEE6"/>
                       </a:solidFill>
                       <a:prstDash val="solid"/>
                       <a:round/>
@@ -10328,7 +10328,7 @@
                     </a:lnT>
                     <a:lnB w="6350" cap="flat" cmpd="sng" algn="ctr">
                       <a:solidFill>
-                        <a:srgbClr val="DDDDDD"/>
+                        <a:srgbClr val="D8DEE6"/>
                       </a:solidFill>
                       <a:prstDash val="solid"/>
                       <a:round/>
@@ -10373,7 +10373,7 @@
                   <a:tcPr>
                     <a:lnL w="6350" cap="flat" cmpd="sng" algn="ctr">
                       <a:solidFill>
-                        <a:srgbClr val="DDDDDD"/>
+                        <a:srgbClr val="D8DEE6"/>
                       </a:solidFill>
                       <a:prstDash val="solid"/>
                       <a:round/>
@@ -10382,7 +10382,7 @@
                     </a:lnL>
                     <a:lnR w="6350" cap="flat" cmpd="sng" algn="ctr">
                       <a:solidFill>
-                        <a:srgbClr val="DDDDDD"/>
+                        <a:srgbClr val="D8DEE6"/>
                       </a:solidFill>
                       <a:prstDash val="solid"/>
                       <a:round/>
@@ -10391,7 +10391,7 @@
                     </a:lnR>
                     <a:lnT w="6350" cap="flat" cmpd="sng" algn="ctr">
                       <a:solidFill>
-                        <a:srgbClr val="DDDDDD"/>
+                        <a:srgbClr val="D8DEE6"/>
                       </a:solidFill>
                       <a:prstDash val="solid"/>
                       <a:round/>
@@ -10400,7 +10400,7 @@
                     </a:lnT>
                     <a:lnB w="6350" cap="flat" cmpd="sng" algn="ctr">
                       <a:solidFill>
-                        <a:srgbClr val="DDDDDD"/>
+                        <a:srgbClr val="D8DEE6"/>
                       </a:solidFill>
                       <a:prstDash val="solid"/>
                       <a:round/>
@@ -10408,7 +10408,7 @@
                       <a:tailEnd type="none" w="med" len="med"/>
                     </a:lnB>
                     <a:solidFill>
-                      <a:srgbClr val="F5F3EF"/>
+                      <a:srgbClr val="F2F5F9"/>
                     </a:solidFill>
                   </a:tcPr>
                 </a:tc>
@@ -10441,7 +10441,7 @@
                   <a:tcPr>
                     <a:lnL w="6350" cap="flat" cmpd="sng" algn="ctr">
                       <a:solidFill>
-                        <a:srgbClr val="DDDDDD"/>
+                        <a:srgbClr val="D8DEE6"/>
                       </a:solidFill>
                       <a:prstDash val="solid"/>
                       <a:round/>
@@ -10450,7 +10450,7 @@
                     </a:lnL>
                     <a:lnR w="6350" cap="flat" cmpd="sng" algn="ctr">
                       <a:solidFill>
-                        <a:srgbClr val="DDDDDD"/>
+                        <a:srgbClr val="D8DEE6"/>
                       </a:solidFill>
                       <a:prstDash val="solid"/>
                       <a:round/>
@@ -10459,7 +10459,7 @@
                     </a:lnR>
                     <a:lnT w="6350" cap="flat" cmpd="sng" algn="ctr">
                       <a:solidFill>
-                        <a:srgbClr val="DDDDDD"/>
+                        <a:srgbClr val="D8DEE6"/>
                       </a:solidFill>
                       <a:prstDash val="solid"/>
                       <a:round/>
@@ -10468,7 +10468,7 @@
                     </a:lnT>
                     <a:lnB w="6350" cap="flat" cmpd="sng" algn="ctr">
                       <a:solidFill>
-                        <a:srgbClr val="DDDDDD"/>
+                        <a:srgbClr val="D8DEE6"/>
                       </a:solidFill>
                       <a:prstDash val="solid"/>
                       <a:round/>
@@ -10476,7 +10476,7 @@
                       <a:tailEnd type="none" w="med" len="med"/>
                     </a:lnB>
                     <a:solidFill>
-                      <a:srgbClr val="F5F3EF"/>
+                      <a:srgbClr val="F2F5F9"/>
                     </a:solidFill>
                   </a:tcPr>
                 </a:tc>
@@ -10491,7 +10491,7 @@
                       <a:r>
                         <a:rPr lang="en-US" sz="900" b="1" dirty="0">
                           <a:solidFill>
-                            <a:srgbClr val="4A9E6B"/>
+                            <a:srgbClr val="0F9D8A"/>
                           </a:solidFill>
                           <a:latin typeface="Calibri" pitchFamily="34" charset="0"/>
                           <a:ea typeface="Calibri" pitchFamily="34" charset="-122"/>
@@ -10509,7 +10509,7 @@
                   <a:tcPr>
                     <a:lnL w="6350" cap="flat" cmpd="sng" algn="ctr">
                       <a:solidFill>
-                        <a:srgbClr val="DDDDDD"/>
+                        <a:srgbClr val="D8DEE6"/>
                       </a:solidFill>
                       <a:prstDash val="solid"/>
                       <a:round/>
@@ -10518,7 +10518,7 @@
                     </a:lnL>
                     <a:lnR w="6350" cap="flat" cmpd="sng" algn="ctr">
                       <a:solidFill>
-                        <a:srgbClr val="DDDDDD"/>
+                        <a:srgbClr val="D8DEE6"/>
                       </a:solidFill>
                       <a:prstDash val="solid"/>
                       <a:round/>
@@ -10527,7 +10527,7 @@
                     </a:lnR>
                     <a:lnT w="6350" cap="flat" cmpd="sng" algn="ctr">
                       <a:solidFill>
-                        <a:srgbClr val="DDDDDD"/>
+                        <a:srgbClr val="D8DEE6"/>
                       </a:solidFill>
                       <a:prstDash val="solid"/>
                       <a:round/>
@@ -10536,7 +10536,7 @@
                     </a:lnT>
                     <a:lnB w="6350" cap="flat" cmpd="sng" algn="ctr">
                       <a:solidFill>
-                        <a:srgbClr val="DDDDDD"/>
+                        <a:srgbClr val="D8DEE6"/>
                       </a:solidFill>
                       <a:prstDash val="solid"/>
                       <a:round/>
@@ -10544,7 +10544,7 @@
                       <a:tailEnd type="none" w="med" len="med"/>
                     </a:lnB>
                     <a:solidFill>
-                      <a:srgbClr val="F5F3EF"/>
+                      <a:srgbClr val="F2F5F9"/>
                     </a:solidFill>
                   </a:tcPr>
                 </a:tc>
@@ -10584,7 +10584,7 @@
                   <a:tcPr>
                     <a:lnL w="6350" cap="flat" cmpd="sng" algn="ctr">
                       <a:solidFill>
-                        <a:srgbClr val="DDDDDD"/>
+                        <a:srgbClr val="D8DEE6"/>
                       </a:solidFill>
                       <a:prstDash val="solid"/>
                       <a:round/>
@@ -10593,7 +10593,7 @@
                     </a:lnL>
                     <a:lnR w="6350" cap="flat" cmpd="sng" algn="ctr">
                       <a:solidFill>
-                        <a:srgbClr val="DDDDDD"/>
+                        <a:srgbClr val="D8DEE6"/>
                       </a:solidFill>
                       <a:prstDash val="solid"/>
                       <a:round/>
@@ -10602,7 +10602,7 @@
                     </a:lnR>
                     <a:lnT w="6350" cap="flat" cmpd="sng" algn="ctr">
                       <a:solidFill>
-                        <a:srgbClr val="DDDDDD"/>
+                        <a:srgbClr val="D8DEE6"/>
                       </a:solidFill>
                       <a:prstDash val="solid"/>
                       <a:round/>
@@ -10611,7 +10611,7 @@
                     </a:lnT>
                     <a:lnB w="6350" cap="flat" cmpd="sng" algn="ctr">
                       <a:solidFill>
-                        <a:srgbClr val="DDDDDD"/>
+                        <a:srgbClr val="D8DEE6"/>
                       </a:solidFill>
                       <a:prstDash val="solid"/>
                       <a:round/>
@@ -10649,7 +10649,7 @@
                   <a:tcPr>
                     <a:lnL w="6350" cap="flat" cmpd="sng" algn="ctr">
                       <a:solidFill>
-                        <a:srgbClr val="DDDDDD"/>
+                        <a:srgbClr val="D8DEE6"/>
                       </a:solidFill>
                       <a:prstDash val="solid"/>
                       <a:round/>
@@ -10658,7 +10658,7 @@
                     </a:lnL>
                     <a:lnR w="6350" cap="flat" cmpd="sng" algn="ctr">
                       <a:solidFill>
-                        <a:srgbClr val="DDDDDD"/>
+                        <a:srgbClr val="D8DEE6"/>
                       </a:solidFill>
                       <a:prstDash val="solid"/>
                       <a:round/>
@@ -10667,7 +10667,7 @@
                     </a:lnR>
                     <a:lnT w="6350" cap="flat" cmpd="sng" algn="ctr">
                       <a:solidFill>
-                        <a:srgbClr val="DDDDDD"/>
+                        <a:srgbClr val="D8DEE6"/>
                       </a:solidFill>
                       <a:prstDash val="solid"/>
                       <a:round/>
@@ -10676,7 +10676,7 @@
                     </a:lnT>
                     <a:lnB w="6350" cap="flat" cmpd="sng" algn="ctr">
                       <a:solidFill>
-                        <a:srgbClr val="DDDDDD"/>
+                        <a:srgbClr val="D8DEE6"/>
                       </a:solidFill>
                       <a:prstDash val="solid"/>
                       <a:round/>
@@ -10696,7 +10696,7 @@
                       <a:r>
                         <a:rPr lang="en-US" sz="900" b="1" dirty="0">
                           <a:solidFill>
-                            <a:srgbClr val="C0392B"/>
+                            <a:srgbClr val="D9472B"/>
                           </a:solidFill>
                           <a:latin typeface="Calibri" pitchFamily="34" charset="0"/>
                           <a:ea typeface="Calibri" pitchFamily="34" charset="-122"/>
@@ -10714,7 +10714,7 @@
                   <a:tcPr>
                     <a:lnL w="6350" cap="flat" cmpd="sng" algn="ctr">
                       <a:solidFill>
-                        <a:srgbClr val="DDDDDD"/>
+                        <a:srgbClr val="D8DEE6"/>
                       </a:solidFill>
                       <a:prstDash val="solid"/>
                       <a:round/>
@@ -10723,7 +10723,7 @@
                     </a:lnL>
                     <a:lnR w="6350" cap="flat" cmpd="sng" algn="ctr">
                       <a:solidFill>
-                        <a:srgbClr val="DDDDDD"/>
+                        <a:srgbClr val="D8DEE6"/>
                       </a:solidFill>
                       <a:prstDash val="solid"/>
                       <a:round/>
@@ -10732,7 +10732,7 @@
                     </a:lnR>
                     <a:lnT w="6350" cap="flat" cmpd="sng" algn="ctr">
                       <a:solidFill>
-                        <a:srgbClr val="DDDDDD"/>
+                        <a:srgbClr val="D8DEE6"/>
                       </a:solidFill>
                       <a:prstDash val="solid"/>
                       <a:round/>
@@ -10741,7 +10741,7 @@
                     </a:lnT>
                     <a:lnB w="6350" cap="flat" cmpd="sng" algn="ctr">
                       <a:solidFill>
-                        <a:srgbClr val="DDDDDD"/>
+                        <a:srgbClr val="D8DEE6"/>
                       </a:solidFill>
                       <a:prstDash val="solid"/>
                       <a:round/>
@@ -10804,7 +10804,7 @@
     <p:bg>
       <p:bgPr>
         <a:solidFill>
-          <a:srgbClr val="FAF8F5"/>
+          <a:srgbClr val="FFFFFF"/>
         </a:solidFill>
         <a:effectLst/>
       </p:bgPr>
@@ -10838,7 +10838,7 @@
             <a:avLst/>
           </a:prstGeom>
           <a:solidFill>
-            <a:srgbClr val="3B2F2F"/>
+            <a:srgbClr val="1B2A41"/>
           </a:solidFill>
           <a:ln/>
         </p:spPr>
@@ -10879,9 +10879,9 @@
                 <a:solidFill>
                   <a:srgbClr val="FFFFFF"/>
                 </a:solidFill>
-                <a:latin typeface="Georgia" pitchFamily="34" charset="0"/>
-                <a:ea typeface="Georgia" pitchFamily="34" charset="-122"/>
-                <a:cs typeface="Georgia" pitchFamily="34" charset="-120"/>
+                <a:latin typeface="Calibri" pitchFamily="34" charset="0"/>
+                <a:ea typeface="Calibri" pitchFamily="34" charset="-122"/>
+                <a:cs typeface="Calibri" pitchFamily="34" charset="-120"/>
               </a:rPr>
               <a:t>Eastleigh Recommendation</a:t>
             </a:r>
@@ -10916,11 +10916,11 @@
             <a:r>
               <a:rPr lang="en-US" sz="1500" b="1" dirty="0">
                 <a:solidFill>
-                  <a:srgbClr val="B85042"/>
+                  <a:srgbClr val="2F6690"/>
                 </a:solidFill>
-                <a:latin typeface="Georgia" pitchFamily="34" charset="0"/>
-                <a:ea typeface="Georgia" pitchFamily="34" charset="-122"/>
-                <a:cs typeface="Georgia" pitchFamily="34" charset="-120"/>
+                <a:latin typeface="Calibri" pitchFamily="34" charset="0"/>
+                <a:ea typeface="Calibri" pitchFamily="34" charset="-122"/>
+                <a:cs typeface="Calibri" pitchFamily="34" charset="-120"/>
               </a:rPr>
               <a:t>Do not shut down Eastleigh. It is the 2nd most profitable kitchen and the only one growing consistently.</a:t>
             </a:r>
@@ -10977,7 +10977,7 @@
             <a:avLst/>
           </a:prstGeom>
           <a:solidFill>
-            <a:srgbClr val="B85042"/>
+            <a:srgbClr val="2F6690"/>
           </a:solidFill>
           <a:ln/>
         </p:spPr>
@@ -11016,11 +11016,11 @@
             <a:r>
               <a:rPr lang="en-US" sz="1300" b="1" dirty="0">
                 <a:solidFill>
-                  <a:srgbClr val="2D2D2D"/>
+                  <a:srgbClr val="1F2A37"/>
                 </a:solidFill>
-                <a:latin typeface="Georgia" pitchFamily="34" charset="0"/>
-                <a:ea typeface="Georgia" pitchFamily="34" charset="-122"/>
-                <a:cs typeface="Georgia" pitchFamily="34" charset="-120"/>
+                <a:latin typeface="Calibri" pitchFamily="34" charset="0"/>
+                <a:ea typeface="Calibri" pitchFamily="34" charset="-122"/>
+                <a:cs typeface="Calibri" pitchFamily="34" charset="-120"/>
               </a:rPr>
               <a:t>1. Keep Eastleigh open with a clear target</a:t>
             </a:r>
@@ -11055,7 +11055,7 @@
             <a:r>
               <a:rPr lang="en-US" sz="1100" dirty="0">
                 <a:solidFill>
-                  <a:srgbClr val="7A7A7A"/>
+                  <a:srgbClr val="5F6B7A"/>
                 </a:solidFill>
                 <a:latin typeface="Calibri" pitchFamily="34" charset="0"/>
                 <a:ea typeface="Calibri" pitchFamily="34" charset="-122"/>
@@ -11116,7 +11116,7 @@
             <a:avLst/>
           </a:prstGeom>
           <a:solidFill>
-            <a:srgbClr val="B85042"/>
+            <a:srgbClr val="2F6690"/>
           </a:solidFill>
           <a:ln/>
         </p:spPr>
@@ -11155,11 +11155,11 @@
             <a:r>
               <a:rPr lang="en-US" sz="1300" b="1" dirty="0">
                 <a:solidFill>
-                  <a:srgbClr val="2D2D2D"/>
+                  <a:srgbClr val="1F2A37"/>
                 </a:solidFill>
-                <a:latin typeface="Georgia" pitchFamily="34" charset="0"/>
-                <a:ea typeface="Georgia" pitchFamily="34" charset="-122"/>
-                <a:cs typeface="Georgia" pitchFamily="34" charset="-120"/>
+                <a:latin typeface="Calibri" pitchFamily="34" charset="0"/>
+                <a:ea typeface="Calibri" pitchFamily="34" charset="-122"/>
+                <a:cs typeface="Calibri" pitchFamily="34" charset="-120"/>
               </a:rPr>
               <a:t>2. Invest modestly in local marketing</a:t>
             </a:r>
@@ -11194,7 +11194,7 @@
             <a:r>
               <a:rPr lang="en-US" sz="1100" dirty="0">
                 <a:solidFill>
-                  <a:srgbClr val="7A7A7A"/>
+                  <a:srgbClr val="5F6B7A"/>
                 </a:solidFill>
                 <a:latin typeface="Calibri" pitchFamily="34" charset="0"/>
                 <a:ea typeface="Calibri" pitchFamily="34" charset="-122"/>
@@ -11255,7 +11255,7 @@
             <a:avLst/>
           </a:prstGeom>
           <a:solidFill>
-            <a:srgbClr val="B85042"/>
+            <a:srgbClr val="2F6690"/>
           </a:solidFill>
           <a:ln/>
         </p:spPr>
@@ -11294,11 +11294,11 @@
             <a:r>
               <a:rPr lang="en-US" sz="1300" b="1" dirty="0">
                 <a:solidFill>
-                  <a:srgbClr val="2D2D2D"/>
+                  <a:srgbClr val="1F2A37"/>
                 </a:solidFill>
-                <a:latin typeface="Georgia" pitchFamily="34" charset="0"/>
-                <a:ea typeface="Georgia" pitchFamily="34" charset="-122"/>
-                <a:cs typeface="Georgia" pitchFamily="34" charset="-120"/>
+                <a:latin typeface="Calibri" pitchFamily="34" charset="0"/>
+                <a:ea typeface="Calibri" pitchFamily="34" charset="-122"/>
+                <a:cs typeface="Calibri" pitchFamily="34" charset="-120"/>
               </a:rPr>
               <a:t>3. If cuts are needed, scrutinize Westlands first</a:t>
             </a:r>
@@ -11333,7 +11333,7 @@
             <a:r>
               <a:rPr lang="en-US" sz="1100" dirty="0">
                 <a:solidFill>
-                  <a:srgbClr val="7A7A7A"/>
+                  <a:srgbClr val="5F6B7A"/>
                 </a:solidFill>
                 <a:latin typeface="Calibri" pitchFamily="34" charset="0"/>
                 <a:ea typeface="Calibri" pitchFamily="34" charset="-122"/>
@@ -11359,7 +11359,7 @@
     <p:bg>
       <p:bgPr>
         <a:solidFill>
-          <a:srgbClr val="FAF8F5"/>
+          <a:srgbClr val="FFFFFF"/>
         </a:solidFill>
         <a:effectLst/>
       </p:bgPr>
@@ -11393,7 +11393,7 @@
             <a:avLst/>
           </a:prstGeom>
           <a:solidFill>
-            <a:srgbClr val="3B2F2F"/>
+            <a:srgbClr val="1B2A41"/>
           </a:solidFill>
           <a:ln/>
         </p:spPr>
@@ -11458,9 +11458,9 @@
                 <a:solidFill>
                   <a:srgbClr val="FFFFFF"/>
                 </a:solidFill>
-                <a:latin typeface="Georgia" pitchFamily="34" charset="0"/>
-                <a:ea typeface="Georgia" pitchFamily="34" charset="-122"/>
-                <a:cs typeface="Georgia" pitchFamily="34" charset="-120"/>
+                <a:latin typeface="Calibri" pitchFamily="34" charset="0"/>
+                <a:ea typeface="Calibri" pitchFamily="34" charset="-122"/>
+                <a:cs typeface="Calibri" pitchFamily="34" charset="-120"/>
               </a:rPr>
               <a:t>Q3: Menu Item Performance Matrix</a:t>
             </a:r>
@@ -11571,7 +11571,7 @@
                   <a:tcPr>
                     <a:lnL w="6350" cap="flat" cmpd="sng" algn="ctr">
                       <a:solidFill>
-                        <a:srgbClr val="DDDDDD"/>
+                        <a:srgbClr val="D8DEE6"/>
                       </a:solidFill>
                       <a:prstDash val="solid"/>
                       <a:round/>
@@ -11580,7 +11580,7 @@
                     </a:lnL>
                     <a:lnR w="6350" cap="flat" cmpd="sng" algn="ctr">
                       <a:solidFill>
-                        <a:srgbClr val="DDDDDD"/>
+                        <a:srgbClr val="D8DEE6"/>
                       </a:solidFill>
                       <a:prstDash val="solid"/>
                       <a:round/>
@@ -11589,7 +11589,7 @@
                     </a:lnR>
                     <a:lnT w="6350" cap="flat" cmpd="sng" algn="ctr">
                       <a:solidFill>
-                        <a:srgbClr val="DDDDDD"/>
+                        <a:srgbClr val="D8DEE6"/>
                       </a:solidFill>
                       <a:prstDash val="solid"/>
                       <a:round/>
@@ -11598,7 +11598,7 @@
                     </a:lnT>
                     <a:lnB w="6350" cap="flat" cmpd="sng" algn="ctr">
                       <a:solidFill>
-                        <a:srgbClr val="DDDDDD"/>
+                        <a:srgbClr val="D8DEE6"/>
                       </a:solidFill>
                       <a:prstDash val="solid"/>
                       <a:round/>
@@ -11606,7 +11606,7 @@
                       <a:tailEnd type="none" w="med" len="med"/>
                     </a:lnB>
                     <a:solidFill>
-                      <a:srgbClr val="B85042"/>
+                      <a:srgbClr val="2F6690"/>
                     </a:solidFill>
                   </a:tcPr>
                 </a:tc>
@@ -11639,7 +11639,7 @@
                   <a:tcPr>
                     <a:lnL w="6350" cap="flat" cmpd="sng" algn="ctr">
                       <a:solidFill>
-                        <a:srgbClr val="DDDDDD"/>
+                        <a:srgbClr val="D8DEE6"/>
                       </a:solidFill>
                       <a:prstDash val="solid"/>
                       <a:round/>
@@ -11648,7 +11648,7 @@
                     </a:lnL>
                     <a:lnR w="6350" cap="flat" cmpd="sng" algn="ctr">
                       <a:solidFill>
-                        <a:srgbClr val="DDDDDD"/>
+                        <a:srgbClr val="D8DEE6"/>
                       </a:solidFill>
                       <a:prstDash val="solid"/>
                       <a:round/>
@@ -11657,7 +11657,7 @@
                     </a:lnR>
                     <a:lnT w="6350" cap="flat" cmpd="sng" algn="ctr">
                       <a:solidFill>
-                        <a:srgbClr val="DDDDDD"/>
+                        <a:srgbClr val="D8DEE6"/>
                       </a:solidFill>
                       <a:prstDash val="solid"/>
                       <a:round/>
@@ -11666,7 +11666,7 @@
                     </a:lnT>
                     <a:lnB w="6350" cap="flat" cmpd="sng" algn="ctr">
                       <a:solidFill>
-                        <a:srgbClr val="DDDDDD"/>
+                        <a:srgbClr val="D8DEE6"/>
                       </a:solidFill>
                       <a:prstDash val="solid"/>
                       <a:round/>
@@ -11674,7 +11674,7 @@
                       <a:tailEnd type="none" w="med" len="med"/>
                     </a:lnB>
                     <a:solidFill>
-                      <a:srgbClr val="B85042"/>
+                      <a:srgbClr val="2F6690"/>
                     </a:solidFill>
                   </a:tcPr>
                 </a:tc>
@@ -11707,7 +11707,7 @@
                   <a:tcPr>
                     <a:lnL w="6350" cap="flat" cmpd="sng" algn="ctr">
                       <a:solidFill>
-                        <a:srgbClr val="DDDDDD"/>
+                        <a:srgbClr val="D8DEE6"/>
                       </a:solidFill>
                       <a:prstDash val="solid"/>
                       <a:round/>
@@ -11716,7 +11716,7 @@
                     </a:lnL>
                     <a:lnR w="6350" cap="flat" cmpd="sng" algn="ctr">
                       <a:solidFill>
-                        <a:srgbClr val="DDDDDD"/>
+                        <a:srgbClr val="D8DEE6"/>
                       </a:solidFill>
                       <a:prstDash val="solid"/>
                       <a:round/>
@@ -11725,7 +11725,7 @@
                     </a:lnR>
                     <a:lnT w="6350" cap="flat" cmpd="sng" algn="ctr">
                       <a:solidFill>
-                        <a:srgbClr val="DDDDDD"/>
+                        <a:srgbClr val="D8DEE6"/>
                       </a:solidFill>
                       <a:prstDash val="solid"/>
                       <a:round/>
@@ -11734,7 +11734,7 @@
                     </a:lnT>
                     <a:lnB w="6350" cap="flat" cmpd="sng" algn="ctr">
                       <a:solidFill>
-                        <a:srgbClr val="DDDDDD"/>
+                        <a:srgbClr val="D8DEE6"/>
                       </a:solidFill>
                       <a:prstDash val="solid"/>
                       <a:round/>
@@ -11742,7 +11742,7 @@
                       <a:tailEnd type="none" w="med" len="med"/>
                     </a:lnB>
                     <a:solidFill>
-                      <a:srgbClr val="B85042"/>
+                      <a:srgbClr val="2F6690"/>
                     </a:solidFill>
                   </a:tcPr>
                 </a:tc>
@@ -11775,7 +11775,7 @@
                   <a:tcPr>
                     <a:lnL w="6350" cap="flat" cmpd="sng" algn="ctr">
                       <a:solidFill>
-                        <a:srgbClr val="DDDDDD"/>
+                        <a:srgbClr val="D8DEE6"/>
                       </a:solidFill>
                       <a:prstDash val="solid"/>
                       <a:round/>
@@ -11784,7 +11784,7 @@
                     </a:lnL>
                     <a:lnR w="6350" cap="flat" cmpd="sng" algn="ctr">
                       <a:solidFill>
-                        <a:srgbClr val="DDDDDD"/>
+                        <a:srgbClr val="D8DEE6"/>
                       </a:solidFill>
                       <a:prstDash val="solid"/>
                       <a:round/>
@@ -11793,7 +11793,7 @@
                     </a:lnR>
                     <a:lnT w="6350" cap="flat" cmpd="sng" algn="ctr">
                       <a:solidFill>
-                        <a:srgbClr val="DDDDDD"/>
+                        <a:srgbClr val="D8DEE6"/>
                       </a:solidFill>
                       <a:prstDash val="solid"/>
                       <a:round/>
@@ -11802,7 +11802,7 @@
                     </a:lnT>
                     <a:lnB w="6350" cap="flat" cmpd="sng" algn="ctr">
                       <a:solidFill>
-                        <a:srgbClr val="DDDDDD"/>
+                        <a:srgbClr val="D8DEE6"/>
                       </a:solidFill>
                       <a:prstDash val="solid"/>
                       <a:round/>
@@ -11810,7 +11810,7 @@
                       <a:tailEnd type="none" w="med" len="med"/>
                     </a:lnB>
                     <a:solidFill>
-                      <a:srgbClr val="B85042"/>
+                      <a:srgbClr val="2F6690"/>
                     </a:solidFill>
                   </a:tcPr>
                 </a:tc>
@@ -11843,7 +11843,7 @@
                   <a:tcPr>
                     <a:lnL w="6350" cap="flat" cmpd="sng" algn="ctr">
                       <a:solidFill>
-                        <a:srgbClr val="DDDDDD"/>
+                        <a:srgbClr val="D8DEE6"/>
                       </a:solidFill>
                       <a:prstDash val="solid"/>
                       <a:round/>
@@ -11852,7 +11852,7 @@
                     </a:lnL>
                     <a:lnR w="6350" cap="flat" cmpd="sng" algn="ctr">
                       <a:solidFill>
-                        <a:srgbClr val="DDDDDD"/>
+                        <a:srgbClr val="D8DEE6"/>
                       </a:solidFill>
                       <a:prstDash val="solid"/>
                       <a:round/>
@@ -11861,7 +11861,7 @@
                     </a:lnR>
                     <a:lnT w="6350" cap="flat" cmpd="sng" algn="ctr">
                       <a:solidFill>
-                        <a:srgbClr val="DDDDDD"/>
+                        <a:srgbClr val="D8DEE6"/>
                       </a:solidFill>
                       <a:prstDash val="solid"/>
                       <a:round/>
@@ -11870,7 +11870,7 @@
                     </a:lnT>
                     <a:lnB w="6350" cap="flat" cmpd="sng" algn="ctr">
                       <a:solidFill>
-                        <a:srgbClr val="DDDDDD"/>
+                        <a:srgbClr val="D8DEE6"/>
                       </a:solidFill>
                       <a:prstDash val="solid"/>
                       <a:round/>
@@ -11878,7 +11878,7 @@
                       <a:tailEnd type="none" w="med" len="med"/>
                     </a:lnB>
                     <a:solidFill>
-                      <a:srgbClr val="B85042"/>
+                      <a:srgbClr val="2F6690"/>
                     </a:solidFill>
                   </a:tcPr>
                 </a:tc>
@@ -11911,7 +11911,7 @@
                   <a:tcPr>
                     <a:lnL w="6350" cap="flat" cmpd="sng" algn="ctr">
                       <a:solidFill>
-                        <a:srgbClr val="DDDDDD"/>
+                        <a:srgbClr val="D8DEE6"/>
                       </a:solidFill>
                       <a:prstDash val="solid"/>
                       <a:round/>
@@ -11920,7 +11920,7 @@
                     </a:lnL>
                     <a:lnR w="6350" cap="flat" cmpd="sng" algn="ctr">
                       <a:solidFill>
-                        <a:srgbClr val="DDDDDD"/>
+                        <a:srgbClr val="D8DEE6"/>
                       </a:solidFill>
                       <a:prstDash val="solid"/>
                       <a:round/>
@@ -11929,7 +11929,7 @@
                     </a:lnR>
                     <a:lnT w="6350" cap="flat" cmpd="sng" algn="ctr">
                       <a:solidFill>
-                        <a:srgbClr val="DDDDDD"/>
+                        <a:srgbClr val="D8DEE6"/>
                       </a:solidFill>
                       <a:prstDash val="solid"/>
                       <a:round/>
@@ -11938,7 +11938,7 @@
                     </a:lnT>
                     <a:lnB w="6350" cap="flat" cmpd="sng" algn="ctr">
                       <a:solidFill>
-                        <a:srgbClr val="DDDDDD"/>
+                        <a:srgbClr val="D8DEE6"/>
                       </a:solidFill>
                       <a:prstDash val="solid"/>
                       <a:round/>
@@ -11946,7 +11946,7 @@
                       <a:tailEnd type="none" w="med" len="med"/>
                     </a:lnB>
                     <a:solidFill>
-                      <a:srgbClr val="B85042"/>
+                      <a:srgbClr val="2F6690"/>
                     </a:solidFill>
                   </a:tcPr>
                 </a:tc>
@@ -11979,7 +11979,7 @@
                   <a:tcPr>
                     <a:lnL w="6350" cap="flat" cmpd="sng" algn="ctr">
                       <a:solidFill>
-                        <a:srgbClr val="DDDDDD"/>
+                        <a:srgbClr val="D8DEE6"/>
                       </a:solidFill>
                       <a:prstDash val="solid"/>
                       <a:round/>
@@ -11988,7 +11988,7 @@
                     </a:lnL>
                     <a:lnR w="6350" cap="flat" cmpd="sng" algn="ctr">
                       <a:solidFill>
-                        <a:srgbClr val="DDDDDD"/>
+                        <a:srgbClr val="D8DEE6"/>
                       </a:solidFill>
                       <a:prstDash val="solid"/>
                       <a:round/>
@@ -11997,7 +11997,7 @@
                     </a:lnR>
                     <a:lnT w="6350" cap="flat" cmpd="sng" algn="ctr">
                       <a:solidFill>
-                        <a:srgbClr val="DDDDDD"/>
+                        <a:srgbClr val="D8DEE6"/>
                       </a:solidFill>
                       <a:prstDash val="solid"/>
                       <a:round/>
@@ -12006,7 +12006,7 @@
                     </a:lnT>
                     <a:lnB w="6350" cap="flat" cmpd="sng" algn="ctr">
                       <a:solidFill>
-                        <a:srgbClr val="DDDDDD"/>
+                        <a:srgbClr val="D8DEE6"/>
                       </a:solidFill>
                       <a:prstDash val="solid"/>
                       <a:round/>
@@ -12014,7 +12014,7 @@
                       <a:tailEnd type="none" w="med" len="med"/>
                     </a:lnB>
                     <a:solidFill>
-                      <a:srgbClr val="B85042"/>
+                      <a:srgbClr val="2F6690"/>
                     </a:solidFill>
                   </a:tcPr>
                 </a:tc>
@@ -12054,7 +12054,7 @@
                   <a:tcPr>
                     <a:lnL w="6350" cap="flat" cmpd="sng" algn="ctr">
                       <a:solidFill>
-                        <a:srgbClr val="DDDDDD"/>
+                        <a:srgbClr val="D8DEE6"/>
                       </a:solidFill>
                       <a:prstDash val="solid"/>
                       <a:round/>
@@ -12063,7 +12063,7 @@
                     </a:lnL>
                     <a:lnR w="6350" cap="flat" cmpd="sng" algn="ctr">
                       <a:solidFill>
-                        <a:srgbClr val="DDDDDD"/>
+                        <a:srgbClr val="D8DEE6"/>
                       </a:solidFill>
                       <a:prstDash val="solid"/>
                       <a:round/>
@@ -12072,7 +12072,7 @@
                     </a:lnR>
                     <a:lnT w="6350" cap="flat" cmpd="sng" algn="ctr">
                       <a:solidFill>
-                        <a:srgbClr val="DDDDDD"/>
+                        <a:srgbClr val="D8DEE6"/>
                       </a:solidFill>
                       <a:prstDash val="solid"/>
                       <a:round/>
@@ -12081,7 +12081,7 @@
                     </a:lnT>
                     <a:lnB w="6350" cap="flat" cmpd="sng" algn="ctr">
                       <a:solidFill>
-                        <a:srgbClr val="DDDDDD"/>
+                        <a:srgbClr val="D8DEE6"/>
                       </a:solidFill>
                       <a:prstDash val="solid"/>
                       <a:round/>
@@ -12089,7 +12089,7 @@
                       <a:tailEnd type="none" w="med" len="med"/>
                     </a:lnB>
                     <a:solidFill>
-                      <a:srgbClr val="F5F3EF"/>
+                      <a:srgbClr val="F2F5F9"/>
                     </a:solidFill>
                   </a:tcPr>
                 </a:tc>
@@ -12122,7 +12122,7 @@
                   <a:tcPr>
                     <a:lnL w="6350" cap="flat" cmpd="sng" algn="ctr">
                       <a:solidFill>
-                        <a:srgbClr val="DDDDDD"/>
+                        <a:srgbClr val="D8DEE6"/>
                       </a:solidFill>
                       <a:prstDash val="solid"/>
                       <a:round/>
@@ -12131,7 +12131,7 @@
                     </a:lnL>
                     <a:lnR w="6350" cap="flat" cmpd="sng" algn="ctr">
                       <a:solidFill>
-                        <a:srgbClr val="DDDDDD"/>
+                        <a:srgbClr val="D8DEE6"/>
                       </a:solidFill>
                       <a:prstDash val="solid"/>
                       <a:round/>
@@ -12140,7 +12140,7 @@
                     </a:lnR>
                     <a:lnT w="6350" cap="flat" cmpd="sng" algn="ctr">
                       <a:solidFill>
-                        <a:srgbClr val="DDDDDD"/>
+                        <a:srgbClr val="D8DEE6"/>
                       </a:solidFill>
                       <a:prstDash val="solid"/>
                       <a:round/>
@@ -12149,7 +12149,7 @@
                     </a:lnT>
                     <a:lnB w="6350" cap="flat" cmpd="sng" algn="ctr">
                       <a:solidFill>
-                        <a:srgbClr val="DDDDDD"/>
+                        <a:srgbClr val="D8DEE6"/>
                       </a:solidFill>
                       <a:prstDash val="solid"/>
                       <a:round/>
@@ -12157,7 +12157,7 @@
                       <a:tailEnd type="none" w="med" len="med"/>
                     </a:lnB>
                     <a:solidFill>
-                      <a:srgbClr val="F5F3EF"/>
+                      <a:srgbClr val="F2F5F9"/>
                     </a:solidFill>
                   </a:tcPr>
                 </a:tc>
@@ -12190,7 +12190,7 @@
                   <a:tcPr>
                     <a:lnL w="6350" cap="flat" cmpd="sng" algn="ctr">
                       <a:solidFill>
-                        <a:srgbClr val="DDDDDD"/>
+                        <a:srgbClr val="D8DEE6"/>
                       </a:solidFill>
                       <a:prstDash val="solid"/>
                       <a:round/>
@@ -12199,7 +12199,7 @@
                     </a:lnL>
                     <a:lnR w="6350" cap="flat" cmpd="sng" algn="ctr">
                       <a:solidFill>
-                        <a:srgbClr val="DDDDDD"/>
+                        <a:srgbClr val="D8DEE6"/>
                       </a:solidFill>
                       <a:prstDash val="solid"/>
                       <a:round/>
@@ -12208,7 +12208,7 @@
                     </a:lnR>
                     <a:lnT w="6350" cap="flat" cmpd="sng" algn="ctr">
                       <a:solidFill>
-                        <a:srgbClr val="DDDDDD"/>
+                        <a:srgbClr val="D8DEE6"/>
                       </a:solidFill>
                       <a:prstDash val="solid"/>
                       <a:round/>
@@ -12217,7 +12217,7 @@
                     </a:lnT>
                     <a:lnB w="6350" cap="flat" cmpd="sng" algn="ctr">
                       <a:solidFill>
-                        <a:srgbClr val="DDDDDD"/>
+                        <a:srgbClr val="D8DEE6"/>
                       </a:solidFill>
                       <a:prstDash val="solid"/>
                       <a:round/>
@@ -12225,7 +12225,7 @@
                       <a:tailEnd type="none" w="med" len="med"/>
                     </a:lnB>
                     <a:solidFill>
-                      <a:srgbClr val="F5F3EF"/>
+                      <a:srgbClr val="F2F5F9"/>
                     </a:solidFill>
                   </a:tcPr>
                 </a:tc>
@@ -12258,7 +12258,7 @@
                   <a:tcPr>
                     <a:lnL w="6350" cap="flat" cmpd="sng" algn="ctr">
                       <a:solidFill>
-                        <a:srgbClr val="DDDDDD"/>
+                        <a:srgbClr val="D8DEE6"/>
                       </a:solidFill>
                       <a:prstDash val="solid"/>
                       <a:round/>
@@ -12267,7 +12267,7 @@
                     </a:lnL>
                     <a:lnR w="6350" cap="flat" cmpd="sng" algn="ctr">
                       <a:solidFill>
-                        <a:srgbClr val="DDDDDD"/>
+                        <a:srgbClr val="D8DEE6"/>
                       </a:solidFill>
                       <a:prstDash val="solid"/>
                       <a:round/>
@@ -12276,7 +12276,7 @@
                     </a:lnR>
                     <a:lnT w="6350" cap="flat" cmpd="sng" algn="ctr">
                       <a:solidFill>
-                        <a:srgbClr val="DDDDDD"/>
+                        <a:srgbClr val="D8DEE6"/>
                       </a:solidFill>
                       <a:prstDash val="solid"/>
                       <a:round/>
@@ -12285,7 +12285,7 @@
                     </a:lnT>
                     <a:lnB w="6350" cap="flat" cmpd="sng" algn="ctr">
                       <a:solidFill>
-                        <a:srgbClr val="DDDDDD"/>
+                        <a:srgbClr val="D8DEE6"/>
                       </a:solidFill>
                       <a:prstDash val="solid"/>
                       <a:round/>
@@ -12293,7 +12293,7 @@
                       <a:tailEnd type="none" w="med" len="med"/>
                     </a:lnB>
                     <a:solidFill>
-                      <a:srgbClr val="F5F3EF"/>
+                      <a:srgbClr val="F2F5F9"/>
                     </a:solidFill>
                   </a:tcPr>
                 </a:tc>
@@ -12326,7 +12326,7 @@
                   <a:tcPr>
                     <a:lnL w="6350" cap="flat" cmpd="sng" algn="ctr">
                       <a:solidFill>
-                        <a:srgbClr val="DDDDDD"/>
+                        <a:srgbClr val="D8DEE6"/>
                       </a:solidFill>
                       <a:prstDash val="solid"/>
                       <a:round/>
@@ -12335,7 +12335,7 @@
                     </a:lnL>
                     <a:lnR w="6350" cap="flat" cmpd="sng" algn="ctr">
                       <a:solidFill>
-                        <a:srgbClr val="DDDDDD"/>
+                        <a:srgbClr val="D8DEE6"/>
                       </a:solidFill>
                       <a:prstDash val="solid"/>
                       <a:round/>
@@ -12344,7 +12344,7 @@
                     </a:lnR>
                     <a:lnT w="6350" cap="flat" cmpd="sng" algn="ctr">
                       <a:solidFill>
-                        <a:srgbClr val="DDDDDD"/>
+                        <a:srgbClr val="D8DEE6"/>
                       </a:solidFill>
                       <a:prstDash val="solid"/>
                       <a:round/>
@@ -12353,7 +12353,7 @@
                     </a:lnT>
                     <a:lnB w="6350" cap="flat" cmpd="sng" algn="ctr">
                       <a:solidFill>
-                        <a:srgbClr val="DDDDDD"/>
+                        <a:srgbClr val="D8DEE6"/>
                       </a:solidFill>
                       <a:prstDash val="solid"/>
                       <a:round/>
@@ -12361,7 +12361,7 @@
                       <a:tailEnd type="none" w="med" len="med"/>
                     </a:lnB>
                     <a:solidFill>
-                      <a:srgbClr val="F5F3EF"/>
+                      <a:srgbClr val="F2F5F9"/>
                     </a:solidFill>
                   </a:tcPr>
                 </a:tc>
@@ -12394,7 +12394,7 @@
                   <a:tcPr>
                     <a:lnL w="6350" cap="flat" cmpd="sng" algn="ctr">
                       <a:solidFill>
-                        <a:srgbClr val="DDDDDD"/>
+                        <a:srgbClr val="D8DEE6"/>
                       </a:solidFill>
                       <a:prstDash val="solid"/>
                       <a:round/>
@@ -12403,7 +12403,7 @@
                     </a:lnL>
                     <a:lnR w="6350" cap="flat" cmpd="sng" algn="ctr">
                       <a:solidFill>
-                        <a:srgbClr val="DDDDDD"/>
+                        <a:srgbClr val="D8DEE6"/>
                       </a:solidFill>
                       <a:prstDash val="solid"/>
                       <a:round/>
@@ -12412,7 +12412,7 @@
                     </a:lnR>
                     <a:lnT w="6350" cap="flat" cmpd="sng" algn="ctr">
                       <a:solidFill>
-                        <a:srgbClr val="DDDDDD"/>
+                        <a:srgbClr val="D8DEE6"/>
                       </a:solidFill>
                       <a:prstDash val="solid"/>
                       <a:round/>
@@ -12421,7 +12421,7 @@
                     </a:lnT>
                     <a:lnB w="6350" cap="flat" cmpd="sng" algn="ctr">
                       <a:solidFill>
-                        <a:srgbClr val="DDDDDD"/>
+                        <a:srgbClr val="D8DEE6"/>
                       </a:solidFill>
                       <a:prstDash val="solid"/>
                       <a:round/>
@@ -12429,7 +12429,7 @@
                       <a:tailEnd type="none" w="med" len="med"/>
                     </a:lnB>
                     <a:solidFill>
-                      <a:srgbClr val="F5F3EF"/>
+                      <a:srgbClr val="F2F5F9"/>
                     </a:solidFill>
                   </a:tcPr>
                 </a:tc>
@@ -12444,7 +12444,7 @@
                       <a:r>
                         <a:rPr lang="en-US" sz="900" b="1" dirty="0">
                           <a:solidFill>
-                            <a:srgbClr val="4A9E6B"/>
+                            <a:srgbClr val="0F9D8A"/>
                           </a:solidFill>
                           <a:latin typeface="Calibri" pitchFamily="34" charset="0"/>
                           <a:ea typeface="Calibri" pitchFamily="34" charset="-122"/>
@@ -12462,7 +12462,7 @@
                   <a:tcPr>
                     <a:lnL w="6350" cap="flat" cmpd="sng" algn="ctr">
                       <a:solidFill>
-                        <a:srgbClr val="DDDDDD"/>
+                        <a:srgbClr val="D8DEE6"/>
                       </a:solidFill>
                       <a:prstDash val="solid"/>
                       <a:round/>
@@ -12471,7 +12471,7 @@
                     </a:lnL>
                     <a:lnR w="6350" cap="flat" cmpd="sng" algn="ctr">
                       <a:solidFill>
-                        <a:srgbClr val="DDDDDD"/>
+                        <a:srgbClr val="D8DEE6"/>
                       </a:solidFill>
                       <a:prstDash val="solid"/>
                       <a:round/>
@@ -12480,7 +12480,7 @@
                     </a:lnR>
                     <a:lnT w="6350" cap="flat" cmpd="sng" algn="ctr">
                       <a:solidFill>
-                        <a:srgbClr val="DDDDDD"/>
+                        <a:srgbClr val="D8DEE6"/>
                       </a:solidFill>
                       <a:prstDash val="solid"/>
                       <a:round/>
@@ -12489,7 +12489,7 @@
                     </a:lnT>
                     <a:lnB w="6350" cap="flat" cmpd="sng" algn="ctr">
                       <a:solidFill>
-                        <a:srgbClr val="DDDDDD"/>
+                        <a:srgbClr val="D8DEE6"/>
                       </a:solidFill>
                       <a:prstDash val="solid"/>
                       <a:round/>
@@ -12497,7 +12497,7 @@
                       <a:tailEnd type="none" w="med" len="med"/>
                     </a:lnB>
                     <a:solidFill>
-                      <a:srgbClr val="F5F3EF"/>
+                      <a:srgbClr val="F2F5F9"/>
                     </a:solidFill>
                   </a:tcPr>
                 </a:tc>
@@ -12537,7 +12537,7 @@
                   <a:tcPr>
                     <a:lnL w="6350" cap="flat" cmpd="sng" algn="ctr">
                       <a:solidFill>
-                        <a:srgbClr val="DDDDDD"/>
+                        <a:srgbClr val="D8DEE6"/>
                       </a:solidFill>
                       <a:prstDash val="solid"/>
                       <a:round/>
@@ -12546,7 +12546,7 @@
                     </a:lnL>
                     <a:lnR w="6350" cap="flat" cmpd="sng" algn="ctr">
                       <a:solidFill>
-                        <a:srgbClr val="DDDDDD"/>
+                        <a:srgbClr val="D8DEE6"/>
                       </a:solidFill>
                       <a:prstDash val="solid"/>
                       <a:round/>
@@ -12555,7 +12555,7 @@
                     </a:lnR>
                     <a:lnT w="6350" cap="flat" cmpd="sng" algn="ctr">
                       <a:solidFill>
-                        <a:srgbClr val="DDDDDD"/>
+                        <a:srgbClr val="D8DEE6"/>
                       </a:solidFill>
                       <a:prstDash val="solid"/>
                       <a:round/>
@@ -12564,7 +12564,7 @@
                     </a:lnT>
                     <a:lnB w="6350" cap="flat" cmpd="sng" algn="ctr">
                       <a:solidFill>
-                        <a:srgbClr val="DDDDDD"/>
+                        <a:srgbClr val="D8DEE6"/>
                       </a:solidFill>
                       <a:prstDash val="solid"/>
                       <a:round/>
@@ -12605,7 +12605,7 @@
                   <a:tcPr>
                     <a:lnL w="6350" cap="flat" cmpd="sng" algn="ctr">
                       <a:solidFill>
-                        <a:srgbClr val="DDDDDD"/>
+                        <a:srgbClr val="D8DEE6"/>
                       </a:solidFill>
                       <a:prstDash val="solid"/>
                       <a:round/>
@@ -12614,7 +12614,7 @@
                     </a:lnL>
                     <a:lnR w="6350" cap="flat" cmpd="sng" algn="ctr">
                       <a:solidFill>
-                        <a:srgbClr val="DDDDDD"/>
+                        <a:srgbClr val="D8DEE6"/>
                       </a:solidFill>
                       <a:prstDash val="solid"/>
                       <a:round/>
@@ -12623,7 +12623,7 @@
                     </a:lnR>
                     <a:lnT w="6350" cap="flat" cmpd="sng" algn="ctr">
                       <a:solidFill>
-                        <a:srgbClr val="DDDDDD"/>
+                        <a:srgbClr val="D8DEE6"/>
                       </a:solidFill>
                       <a:prstDash val="solid"/>
                       <a:round/>
@@ -12632,7 +12632,7 @@
                     </a:lnT>
                     <a:lnB w="6350" cap="flat" cmpd="sng" algn="ctr">
                       <a:solidFill>
-                        <a:srgbClr val="DDDDDD"/>
+                        <a:srgbClr val="D8DEE6"/>
                       </a:solidFill>
                       <a:prstDash val="solid"/>
                       <a:round/>
@@ -12673,7 +12673,7 @@
                   <a:tcPr>
                     <a:lnL w="6350" cap="flat" cmpd="sng" algn="ctr">
                       <a:solidFill>
-                        <a:srgbClr val="DDDDDD"/>
+                        <a:srgbClr val="D8DEE6"/>
                       </a:solidFill>
                       <a:prstDash val="solid"/>
                       <a:round/>
@@ -12682,7 +12682,7 @@
                     </a:lnL>
                     <a:lnR w="6350" cap="flat" cmpd="sng" algn="ctr">
                       <a:solidFill>
-                        <a:srgbClr val="DDDDDD"/>
+                        <a:srgbClr val="D8DEE6"/>
                       </a:solidFill>
                       <a:prstDash val="solid"/>
                       <a:round/>
@@ -12691,7 +12691,7 @@
                     </a:lnR>
                     <a:lnT w="6350" cap="flat" cmpd="sng" algn="ctr">
                       <a:solidFill>
-                        <a:srgbClr val="DDDDDD"/>
+                        <a:srgbClr val="D8DEE6"/>
                       </a:solidFill>
                       <a:prstDash val="solid"/>
                       <a:round/>
@@ -12700,7 +12700,7 @@
                     </a:lnT>
                     <a:lnB w="6350" cap="flat" cmpd="sng" algn="ctr">
                       <a:solidFill>
-                        <a:srgbClr val="DDDDDD"/>
+                        <a:srgbClr val="D8DEE6"/>
                       </a:solidFill>
                       <a:prstDash val="solid"/>
                       <a:round/>
@@ -12741,7 +12741,7 @@
                   <a:tcPr>
                     <a:lnL w="6350" cap="flat" cmpd="sng" algn="ctr">
                       <a:solidFill>
-                        <a:srgbClr val="DDDDDD"/>
+                        <a:srgbClr val="D8DEE6"/>
                       </a:solidFill>
                       <a:prstDash val="solid"/>
                       <a:round/>
@@ -12750,7 +12750,7 @@
                     </a:lnL>
                     <a:lnR w="6350" cap="flat" cmpd="sng" algn="ctr">
                       <a:solidFill>
-                        <a:srgbClr val="DDDDDD"/>
+                        <a:srgbClr val="D8DEE6"/>
                       </a:solidFill>
                       <a:prstDash val="solid"/>
                       <a:round/>
@@ -12759,7 +12759,7 @@
                     </a:lnR>
                     <a:lnT w="6350" cap="flat" cmpd="sng" algn="ctr">
                       <a:solidFill>
-                        <a:srgbClr val="DDDDDD"/>
+                        <a:srgbClr val="D8DEE6"/>
                       </a:solidFill>
                       <a:prstDash val="solid"/>
                       <a:round/>
@@ -12768,7 +12768,7 @@
                     </a:lnT>
                     <a:lnB w="6350" cap="flat" cmpd="sng" algn="ctr">
                       <a:solidFill>
-                        <a:srgbClr val="DDDDDD"/>
+                        <a:srgbClr val="D8DEE6"/>
                       </a:solidFill>
                       <a:prstDash val="solid"/>
                       <a:round/>
@@ -12809,7 +12809,7 @@
                   <a:tcPr>
                     <a:lnL w="6350" cap="flat" cmpd="sng" algn="ctr">
                       <a:solidFill>
-                        <a:srgbClr val="DDDDDD"/>
+                        <a:srgbClr val="D8DEE6"/>
                       </a:solidFill>
                       <a:prstDash val="solid"/>
                       <a:round/>
@@ -12818,7 +12818,7 @@
                     </a:lnL>
                     <a:lnR w="6350" cap="flat" cmpd="sng" algn="ctr">
                       <a:solidFill>
-                        <a:srgbClr val="DDDDDD"/>
+                        <a:srgbClr val="D8DEE6"/>
                       </a:solidFill>
                       <a:prstDash val="solid"/>
                       <a:round/>
@@ -12827,7 +12827,7 @@
                     </a:lnR>
                     <a:lnT w="6350" cap="flat" cmpd="sng" algn="ctr">
                       <a:solidFill>
-                        <a:srgbClr val="DDDDDD"/>
+                        <a:srgbClr val="D8DEE6"/>
                       </a:solidFill>
                       <a:prstDash val="solid"/>
                       <a:round/>
@@ -12836,7 +12836,7 @@
                     </a:lnT>
                     <a:lnB w="6350" cap="flat" cmpd="sng" algn="ctr">
                       <a:solidFill>
-                        <a:srgbClr val="DDDDDD"/>
+                        <a:srgbClr val="D8DEE6"/>
                       </a:solidFill>
                       <a:prstDash val="solid"/>
                       <a:round/>
@@ -12877,7 +12877,7 @@
                   <a:tcPr>
                     <a:lnL w="6350" cap="flat" cmpd="sng" algn="ctr">
                       <a:solidFill>
-                        <a:srgbClr val="DDDDDD"/>
+                        <a:srgbClr val="D8DEE6"/>
                       </a:solidFill>
                       <a:prstDash val="solid"/>
                       <a:round/>
@@ -12886,7 +12886,7 @@
                     </a:lnL>
                     <a:lnR w="6350" cap="flat" cmpd="sng" algn="ctr">
                       <a:solidFill>
-                        <a:srgbClr val="DDDDDD"/>
+                        <a:srgbClr val="D8DEE6"/>
                       </a:solidFill>
                       <a:prstDash val="solid"/>
                       <a:round/>
@@ -12895,7 +12895,7 @@
                     </a:lnR>
                     <a:lnT w="6350" cap="flat" cmpd="sng" algn="ctr">
                       <a:solidFill>
-                        <a:srgbClr val="DDDDDD"/>
+                        <a:srgbClr val="D8DEE6"/>
                       </a:solidFill>
                       <a:prstDash val="solid"/>
                       <a:round/>
@@ -12904,7 +12904,7 @@
                     </a:lnT>
                     <a:lnB w="6350" cap="flat" cmpd="sng" algn="ctr">
                       <a:solidFill>
-                        <a:srgbClr val="DDDDDD"/>
+                        <a:srgbClr val="D8DEE6"/>
                       </a:solidFill>
                       <a:prstDash val="solid"/>
                       <a:round/>
@@ -12927,7 +12927,7 @@
                       <a:r>
                         <a:rPr lang="en-US" sz="900" b="1" dirty="0">
                           <a:solidFill>
-                            <a:srgbClr val="4A9E6B"/>
+                            <a:srgbClr val="0F9D8A"/>
                           </a:solidFill>
                           <a:latin typeface="Calibri" pitchFamily="34" charset="0"/>
                           <a:ea typeface="Calibri" pitchFamily="34" charset="-122"/>
@@ -12945,7 +12945,7 @@
                   <a:tcPr>
                     <a:lnL w="6350" cap="flat" cmpd="sng" algn="ctr">
                       <a:solidFill>
-                        <a:srgbClr val="DDDDDD"/>
+                        <a:srgbClr val="D8DEE6"/>
                       </a:solidFill>
                       <a:prstDash val="solid"/>
                       <a:round/>
@@ -12954,7 +12954,7 @@
                     </a:lnL>
                     <a:lnR w="6350" cap="flat" cmpd="sng" algn="ctr">
                       <a:solidFill>
-                        <a:srgbClr val="DDDDDD"/>
+                        <a:srgbClr val="D8DEE6"/>
                       </a:solidFill>
                       <a:prstDash val="solid"/>
                       <a:round/>
@@ -12963,7 +12963,7 @@
                     </a:lnR>
                     <a:lnT w="6350" cap="flat" cmpd="sng" algn="ctr">
                       <a:solidFill>
-                        <a:srgbClr val="DDDDDD"/>
+                        <a:srgbClr val="D8DEE6"/>
                       </a:solidFill>
                       <a:prstDash val="solid"/>
                       <a:round/>
@@ -12972,7 +12972,7 @@
                     </a:lnT>
                     <a:lnB w="6350" cap="flat" cmpd="sng" algn="ctr">
                       <a:solidFill>
-                        <a:srgbClr val="DDDDDD"/>
+                        <a:srgbClr val="D8DEE6"/>
                       </a:solidFill>
                       <a:prstDash val="solid"/>
                       <a:round/>
@@ -13020,7 +13020,7 @@
                   <a:tcPr>
                     <a:lnL w="6350" cap="flat" cmpd="sng" algn="ctr">
                       <a:solidFill>
-                        <a:srgbClr val="DDDDDD"/>
+                        <a:srgbClr val="D8DEE6"/>
                       </a:solidFill>
                       <a:prstDash val="solid"/>
                       <a:round/>
@@ -13029,7 +13029,7 @@
                     </a:lnL>
                     <a:lnR w="6350" cap="flat" cmpd="sng" algn="ctr">
                       <a:solidFill>
-                        <a:srgbClr val="DDDDDD"/>
+                        <a:srgbClr val="D8DEE6"/>
                       </a:solidFill>
                       <a:prstDash val="solid"/>
                       <a:round/>
@@ -13038,7 +13038,7 @@
                     </a:lnR>
                     <a:lnT w="6350" cap="flat" cmpd="sng" algn="ctr">
                       <a:solidFill>
-                        <a:srgbClr val="DDDDDD"/>
+                        <a:srgbClr val="D8DEE6"/>
                       </a:solidFill>
                       <a:prstDash val="solid"/>
                       <a:round/>
@@ -13047,7 +13047,7 @@
                     </a:lnT>
                     <a:lnB w="6350" cap="flat" cmpd="sng" algn="ctr">
                       <a:solidFill>
-                        <a:srgbClr val="DDDDDD"/>
+                        <a:srgbClr val="D8DEE6"/>
                       </a:solidFill>
                       <a:prstDash val="solid"/>
                       <a:round/>
@@ -13055,7 +13055,7 @@
                       <a:tailEnd type="none" w="med" len="med"/>
                     </a:lnB>
                     <a:solidFill>
-                      <a:srgbClr val="F5F3EF"/>
+                      <a:srgbClr val="F2F5F9"/>
                     </a:solidFill>
                   </a:tcPr>
                 </a:tc>
@@ -13088,7 +13088,7 @@
                   <a:tcPr>
                     <a:lnL w="6350" cap="flat" cmpd="sng" algn="ctr">
                       <a:solidFill>
-                        <a:srgbClr val="DDDDDD"/>
+                        <a:srgbClr val="D8DEE6"/>
                       </a:solidFill>
                       <a:prstDash val="solid"/>
                       <a:round/>
@@ -13097,7 +13097,7 @@
                     </a:lnL>
                     <a:lnR w="6350" cap="flat" cmpd="sng" algn="ctr">
                       <a:solidFill>
-                        <a:srgbClr val="DDDDDD"/>
+                        <a:srgbClr val="D8DEE6"/>
                       </a:solidFill>
                       <a:prstDash val="solid"/>
                       <a:round/>
@@ -13106,7 +13106,7 @@
                     </a:lnR>
                     <a:lnT w="6350" cap="flat" cmpd="sng" algn="ctr">
                       <a:solidFill>
-                        <a:srgbClr val="DDDDDD"/>
+                        <a:srgbClr val="D8DEE6"/>
                       </a:solidFill>
                       <a:prstDash val="solid"/>
                       <a:round/>
@@ -13115,7 +13115,7 @@
                     </a:lnT>
                     <a:lnB w="6350" cap="flat" cmpd="sng" algn="ctr">
                       <a:solidFill>
-                        <a:srgbClr val="DDDDDD"/>
+                        <a:srgbClr val="D8DEE6"/>
                       </a:solidFill>
                       <a:prstDash val="solid"/>
                       <a:round/>
@@ -13123,7 +13123,7 @@
                       <a:tailEnd type="none" w="med" len="med"/>
                     </a:lnB>
                     <a:solidFill>
-                      <a:srgbClr val="F5F3EF"/>
+                      <a:srgbClr val="F2F5F9"/>
                     </a:solidFill>
                   </a:tcPr>
                 </a:tc>
@@ -13156,7 +13156,7 @@
                   <a:tcPr>
                     <a:lnL w="6350" cap="flat" cmpd="sng" algn="ctr">
                       <a:solidFill>
-                        <a:srgbClr val="DDDDDD"/>
+                        <a:srgbClr val="D8DEE6"/>
                       </a:solidFill>
                       <a:prstDash val="solid"/>
                       <a:round/>
@@ -13165,7 +13165,7 @@
                     </a:lnL>
                     <a:lnR w="6350" cap="flat" cmpd="sng" algn="ctr">
                       <a:solidFill>
-                        <a:srgbClr val="DDDDDD"/>
+                        <a:srgbClr val="D8DEE6"/>
                       </a:solidFill>
                       <a:prstDash val="solid"/>
                       <a:round/>
@@ -13174,7 +13174,7 @@
                     </a:lnR>
                     <a:lnT w="6350" cap="flat" cmpd="sng" algn="ctr">
                       <a:solidFill>
-                        <a:srgbClr val="DDDDDD"/>
+                        <a:srgbClr val="D8DEE6"/>
                       </a:solidFill>
                       <a:prstDash val="solid"/>
                       <a:round/>
@@ -13183,7 +13183,7 @@
                     </a:lnT>
                     <a:lnB w="6350" cap="flat" cmpd="sng" algn="ctr">
                       <a:solidFill>
-                        <a:srgbClr val="DDDDDD"/>
+                        <a:srgbClr val="D8DEE6"/>
                       </a:solidFill>
                       <a:prstDash val="solid"/>
                       <a:round/>
@@ -13191,7 +13191,7 @@
                       <a:tailEnd type="none" w="med" len="med"/>
                     </a:lnB>
                     <a:solidFill>
-                      <a:srgbClr val="F5F3EF"/>
+                      <a:srgbClr val="F2F5F9"/>
                     </a:solidFill>
                   </a:tcPr>
                 </a:tc>
@@ -13224,7 +13224,7 @@
                   <a:tcPr>
                     <a:lnL w="6350" cap="flat" cmpd="sng" algn="ctr">
                       <a:solidFill>
-                        <a:srgbClr val="DDDDDD"/>
+                        <a:srgbClr val="D8DEE6"/>
                       </a:solidFill>
                       <a:prstDash val="solid"/>
                       <a:round/>
@@ -13233,7 +13233,7 @@
                     </a:lnL>
                     <a:lnR w="6350" cap="flat" cmpd="sng" algn="ctr">
                       <a:solidFill>
-                        <a:srgbClr val="DDDDDD"/>
+                        <a:srgbClr val="D8DEE6"/>
                       </a:solidFill>
                       <a:prstDash val="solid"/>
                       <a:round/>
@@ -13242,7 +13242,7 @@
                     </a:lnR>
                     <a:lnT w="6350" cap="flat" cmpd="sng" algn="ctr">
                       <a:solidFill>
-                        <a:srgbClr val="DDDDDD"/>
+                        <a:srgbClr val="D8DEE6"/>
                       </a:solidFill>
                       <a:prstDash val="solid"/>
                       <a:round/>
@@ -13251,7 +13251,7 @@
                     </a:lnT>
                     <a:lnB w="6350" cap="flat" cmpd="sng" algn="ctr">
                       <a:solidFill>
-                        <a:srgbClr val="DDDDDD"/>
+                        <a:srgbClr val="D8DEE6"/>
                       </a:solidFill>
                       <a:prstDash val="solid"/>
                       <a:round/>
@@ -13259,7 +13259,7 @@
                       <a:tailEnd type="none" w="med" len="med"/>
                     </a:lnB>
                     <a:solidFill>
-                      <a:srgbClr val="F5F3EF"/>
+                      <a:srgbClr val="F2F5F9"/>
                     </a:solidFill>
                   </a:tcPr>
                 </a:tc>
@@ -13292,7 +13292,7 @@
                   <a:tcPr>
                     <a:lnL w="6350" cap="flat" cmpd="sng" algn="ctr">
                       <a:solidFill>
-                        <a:srgbClr val="DDDDDD"/>
+                        <a:srgbClr val="D8DEE6"/>
                       </a:solidFill>
                       <a:prstDash val="solid"/>
                       <a:round/>
@@ -13301,7 +13301,7 @@
                     </a:lnL>
                     <a:lnR w="6350" cap="flat" cmpd="sng" algn="ctr">
                       <a:solidFill>
-                        <a:srgbClr val="DDDDDD"/>
+                        <a:srgbClr val="D8DEE6"/>
                       </a:solidFill>
                       <a:prstDash val="solid"/>
                       <a:round/>
@@ -13310,7 +13310,7 @@
                     </a:lnR>
                     <a:lnT w="6350" cap="flat" cmpd="sng" algn="ctr">
                       <a:solidFill>
-                        <a:srgbClr val="DDDDDD"/>
+                        <a:srgbClr val="D8DEE6"/>
                       </a:solidFill>
                       <a:prstDash val="solid"/>
                       <a:round/>
@@ -13319,7 +13319,7 @@
                     </a:lnT>
                     <a:lnB w="6350" cap="flat" cmpd="sng" algn="ctr">
                       <a:solidFill>
-                        <a:srgbClr val="DDDDDD"/>
+                        <a:srgbClr val="D8DEE6"/>
                       </a:solidFill>
                       <a:prstDash val="solid"/>
                       <a:round/>
@@ -13327,7 +13327,7 @@
                       <a:tailEnd type="none" w="med" len="med"/>
                     </a:lnB>
                     <a:solidFill>
-                      <a:srgbClr val="F5F3EF"/>
+                      <a:srgbClr val="F2F5F9"/>
                     </a:solidFill>
                   </a:tcPr>
                 </a:tc>
@@ -13360,7 +13360,7 @@
                   <a:tcPr>
                     <a:lnL w="6350" cap="flat" cmpd="sng" algn="ctr">
                       <a:solidFill>
-                        <a:srgbClr val="DDDDDD"/>
+                        <a:srgbClr val="D8DEE6"/>
                       </a:solidFill>
                       <a:prstDash val="solid"/>
                       <a:round/>
@@ -13369,7 +13369,7 @@
                     </a:lnL>
                     <a:lnR w="6350" cap="flat" cmpd="sng" algn="ctr">
                       <a:solidFill>
-                        <a:srgbClr val="DDDDDD"/>
+                        <a:srgbClr val="D8DEE6"/>
                       </a:solidFill>
                       <a:prstDash val="solid"/>
                       <a:round/>
@@ -13378,7 +13378,7 @@
                     </a:lnR>
                     <a:lnT w="6350" cap="flat" cmpd="sng" algn="ctr">
                       <a:solidFill>
-                        <a:srgbClr val="DDDDDD"/>
+                        <a:srgbClr val="D8DEE6"/>
                       </a:solidFill>
                       <a:prstDash val="solid"/>
                       <a:round/>
@@ -13387,7 +13387,7 @@
                     </a:lnT>
                     <a:lnB w="6350" cap="flat" cmpd="sng" algn="ctr">
                       <a:solidFill>
-                        <a:srgbClr val="DDDDDD"/>
+                        <a:srgbClr val="D8DEE6"/>
                       </a:solidFill>
                       <a:prstDash val="solid"/>
                       <a:round/>
@@ -13395,7 +13395,7 @@
                       <a:tailEnd type="none" w="med" len="med"/>
                     </a:lnB>
                     <a:solidFill>
-                      <a:srgbClr val="F5F3EF"/>
+                      <a:srgbClr val="F2F5F9"/>
                     </a:solidFill>
                   </a:tcPr>
                 </a:tc>
@@ -13410,7 +13410,7 @@
                       <a:r>
                         <a:rPr lang="en-US" sz="900" b="1" dirty="0">
                           <a:solidFill>
-                            <a:srgbClr val="4A9E6B"/>
+                            <a:srgbClr val="0F9D8A"/>
                           </a:solidFill>
                           <a:latin typeface="Calibri" pitchFamily="34" charset="0"/>
                           <a:ea typeface="Calibri" pitchFamily="34" charset="-122"/>
@@ -13428,7 +13428,7 @@
                   <a:tcPr>
                     <a:lnL w="6350" cap="flat" cmpd="sng" algn="ctr">
                       <a:solidFill>
-                        <a:srgbClr val="DDDDDD"/>
+                        <a:srgbClr val="D8DEE6"/>
                       </a:solidFill>
                       <a:prstDash val="solid"/>
                       <a:round/>
@@ -13437,7 +13437,7 @@
                     </a:lnL>
                     <a:lnR w="6350" cap="flat" cmpd="sng" algn="ctr">
                       <a:solidFill>
-                        <a:srgbClr val="DDDDDD"/>
+                        <a:srgbClr val="D8DEE6"/>
                       </a:solidFill>
                       <a:prstDash val="solid"/>
                       <a:round/>
@@ -13446,7 +13446,7 @@
                     </a:lnR>
                     <a:lnT w="6350" cap="flat" cmpd="sng" algn="ctr">
                       <a:solidFill>
-                        <a:srgbClr val="DDDDDD"/>
+                        <a:srgbClr val="D8DEE6"/>
                       </a:solidFill>
                       <a:prstDash val="solid"/>
                       <a:round/>
@@ -13455,7 +13455,7 @@
                     </a:lnT>
                     <a:lnB w="6350" cap="flat" cmpd="sng" algn="ctr">
                       <a:solidFill>
-                        <a:srgbClr val="DDDDDD"/>
+                        <a:srgbClr val="D8DEE6"/>
                       </a:solidFill>
                       <a:prstDash val="solid"/>
                       <a:round/>
@@ -13463,7 +13463,7 @@
                       <a:tailEnd type="none" w="med" len="med"/>
                     </a:lnB>
                     <a:solidFill>
-                      <a:srgbClr val="F5F3EF"/>
+                      <a:srgbClr val="F2F5F9"/>
                     </a:solidFill>
                   </a:tcPr>
                 </a:tc>
@@ -13503,7 +13503,7 @@
                   <a:tcPr>
                     <a:lnL w="6350" cap="flat" cmpd="sng" algn="ctr">
                       <a:solidFill>
-                        <a:srgbClr val="DDDDDD"/>
+                        <a:srgbClr val="D8DEE6"/>
                       </a:solidFill>
                       <a:prstDash val="solid"/>
                       <a:round/>
@@ -13512,7 +13512,7 @@
                     </a:lnL>
                     <a:lnR w="6350" cap="flat" cmpd="sng" algn="ctr">
                       <a:solidFill>
-                        <a:srgbClr val="DDDDDD"/>
+                        <a:srgbClr val="D8DEE6"/>
                       </a:solidFill>
                       <a:prstDash val="solid"/>
                       <a:round/>
@@ -13521,7 +13521,7 @@
                     </a:lnR>
                     <a:lnT w="6350" cap="flat" cmpd="sng" algn="ctr">
                       <a:solidFill>
-                        <a:srgbClr val="DDDDDD"/>
+                        <a:srgbClr val="D8DEE6"/>
                       </a:solidFill>
                       <a:prstDash val="solid"/>
                       <a:round/>
@@ -13530,7 +13530,7 @@
                     </a:lnT>
                     <a:lnB w="6350" cap="flat" cmpd="sng" algn="ctr">
                       <a:solidFill>
-                        <a:srgbClr val="DDDDDD"/>
+                        <a:srgbClr val="D8DEE6"/>
                       </a:solidFill>
                       <a:prstDash val="solid"/>
                       <a:round/>
@@ -13571,7 +13571,7 @@
                   <a:tcPr>
                     <a:lnL w="6350" cap="flat" cmpd="sng" algn="ctr">
                       <a:solidFill>
-                        <a:srgbClr val="DDDDDD"/>
+                        <a:srgbClr val="D8DEE6"/>
                       </a:solidFill>
                       <a:prstDash val="solid"/>
                       <a:round/>
@@ -13580,7 +13580,7 @@
                     </a:lnL>
                     <a:lnR w="6350" cap="flat" cmpd="sng" algn="ctr">
                       <a:solidFill>
-                        <a:srgbClr val="DDDDDD"/>
+                        <a:srgbClr val="D8DEE6"/>
                       </a:solidFill>
                       <a:prstDash val="solid"/>
                       <a:round/>
@@ -13589,7 +13589,7 @@
                     </a:lnR>
                     <a:lnT w="6350" cap="flat" cmpd="sng" algn="ctr">
                       <a:solidFill>
-                        <a:srgbClr val="DDDDDD"/>
+                        <a:srgbClr val="D8DEE6"/>
                       </a:solidFill>
                       <a:prstDash val="solid"/>
                       <a:round/>
@@ -13598,7 +13598,7 @@
                     </a:lnT>
                     <a:lnB w="6350" cap="flat" cmpd="sng" algn="ctr">
                       <a:solidFill>
-                        <a:srgbClr val="DDDDDD"/>
+                        <a:srgbClr val="D8DEE6"/>
                       </a:solidFill>
                       <a:prstDash val="solid"/>
                       <a:round/>
@@ -13639,7 +13639,7 @@
                   <a:tcPr>
                     <a:lnL w="6350" cap="flat" cmpd="sng" algn="ctr">
                       <a:solidFill>
-                        <a:srgbClr val="DDDDDD"/>
+                        <a:srgbClr val="D8DEE6"/>
                       </a:solidFill>
                       <a:prstDash val="solid"/>
                       <a:round/>
@@ -13648,7 +13648,7 @@
                     </a:lnL>
                     <a:lnR w="6350" cap="flat" cmpd="sng" algn="ctr">
                       <a:solidFill>
-                        <a:srgbClr val="DDDDDD"/>
+                        <a:srgbClr val="D8DEE6"/>
                       </a:solidFill>
                       <a:prstDash val="solid"/>
                       <a:round/>
@@ -13657,7 +13657,7 @@
                     </a:lnR>
                     <a:lnT w="6350" cap="flat" cmpd="sng" algn="ctr">
                       <a:solidFill>
-                        <a:srgbClr val="DDDDDD"/>
+                        <a:srgbClr val="D8DEE6"/>
                       </a:solidFill>
                       <a:prstDash val="solid"/>
                       <a:round/>
@@ -13666,7 +13666,7 @@
                     </a:lnT>
                     <a:lnB w="6350" cap="flat" cmpd="sng" algn="ctr">
                       <a:solidFill>
-                        <a:srgbClr val="DDDDDD"/>
+                        <a:srgbClr val="D8DEE6"/>
                       </a:solidFill>
                       <a:prstDash val="solid"/>
                       <a:round/>
@@ -13707,7 +13707,7 @@
                   <a:tcPr>
                     <a:lnL w="6350" cap="flat" cmpd="sng" algn="ctr">
                       <a:solidFill>
-                        <a:srgbClr val="DDDDDD"/>
+                        <a:srgbClr val="D8DEE6"/>
                       </a:solidFill>
                       <a:prstDash val="solid"/>
                       <a:round/>
@@ -13716,7 +13716,7 @@
                     </a:lnL>
                     <a:lnR w="6350" cap="flat" cmpd="sng" algn="ctr">
                       <a:solidFill>
-                        <a:srgbClr val="DDDDDD"/>
+                        <a:srgbClr val="D8DEE6"/>
                       </a:solidFill>
                       <a:prstDash val="solid"/>
                       <a:round/>
@@ -13725,7 +13725,7 @@
                     </a:lnR>
                     <a:lnT w="6350" cap="flat" cmpd="sng" algn="ctr">
                       <a:solidFill>
-                        <a:srgbClr val="DDDDDD"/>
+                        <a:srgbClr val="D8DEE6"/>
                       </a:solidFill>
                       <a:prstDash val="solid"/>
                       <a:round/>
@@ -13734,7 +13734,7 @@
                     </a:lnT>
                     <a:lnB w="6350" cap="flat" cmpd="sng" algn="ctr">
                       <a:solidFill>
-                        <a:srgbClr val="DDDDDD"/>
+                        <a:srgbClr val="D8DEE6"/>
                       </a:solidFill>
                       <a:prstDash val="solid"/>
                       <a:round/>
@@ -13775,7 +13775,7 @@
                   <a:tcPr>
                     <a:lnL w="6350" cap="flat" cmpd="sng" algn="ctr">
                       <a:solidFill>
-                        <a:srgbClr val="DDDDDD"/>
+                        <a:srgbClr val="D8DEE6"/>
                       </a:solidFill>
                       <a:prstDash val="solid"/>
                       <a:round/>
@@ -13784,7 +13784,7 @@
                     </a:lnL>
                     <a:lnR w="6350" cap="flat" cmpd="sng" algn="ctr">
                       <a:solidFill>
-                        <a:srgbClr val="DDDDDD"/>
+                        <a:srgbClr val="D8DEE6"/>
                       </a:solidFill>
                       <a:prstDash val="solid"/>
                       <a:round/>
@@ -13793,7 +13793,7 @@
                     </a:lnR>
                     <a:lnT w="6350" cap="flat" cmpd="sng" algn="ctr">
                       <a:solidFill>
-                        <a:srgbClr val="DDDDDD"/>
+                        <a:srgbClr val="D8DEE6"/>
                       </a:solidFill>
                       <a:prstDash val="solid"/>
                       <a:round/>
@@ -13802,7 +13802,7 @@
                     </a:lnT>
                     <a:lnB w="6350" cap="flat" cmpd="sng" algn="ctr">
                       <a:solidFill>
-                        <a:srgbClr val="DDDDDD"/>
+                        <a:srgbClr val="D8DEE6"/>
                       </a:solidFill>
                       <a:prstDash val="solid"/>
                       <a:round/>
@@ -13843,7 +13843,7 @@
                   <a:tcPr>
                     <a:lnL w="6350" cap="flat" cmpd="sng" algn="ctr">
                       <a:solidFill>
-                        <a:srgbClr val="DDDDDD"/>
+                        <a:srgbClr val="D8DEE6"/>
                       </a:solidFill>
                       <a:prstDash val="solid"/>
                       <a:round/>
@@ -13852,7 +13852,7 @@
                     </a:lnL>
                     <a:lnR w="6350" cap="flat" cmpd="sng" algn="ctr">
                       <a:solidFill>
-                        <a:srgbClr val="DDDDDD"/>
+                        <a:srgbClr val="D8DEE6"/>
                       </a:solidFill>
                       <a:prstDash val="solid"/>
                       <a:round/>
@@ -13861,7 +13861,7 @@
                     </a:lnR>
                     <a:lnT w="6350" cap="flat" cmpd="sng" algn="ctr">
                       <a:solidFill>
-                        <a:srgbClr val="DDDDDD"/>
+                        <a:srgbClr val="D8DEE6"/>
                       </a:solidFill>
                       <a:prstDash val="solid"/>
                       <a:round/>
@@ -13870,7 +13870,7 @@
                     </a:lnT>
                     <a:lnB w="6350" cap="flat" cmpd="sng" algn="ctr">
                       <a:solidFill>
-                        <a:srgbClr val="DDDDDD"/>
+                        <a:srgbClr val="D8DEE6"/>
                       </a:solidFill>
                       <a:prstDash val="solid"/>
                       <a:round/>
@@ -13893,7 +13893,7 @@
                       <a:r>
                         <a:rPr lang="en-US" sz="900" b="1" dirty="0">
                           <a:solidFill>
-                            <a:srgbClr val="D4A017"/>
+                            <a:srgbClr val="C98A00"/>
                           </a:solidFill>
                           <a:latin typeface="Calibri" pitchFamily="34" charset="0"/>
                           <a:ea typeface="Calibri" pitchFamily="34" charset="-122"/>
@@ -13911,7 +13911,7 @@
                   <a:tcPr>
                     <a:lnL w="6350" cap="flat" cmpd="sng" algn="ctr">
                       <a:solidFill>
-                        <a:srgbClr val="DDDDDD"/>
+                        <a:srgbClr val="D8DEE6"/>
                       </a:solidFill>
                       <a:prstDash val="solid"/>
                       <a:round/>
@@ -13920,7 +13920,7 @@
                     </a:lnL>
                     <a:lnR w="6350" cap="flat" cmpd="sng" algn="ctr">
                       <a:solidFill>
-                        <a:srgbClr val="DDDDDD"/>
+                        <a:srgbClr val="D8DEE6"/>
                       </a:solidFill>
                       <a:prstDash val="solid"/>
                       <a:round/>
@@ -13929,7 +13929,7 @@
                     </a:lnR>
                     <a:lnT w="6350" cap="flat" cmpd="sng" algn="ctr">
                       <a:solidFill>
-                        <a:srgbClr val="DDDDDD"/>
+                        <a:srgbClr val="D8DEE6"/>
                       </a:solidFill>
                       <a:prstDash val="solid"/>
                       <a:round/>
@@ -13938,7 +13938,7 @@
                     </a:lnT>
                     <a:lnB w="6350" cap="flat" cmpd="sng" algn="ctr">
                       <a:solidFill>
-                        <a:srgbClr val="DDDDDD"/>
+                        <a:srgbClr val="D8DEE6"/>
                       </a:solidFill>
                       <a:prstDash val="solid"/>
                       <a:round/>
@@ -13986,7 +13986,7 @@
                   <a:tcPr>
                     <a:lnL w="6350" cap="flat" cmpd="sng" algn="ctr">
                       <a:solidFill>
-                        <a:srgbClr val="DDDDDD"/>
+                        <a:srgbClr val="D8DEE6"/>
                       </a:solidFill>
                       <a:prstDash val="solid"/>
                       <a:round/>
@@ -13995,7 +13995,7 @@
                     </a:lnL>
                     <a:lnR w="6350" cap="flat" cmpd="sng" algn="ctr">
                       <a:solidFill>
-                        <a:srgbClr val="DDDDDD"/>
+                        <a:srgbClr val="D8DEE6"/>
                       </a:solidFill>
                       <a:prstDash val="solid"/>
                       <a:round/>
@@ -14004,7 +14004,7 @@
                     </a:lnR>
                     <a:lnT w="6350" cap="flat" cmpd="sng" algn="ctr">
                       <a:solidFill>
-                        <a:srgbClr val="DDDDDD"/>
+                        <a:srgbClr val="D8DEE6"/>
                       </a:solidFill>
                       <a:prstDash val="solid"/>
                       <a:round/>
@@ -14013,7 +14013,7 @@
                     </a:lnT>
                     <a:lnB w="6350" cap="flat" cmpd="sng" algn="ctr">
                       <a:solidFill>
-                        <a:srgbClr val="DDDDDD"/>
+                        <a:srgbClr val="D8DEE6"/>
                       </a:solidFill>
                       <a:prstDash val="solid"/>
                       <a:round/>
@@ -14021,7 +14021,7 @@
                       <a:tailEnd type="none" w="med" len="med"/>
                     </a:lnB>
                     <a:solidFill>
-                      <a:srgbClr val="F5F3EF"/>
+                      <a:srgbClr val="F2F5F9"/>
                     </a:solidFill>
                   </a:tcPr>
                 </a:tc>
@@ -14054,7 +14054,7 @@
                   <a:tcPr>
                     <a:lnL w="6350" cap="flat" cmpd="sng" algn="ctr">
                       <a:solidFill>
-                        <a:srgbClr val="DDDDDD"/>
+                        <a:srgbClr val="D8DEE6"/>
                       </a:solidFill>
                       <a:prstDash val="solid"/>
                       <a:round/>
@@ -14063,7 +14063,7 @@
                     </a:lnL>
                     <a:lnR w="6350" cap="flat" cmpd="sng" algn="ctr">
                       <a:solidFill>
-                        <a:srgbClr val="DDDDDD"/>
+                        <a:srgbClr val="D8DEE6"/>
                       </a:solidFill>
                       <a:prstDash val="solid"/>
                       <a:round/>
@@ -14072,7 +14072,7 @@
                     </a:lnR>
                     <a:lnT w="6350" cap="flat" cmpd="sng" algn="ctr">
                       <a:solidFill>
-                        <a:srgbClr val="DDDDDD"/>
+                        <a:srgbClr val="D8DEE6"/>
                       </a:solidFill>
                       <a:prstDash val="solid"/>
                       <a:round/>
@@ -14081,7 +14081,7 @@
                     </a:lnT>
                     <a:lnB w="6350" cap="flat" cmpd="sng" algn="ctr">
                       <a:solidFill>
-                        <a:srgbClr val="DDDDDD"/>
+                        <a:srgbClr val="D8DEE6"/>
                       </a:solidFill>
                       <a:prstDash val="solid"/>
                       <a:round/>
@@ -14089,7 +14089,7 @@
                       <a:tailEnd type="none" w="med" len="med"/>
                     </a:lnB>
                     <a:solidFill>
-                      <a:srgbClr val="F5F3EF"/>
+                      <a:srgbClr val="F2F5F9"/>
                     </a:solidFill>
                   </a:tcPr>
                 </a:tc>
@@ -14122,7 +14122,7 @@
                   <a:tcPr>
                     <a:lnL w="6350" cap="flat" cmpd="sng" algn="ctr">
                       <a:solidFill>
-                        <a:srgbClr val="DDDDDD"/>
+                        <a:srgbClr val="D8DEE6"/>
                       </a:solidFill>
                       <a:prstDash val="solid"/>
                       <a:round/>
@@ -14131,7 +14131,7 @@
                     </a:lnL>
                     <a:lnR w="6350" cap="flat" cmpd="sng" algn="ctr">
                       <a:solidFill>
-                        <a:srgbClr val="DDDDDD"/>
+                        <a:srgbClr val="D8DEE6"/>
                       </a:solidFill>
                       <a:prstDash val="solid"/>
                       <a:round/>
@@ -14140,7 +14140,7 @@
                     </a:lnR>
                     <a:lnT w="6350" cap="flat" cmpd="sng" algn="ctr">
                       <a:solidFill>
-                        <a:srgbClr val="DDDDDD"/>
+                        <a:srgbClr val="D8DEE6"/>
                       </a:solidFill>
                       <a:prstDash val="solid"/>
                       <a:round/>
@@ -14149,7 +14149,7 @@
                     </a:lnT>
                     <a:lnB w="6350" cap="flat" cmpd="sng" algn="ctr">
                       <a:solidFill>
-                        <a:srgbClr val="DDDDDD"/>
+                        <a:srgbClr val="D8DEE6"/>
                       </a:solidFill>
                       <a:prstDash val="solid"/>
                       <a:round/>
@@ -14157,7 +14157,7 @@
                       <a:tailEnd type="none" w="med" len="med"/>
                     </a:lnB>
                     <a:solidFill>
-                      <a:srgbClr val="F5F3EF"/>
+                      <a:srgbClr val="F2F5F9"/>
                     </a:solidFill>
                   </a:tcPr>
                 </a:tc>
@@ -14190,7 +14190,7 @@
                   <a:tcPr>
                     <a:lnL w="6350" cap="flat" cmpd="sng" algn="ctr">
                       <a:solidFill>
-                        <a:srgbClr val="DDDDDD"/>
+                        <a:srgbClr val="D8DEE6"/>
                       </a:solidFill>
                       <a:prstDash val="solid"/>
                       <a:round/>
@@ -14199,7 +14199,7 @@
                     </a:lnL>
                     <a:lnR w="6350" cap="flat" cmpd="sng" algn="ctr">
                       <a:solidFill>
-                        <a:srgbClr val="DDDDDD"/>
+                        <a:srgbClr val="D8DEE6"/>
                       </a:solidFill>
                       <a:prstDash val="solid"/>
                       <a:round/>
@@ -14208,7 +14208,7 @@
                     </a:lnR>
                     <a:lnT w="6350" cap="flat" cmpd="sng" algn="ctr">
                       <a:solidFill>
-                        <a:srgbClr val="DDDDDD"/>
+                        <a:srgbClr val="D8DEE6"/>
                       </a:solidFill>
                       <a:prstDash val="solid"/>
                       <a:round/>
@@ -14217,7 +14217,7 @@
                     </a:lnT>
                     <a:lnB w="6350" cap="flat" cmpd="sng" algn="ctr">
                       <a:solidFill>
-                        <a:srgbClr val="DDDDDD"/>
+                        <a:srgbClr val="D8DEE6"/>
                       </a:solidFill>
                       <a:prstDash val="solid"/>
                       <a:round/>
@@ -14225,7 +14225,7 @@
                       <a:tailEnd type="none" w="med" len="med"/>
                     </a:lnB>
                     <a:solidFill>
-                      <a:srgbClr val="F5F3EF"/>
+                      <a:srgbClr val="F2F5F9"/>
                     </a:solidFill>
                   </a:tcPr>
                 </a:tc>
@@ -14258,7 +14258,7 @@
                   <a:tcPr>
                     <a:lnL w="6350" cap="flat" cmpd="sng" algn="ctr">
                       <a:solidFill>
-                        <a:srgbClr val="DDDDDD"/>
+                        <a:srgbClr val="D8DEE6"/>
                       </a:solidFill>
                       <a:prstDash val="solid"/>
                       <a:round/>
@@ -14267,7 +14267,7 @@
                     </a:lnL>
                     <a:lnR w="6350" cap="flat" cmpd="sng" algn="ctr">
                       <a:solidFill>
-                        <a:srgbClr val="DDDDDD"/>
+                        <a:srgbClr val="D8DEE6"/>
                       </a:solidFill>
                       <a:prstDash val="solid"/>
                       <a:round/>
@@ -14276,7 +14276,7 @@
                     </a:lnR>
                     <a:lnT w="6350" cap="flat" cmpd="sng" algn="ctr">
                       <a:solidFill>
-                        <a:srgbClr val="DDDDDD"/>
+                        <a:srgbClr val="D8DEE6"/>
                       </a:solidFill>
                       <a:prstDash val="solid"/>
                       <a:round/>
@@ -14285,7 +14285,7 @@
                     </a:lnT>
                     <a:lnB w="6350" cap="flat" cmpd="sng" algn="ctr">
                       <a:solidFill>
-                        <a:srgbClr val="DDDDDD"/>
+                        <a:srgbClr val="D8DEE6"/>
                       </a:solidFill>
                       <a:prstDash val="solid"/>
                       <a:round/>
@@ -14293,7 +14293,7 @@
                       <a:tailEnd type="none" w="med" len="med"/>
                     </a:lnB>
                     <a:solidFill>
-                      <a:srgbClr val="F5F3EF"/>
+                      <a:srgbClr val="F2F5F9"/>
                     </a:solidFill>
                   </a:tcPr>
                 </a:tc>
@@ -14326,7 +14326,7 @@
                   <a:tcPr>
                     <a:lnL w="6350" cap="flat" cmpd="sng" algn="ctr">
                       <a:solidFill>
-                        <a:srgbClr val="DDDDDD"/>
+                        <a:srgbClr val="D8DEE6"/>
                       </a:solidFill>
                       <a:prstDash val="solid"/>
                       <a:round/>
@@ -14335,7 +14335,7 @@
                     </a:lnL>
                     <a:lnR w="6350" cap="flat" cmpd="sng" algn="ctr">
                       <a:solidFill>
-                        <a:srgbClr val="DDDDDD"/>
+                        <a:srgbClr val="D8DEE6"/>
                       </a:solidFill>
                       <a:prstDash val="solid"/>
                       <a:round/>
@@ -14344,7 +14344,7 @@
                     </a:lnR>
                     <a:lnT w="6350" cap="flat" cmpd="sng" algn="ctr">
                       <a:solidFill>
-                        <a:srgbClr val="DDDDDD"/>
+                        <a:srgbClr val="D8DEE6"/>
                       </a:solidFill>
                       <a:prstDash val="solid"/>
                       <a:round/>
@@ -14353,7 +14353,7 @@
                     </a:lnT>
                     <a:lnB w="6350" cap="flat" cmpd="sng" algn="ctr">
                       <a:solidFill>
-                        <a:srgbClr val="DDDDDD"/>
+                        <a:srgbClr val="D8DEE6"/>
                       </a:solidFill>
                       <a:prstDash val="solid"/>
                       <a:round/>
@@ -14361,7 +14361,7 @@
                       <a:tailEnd type="none" w="med" len="med"/>
                     </a:lnB>
                     <a:solidFill>
-                      <a:srgbClr val="F5F3EF"/>
+                      <a:srgbClr val="F2F5F9"/>
                     </a:solidFill>
                   </a:tcPr>
                 </a:tc>
@@ -14376,7 +14376,7 @@
                       <a:r>
                         <a:rPr lang="en-US" sz="900" b="1" dirty="0">
                           <a:solidFill>
-                            <a:srgbClr val="D4A017"/>
+                            <a:srgbClr val="C98A00"/>
                           </a:solidFill>
                           <a:latin typeface="Calibri" pitchFamily="34" charset="0"/>
                           <a:ea typeface="Calibri" pitchFamily="34" charset="-122"/>
@@ -14394,7 +14394,7 @@
                   <a:tcPr>
                     <a:lnL w="6350" cap="flat" cmpd="sng" algn="ctr">
                       <a:solidFill>
-                        <a:srgbClr val="DDDDDD"/>
+                        <a:srgbClr val="D8DEE6"/>
                       </a:solidFill>
                       <a:prstDash val="solid"/>
                       <a:round/>
@@ -14403,7 +14403,7 @@
                     </a:lnL>
                     <a:lnR w="6350" cap="flat" cmpd="sng" algn="ctr">
                       <a:solidFill>
-                        <a:srgbClr val="DDDDDD"/>
+                        <a:srgbClr val="D8DEE6"/>
                       </a:solidFill>
                       <a:prstDash val="solid"/>
                       <a:round/>
@@ -14412,7 +14412,7 @@
                     </a:lnR>
                     <a:lnT w="6350" cap="flat" cmpd="sng" algn="ctr">
                       <a:solidFill>
-                        <a:srgbClr val="DDDDDD"/>
+                        <a:srgbClr val="D8DEE6"/>
                       </a:solidFill>
                       <a:prstDash val="solid"/>
                       <a:round/>
@@ -14421,7 +14421,7 @@
                     </a:lnT>
                     <a:lnB w="6350" cap="flat" cmpd="sng" algn="ctr">
                       <a:solidFill>
-                        <a:srgbClr val="DDDDDD"/>
+                        <a:srgbClr val="D8DEE6"/>
                       </a:solidFill>
                       <a:prstDash val="solid"/>
                       <a:round/>
@@ -14429,7 +14429,7 @@
                       <a:tailEnd type="none" w="med" len="med"/>
                     </a:lnB>
                     <a:solidFill>
-                      <a:srgbClr val="F5F3EF"/>
+                      <a:srgbClr val="F2F5F9"/>
                     </a:solidFill>
                   </a:tcPr>
                 </a:tc>
@@ -14469,7 +14469,7 @@
                   <a:tcPr>
                     <a:lnL w="6350" cap="flat" cmpd="sng" algn="ctr">
                       <a:solidFill>
-                        <a:srgbClr val="DDDDDD"/>
+                        <a:srgbClr val="D8DEE6"/>
                       </a:solidFill>
                       <a:prstDash val="solid"/>
                       <a:round/>
@@ -14478,7 +14478,7 @@
                     </a:lnL>
                     <a:lnR w="6350" cap="flat" cmpd="sng" algn="ctr">
                       <a:solidFill>
-                        <a:srgbClr val="DDDDDD"/>
+                        <a:srgbClr val="D8DEE6"/>
                       </a:solidFill>
                       <a:prstDash val="solid"/>
                       <a:round/>
@@ -14487,7 +14487,7 @@
                     </a:lnR>
                     <a:lnT w="6350" cap="flat" cmpd="sng" algn="ctr">
                       <a:solidFill>
-                        <a:srgbClr val="DDDDDD"/>
+                        <a:srgbClr val="D8DEE6"/>
                       </a:solidFill>
                       <a:prstDash val="solid"/>
                       <a:round/>
@@ -14496,7 +14496,7 @@
                     </a:lnT>
                     <a:lnB w="6350" cap="flat" cmpd="sng" algn="ctr">
                       <a:solidFill>
-                        <a:srgbClr val="DDDDDD"/>
+                        <a:srgbClr val="D8DEE6"/>
                       </a:solidFill>
                       <a:prstDash val="solid"/>
                       <a:round/>
@@ -14537,7 +14537,7 @@
                   <a:tcPr>
                     <a:lnL w="6350" cap="flat" cmpd="sng" algn="ctr">
                       <a:solidFill>
-                        <a:srgbClr val="DDDDDD"/>
+                        <a:srgbClr val="D8DEE6"/>
                       </a:solidFill>
                       <a:prstDash val="solid"/>
                       <a:round/>
@@ -14546,7 +14546,7 @@
                     </a:lnL>
                     <a:lnR w="6350" cap="flat" cmpd="sng" algn="ctr">
                       <a:solidFill>
-                        <a:srgbClr val="DDDDDD"/>
+                        <a:srgbClr val="D8DEE6"/>
                       </a:solidFill>
                       <a:prstDash val="solid"/>
                       <a:round/>
@@ -14555,7 +14555,7 @@
                     </a:lnR>
                     <a:lnT w="6350" cap="flat" cmpd="sng" algn="ctr">
                       <a:solidFill>
-                        <a:srgbClr val="DDDDDD"/>
+                        <a:srgbClr val="D8DEE6"/>
                       </a:solidFill>
                       <a:prstDash val="solid"/>
                       <a:round/>
@@ -14564,7 +14564,7 @@
                     </a:lnT>
                     <a:lnB w="6350" cap="flat" cmpd="sng" algn="ctr">
                       <a:solidFill>
-                        <a:srgbClr val="DDDDDD"/>
+                        <a:srgbClr val="D8DEE6"/>
                       </a:solidFill>
                       <a:prstDash val="solid"/>
                       <a:round/>
@@ -14605,7 +14605,7 @@
                   <a:tcPr>
                     <a:lnL w="6350" cap="flat" cmpd="sng" algn="ctr">
                       <a:solidFill>
-                        <a:srgbClr val="DDDDDD"/>
+                        <a:srgbClr val="D8DEE6"/>
                       </a:solidFill>
                       <a:prstDash val="solid"/>
                       <a:round/>
@@ -14614,7 +14614,7 @@
                     </a:lnL>
                     <a:lnR w="6350" cap="flat" cmpd="sng" algn="ctr">
                       <a:solidFill>
-                        <a:srgbClr val="DDDDDD"/>
+                        <a:srgbClr val="D8DEE6"/>
                       </a:solidFill>
                       <a:prstDash val="solid"/>
                       <a:round/>
@@ -14623,7 +14623,7 @@
                     </a:lnR>
                     <a:lnT w="6350" cap="flat" cmpd="sng" algn="ctr">
                       <a:solidFill>
-                        <a:srgbClr val="DDDDDD"/>
+                        <a:srgbClr val="D8DEE6"/>
                       </a:solidFill>
                       <a:prstDash val="solid"/>
                       <a:round/>
@@ -14632,7 +14632,7 @@
                     </a:lnT>
                     <a:lnB w="6350" cap="flat" cmpd="sng" algn="ctr">
                       <a:solidFill>
-                        <a:srgbClr val="DDDDDD"/>
+                        <a:srgbClr val="D8DEE6"/>
                       </a:solidFill>
                       <a:prstDash val="solid"/>
                       <a:round/>
@@ -14673,7 +14673,7 @@
                   <a:tcPr>
                     <a:lnL w="6350" cap="flat" cmpd="sng" algn="ctr">
                       <a:solidFill>
-                        <a:srgbClr val="DDDDDD"/>
+                        <a:srgbClr val="D8DEE6"/>
                       </a:solidFill>
                       <a:prstDash val="solid"/>
                       <a:round/>
@@ -14682,7 +14682,7 @@
                     </a:lnL>
                     <a:lnR w="6350" cap="flat" cmpd="sng" algn="ctr">
                       <a:solidFill>
-                        <a:srgbClr val="DDDDDD"/>
+                        <a:srgbClr val="D8DEE6"/>
                       </a:solidFill>
                       <a:prstDash val="solid"/>
                       <a:round/>
@@ -14691,7 +14691,7 @@
                     </a:lnR>
                     <a:lnT w="6350" cap="flat" cmpd="sng" algn="ctr">
                       <a:solidFill>
-                        <a:srgbClr val="DDDDDD"/>
+                        <a:srgbClr val="D8DEE6"/>
                       </a:solidFill>
                       <a:prstDash val="solid"/>
                       <a:round/>
@@ -14700,7 +14700,7 @@
                     </a:lnT>
                     <a:lnB w="6350" cap="flat" cmpd="sng" algn="ctr">
                       <a:solidFill>
-                        <a:srgbClr val="DDDDDD"/>
+                        <a:srgbClr val="D8DEE6"/>
                       </a:solidFill>
                       <a:prstDash val="solid"/>
                       <a:round/>
@@ -14741,7 +14741,7 @@
                   <a:tcPr>
                     <a:lnL w="6350" cap="flat" cmpd="sng" algn="ctr">
                       <a:solidFill>
-                        <a:srgbClr val="DDDDDD"/>
+                        <a:srgbClr val="D8DEE6"/>
                       </a:solidFill>
                       <a:prstDash val="solid"/>
                       <a:round/>
@@ -14750,7 +14750,7 @@
                     </a:lnL>
                     <a:lnR w="6350" cap="flat" cmpd="sng" algn="ctr">
                       <a:solidFill>
-                        <a:srgbClr val="DDDDDD"/>
+                        <a:srgbClr val="D8DEE6"/>
                       </a:solidFill>
                       <a:prstDash val="solid"/>
                       <a:round/>
@@ -14759,7 +14759,7 @@
                     </a:lnR>
                     <a:lnT w="6350" cap="flat" cmpd="sng" algn="ctr">
                       <a:solidFill>
-                        <a:srgbClr val="DDDDDD"/>
+                        <a:srgbClr val="D8DEE6"/>
                       </a:solidFill>
                       <a:prstDash val="solid"/>
                       <a:round/>
@@ -14768,7 +14768,7 @@
                     </a:lnT>
                     <a:lnB w="6350" cap="flat" cmpd="sng" algn="ctr">
                       <a:solidFill>
-                        <a:srgbClr val="DDDDDD"/>
+                        <a:srgbClr val="D8DEE6"/>
                       </a:solidFill>
                       <a:prstDash val="solid"/>
                       <a:round/>
@@ -14809,7 +14809,7 @@
                   <a:tcPr>
                     <a:lnL w="6350" cap="flat" cmpd="sng" algn="ctr">
                       <a:solidFill>
-                        <a:srgbClr val="DDDDDD"/>
+                        <a:srgbClr val="D8DEE6"/>
                       </a:solidFill>
                       <a:prstDash val="solid"/>
                       <a:round/>
@@ -14818,7 +14818,7 @@
                     </a:lnL>
                     <a:lnR w="6350" cap="flat" cmpd="sng" algn="ctr">
                       <a:solidFill>
-                        <a:srgbClr val="DDDDDD"/>
+                        <a:srgbClr val="D8DEE6"/>
                       </a:solidFill>
                       <a:prstDash val="solid"/>
                       <a:round/>
@@ -14827,7 +14827,7 @@
                     </a:lnR>
                     <a:lnT w="6350" cap="flat" cmpd="sng" algn="ctr">
                       <a:solidFill>
-                        <a:srgbClr val="DDDDDD"/>
+                        <a:srgbClr val="D8DEE6"/>
                       </a:solidFill>
                       <a:prstDash val="solid"/>
                       <a:round/>
@@ -14836,7 +14836,7 @@
                     </a:lnT>
                     <a:lnB w="6350" cap="flat" cmpd="sng" algn="ctr">
                       <a:solidFill>
-                        <a:srgbClr val="DDDDDD"/>
+                        <a:srgbClr val="D8DEE6"/>
                       </a:solidFill>
                       <a:prstDash val="solid"/>
                       <a:round/>
@@ -14859,7 +14859,7 @@
                       <a:r>
                         <a:rPr lang="en-US" sz="900" b="1" dirty="0">
                           <a:solidFill>
-                            <a:srgbClr val="D4A017"/>
+                            <a:srgbClr val="C98A00"/>
                           </a:solidFill>
                           <a:latin typeface="Calibri" pitchFamily="34" charset="0"/>
                           <a:ea typeface="Calibri" pitchFamily="34" charset="-122"/>
@@ -14877,7 +14877,7 @@
                   <a:tcPr>
                     <a:lnL w="6350" cap="flat" cmpd="sng" algn="ctr">
                       <a:solidFill>
-                        <a:srgbClr val="DDDDDD"/>
+                        <a:srgbClr val="D8DEE6"/>
                       </a:solidFill>
                       <a:prstDash val="solid"/>
                       <a:round/>
@@ -14886,7 +14886,7 @@
                     </a:lnL>
                     <a:lnR w="6350" cap="flat" cmpd="sng" algn="ctr">
                       <a:solidFill>
-                        <a:srgbClr val="DDDDDD"/>
+                        <a:srgbClr val="D8DEE6"/>
                       </a:solidFill>
                       <a:prstDash val="solid"/>
                       <a:round/>
@@ -14895,7 +14895,7 @@
                     </a:lnR>
                     <a:lnT w="6350" cap="flat" cmpd="sng" algn="ctr">
                       <a:solidFill>
-                        <a:srgbClr val="DDDDDD"/>
+                        <a:srgbClr val="D8DEE6"/>
                       </a:solidFill>
                       <a:prstDash val="solid"/>
                       <a:round/>
@@ -14904,7 +14904,7 @@
                     </a:lnT>
                     <a:lnB w="6350" cap="flat" cmpd="sng" algn="ctr">
                       <a:solidFill>
-                        <a:srgbClr val="DDDDDD"/>
+                        <a:srgbClr val="D8DEE6"/>
                       </a:solidFill>
                       <a:prstDash val="solid"/>
                       <a:round/>
@@ -14952,7 +14952,7 @@
                   <a:tcPr>
                     <a:lnL w="6350" cap="flat" cmpd="sng" algn="ctr">
                       <a:solidFill>
-                        <a:srgbClr val="DDDDDD"/>
+                        <a:srgbClr val="D8DEE6"/>
                       </a:solidFill>
                       <a:prstDash val="solid"/>
                       <a:round/>
@@ -14961,7 +14961,7 @@
                     </a:lnL>
                     <a:lnR w="6350" cap="flat" cmpd="sng" algn="ctr">
                       <a:solidFill>
-                        <a:srgbClr val="DDDDDD"/>
+                        <a:srgbClr val="D8DEE6"/>
                       </a:solidFill>
                       <a:prstDash val="solid"/>
                       <a:round/>
@@ -14970,7 +14970,7 @@
                     </a:lnR>
                     <a:lnT w="6350" cap="flat" cmpd="sng" algn="ctr">
                       <a:solidFill>
-                        <a:srgbClr val="DDDDDD"/>
+                        <a:srgbClr val="D8DEE6"/>
                       </a:solidFill>
                       <a:prstDash val="solid"/>
                       <a:round/>
@@ -14979,7 +14979,7 @@
                     </a:lnT>
                     <a:lnB w="6350" cap="flat" cmpd="sng" algn="ctr">
                       <a:solidFill>
-                        <a:srgbClr val="DDDDDD"/>
+                        <a:srgbClr val="D8DEE6"/>
                       </a:solidFill>
                       <a:prstDash val="solid"/>
                       <a:round/>
@@ -14987,7 +14987,7 @@
                       <a:tailEnd type="none" w="med" len="med"/>
                     </a:lnB>
                     <a:solidFill>
-                      <a:srgbClr val="F5F3EF"/>
+                      <a:srgbClr val="F2F5F9"/>
                     </a:solidFill>
                   </a:tcPr>
                 </a:tc>
@@ -15020,7 +15020,7 @@
                   <a:tcPr>
                     <a:lnL w="6350" cap="flat" cmpd="sng" algn="ctr">
                       <a:solidFill>
-                        <a:srgbClr val="DDDDDD"/>
+                        <a:srgbClr val="D8DEE6"/>
                       </a:solidFill>
                       <a:prstDash val="solid"/>
                       <a:round/>
@@ -15029,7 +15029,7 @@
                     </a:lnL>
                     <a:lnR w="6350" cap="flat" cmpd="sng" algn="ctr">
                       <a:solidFill>
-                        <a:srgbClr val="DDDDDD"/>
+                        <a:srgbClr val="D8DEE6"/>
                       </a:solidFill>
                       <a:prstDash val="solid"/>
                       <a:round/>
@@ -15038,7 +15038,7 @@
                     </a:lnR>
                     <a:lnT w="6350" cap="flat" cmpd="sng" algn="ctr">
                       <a:solidFill>
-                        <a:srgbClr val="DDDDDD"/>
+                        <a:srgbClr val="D8DEE6"/>
                       </a:solidFill>
                       <a:prstDash val="solid"/>
                       <a:round/>
@@ -15047,7 +15047,7 @@
                     </a:lnT>
                     <a:lnB w="6350" cap="flat" cmpd="sng" algn="ctr">
                       <a:solidFill>
-                        <a:srgbClr val="DDDDDD"/>
+                        <a:srgbClr val="D8DEE6"/>
                       </a:solidFill>
                       <a:prstDash val="solid"/>
                       <a:round/>
@@ -15055,7 +15055,7 @@
                       <a:tailEnd type="none" w="med" len="med"/>
                     </a:lnB>
                     <a:solidFill>
-                      <a:srgbClr val="F5F3EF"/>
+                      <a:srgbClr val="F2F5F9"/>
                     </a:solidFill>
                   </a:tcPr>
                 </a:tc>
@@ -15088,7 +15088,7 @@
                   <a:tcPr>
                     <a:lnL w="6350" cap="flat" cmpd="sng" algn="ctr">
                       <a:solidFill>
-                        <a:srgbClr val="DDDDDD"/>
+                        <a:srgbClr val="D8DEE6"/>
                       </a:solidFill>
                       <a:prstDash val="solid"/>
                       <a:round/>
@@ -15097,7 +15097,7 @@
                     </a:lnL>
                     <a:lnR w="6350" cap="flat" cmpd="sng" algn="ctr">
                       <a:solidFill>
-                        <a:srgbClr val="DDDDDD"/>
+                        <a:srgbClr val="D8DEE6"/>
                       </a:solidFill>
                       <a:prstDash val="solid"/>
                       <a:round/>
@@ -15106,7 +15106,7 @@
                     </a:lnR>
                     <a:lnT w="6350" cap="flat" cmpd="sng" algn="ctr">
                       <a:solidFill>
-                        <a:srgbClr val="DDDDDD"/>
+                        <a:srgbClr val="D8DEE6"/>
                       </a:solidFill>
                       <a:prstDash val="solid"/>
                       <a:round/>
@@ -15115,7 +15115,7 @@
                     </a:lnT>
                     <a:lnB w="6350" cap="flat" cmpd="sng" algn="ctr">
                       <a:solidFill>
-                        <a:srgbClr val="DDDDDD"/>
+                        <a:srgbClr val="D8DEE6"/>
                       </a:solidFill>
                       <a:prstDash val="solid"/>
                       <a:round/>
@@ -15123,7 +15123,7 @@
                       <a:tailEnd type="none" w="med" len="med"/>
                     </a:lnB>
                     <a:solidFill>
-                      <a:srgbClr val="F5F3EF"/>
+                      <a:srgbClr val="F2F5F9"/>
                     </a:solidFill>
                   </a:tcPr>
                 </a:tc>
@@ -15156,7 +15156,7 @@
                   <a:tcPr>
                     <a:lnL w="6350" cap="flat" cmpd="sng" algn="ctr">
                       <a:solidFill>
-                        <a:srgbClr val="DDDDDD"/>
+                        <a:srgbClr val="D8DEE6"/>
                       </a:solidFill>
                       <a:prstDash val="solid"/>
                       <a:round/>
@@ -15165,7 +15165,7 @@
                     </a:lnL>
                     <a:lnR w="6350" cap="flat" cmpd="sng" algn="ctr">
                       <a:solidFill>
-                        <a:srgbClr val="DDDDDD"/>
+                        <a:srgbClr val="D8DEE6"/>
                       </a:solidFill>
                       <a:prstDash val="solid"/>
                       <a:round/>
@@ -15174,7 +15174,7 @@
                     </a:lnR>
                     <a:lnT w="6350" cap="flat" cmpd="sng" algn="ctr">
                       <a:solidFill>
-                        <a:srgbClr val="DDDDDD"/>
+                        <a:srgbClr val="D8DEE6"/>
                       </a:solidFill>
                       <a:prstDash val="solid"/>
                       <a:round/>
@@ -15183,7 +15183,7 @@
                     </a:lnT>
                     <a:lnB w="6350" cap="flat" cmpd="sng" algn="ctr">
                       <a:solidFill>
-                        <a:srgbClr val="DDDDDD"/>
+                        <a:srgbClr val="D8DEE6"/>
                       </a:solidFill>
                       <a:prstDash val="solid"/>
                       <a:round/>
@@ -15191,7 +15191,7 @@
                       <a:tailEnd type="none" w="med" len="med"/>
                     </a:lnB>
                     <a:solidFill>
-                      <a:srgbClr val="F5F3EF"/>
+                      <a:srgbClr val="F2F5F9"/>
                     </a:solidFill>
                   </a:tcPr>
                 </a:tc>
@@ -15224,7 +15224,7 @@
                   <a:tcPr>
                     <a:lnL w="6350" cap="flat" cmpd="sng" algn="ctr">
                       <a:solidFill>
-                        <a:srgbClr val="DDDDDD"/>
+                        <a:srgbClr val="D8DEE6"/>
                       </a:solidFill>
                       <a:prstDash val="solid"/>
                       <a:round/>
@@ -15233,7 +15233,7 @@
                     </a:lnL>
                     <a:lnR w="6350" cap="flat" cmpd="sng" algn="ctr">
                       <a:solidFill>
-                        <a:srgbClr val="DDDDDD"/>
+                        <a:srgbClr val="D8DEE6"/>
                       </a:solidFill>
                       <a:prstDash val="solid"/>
                       <a:round/>
@@ -15242,7 +15242,7 @@
                     </a:lnR>
                     <a:lnT w="6350" cap="flat" cmpd="sng" algn="ctr">
                       <a:solidFill>
-                        <a:srgbClr val="DDDDDD"/>
+                        <a:srgbClr val="D8DEE6"/>
                       </a:solidFill>
                       <a:prstDash val="solid"/>
                       <a:round/>
@@ -15251,7 +15251,7 @@
                     </a:lnT>
                     <a:lnB w="6350" cap="flat" cmpd="sng" algn="ctr">
                       <a:solidFill>
-                        <a:srgbClr val="DDDDDD"/>
+                        <a:srgbClr val="D8DEE6"/>
                       </a:solidFill>
                       <a:prstDash val="solid"/>
                       <a:round/>
@@ -15259,7 +15259,7 @@
                       <a:tailEnd type="none" w="med" len="med"/>
                     </a:lnB>
                     <a:solidFill>
-                      <a:srgbClr val="F5F3EF"/>
+                      <a:srgbClr val="F2F5F9"/>
                     </a:solidFill>
                   </a:tcPr>
                 </a:tc>
@@ -15292,7 +15292,7 @@
                   <a:tcPr>
                     <a:lnL w="6350" cap="flat" cmpd="sng" algn="ctr">
                       <a:solidFill>
-                        <a:srgbClr val="DDDDDD"/>
+                        <a:srgbClr val="D8DEE6"/>
                       </a:solidFill>
                       <a:prstDash val="solid"/>
                       <a:round/>
@@ -15301,7 +15301,7 @@
                     </a:lnL>
                     <a:lnR w="6350" cap="flat" cmpd="sng" algn="ctr">
                       <a:solidFill>
-                        <a:srgbClr val="DDDDDD"/>
+                        <a:srgbClr val="D8DEE6"/>
                       </a:solidFill>
                       <a:prstDash val="solid"/>
                       <a:round/>
@@ -15310,7 +15310,7 @@
                     </a:lnR>
                     <a:lnT w="6350" cap="flat" cmpd="sng" algn="ctr">
                       <a:solidFill>
-                        <a:srgbClr val="DDDDDD"/>
+                        <a:srgbClr val="D8DEE6"/>
                       </a:solidFill>
                       <a:prstDash val="solid"/>
                       <a:round/>
@@ -15319,7 +15319,7 @@
                     </a:lnT>
                     <a:lnB w="6350" cap="flat" cmpd="sng" algn="ctr">
                       <a:solidFill>
-                        <a:srgbClr val="DDDDDD"/>
+                        <a:srgbClr val="D8DEE6"/>
                       </a:solidFill>
                       <a:prstDash val="solid"/>
                       <a:round/>
@@ -15327,7 +15327,7 @@
                       <a:tailEnd type="none" w="med" len="med"/>
                     </a:lnB>
                     <a:solidFill>
-                      <a:srgbClr val="F5F3EF"/>
+                      <a:srgbClr val="F2F5F9"/>
                     </a:solidFill>
                   </a:tcPr>
                 </a:tc>
@@ -15342,7 +15342,7 @@
                       <a:r>
                         <a:rPr lang="en-US" sz="900" b="1" dirty="0">
                           <a:solidFill>
-                            <a:srgbClr val="D4A017"/>
+                            <a:srgbClr val="C98A00"/>
                           </a:solidFill>
                           <a:latin typeface="Calibri" pitchFamily="34" charset="0"/>
                           <a:ea typeface="Calibri" pitchFamily="34" charset="-122"/>
@@ -15360,7 +15360,7 @@
                   <a:tcPr>
                     <a:lnL w="6350" cap="flat" cmpd="sng" algn="ctr">
                       <a:solidFill>
-                        <a:srgbClr val="DDDDDD"/>
+                        <a:srgbClr val="D8DEE6"/>
                       </a:solidFill>
                       <a:prstDash val="solid"/>
                       <a:round/>
@@ -15369,7 +15369,7 @@
                     </a:lnL>
                     <a:lnR w="6350" cap="flat" cmpd="sng" algn="ctr">
                       <a:solidFill>
-                        <a:srgbClr val="DDDDDD"/>
+                        <a:srgbClr val="D8DEE6"/>
                       </a:solidFill>
                       <a:prstDash val="solid"/>
                       <a:round/>
@@ -15378,7 +15378,7 @@
                     </a:lnR>
                     <a:lnT w="6350" cap="flat" cmpd="sng" algn="ctr">
                       <a:solidFill>
-                        <a:srgbClr val="DDDDDD"/>
+                        <a:srgbClr val="D8DEE6"/>
                       </a:solidFill>
                       <a:prstDash val="solid"/>
                       <a:round/>
@@ -15387,7 +15387,7 @@
                     </a:lnT>
                     <a:lnB w="6350" cap="flat" cmpd="sng" algn="ctr">
                       <a:solidFill>
-                        <a:srgbClr val="DDDDDD"/>
+                        <a:srgbClr val="D8DEE6"/>
                       </a:solidFill>
                       <a:prstDash val="solid"/>
                       <a:round/>
@@ -15395,7 +15395,7 @@
                       <a:tailEnd type="none" w="med" len="med"/>
                     </a:lnB>
                     <a:solidFill>
-                      <a:srgbClr val="F5F3EF"/>
+                      <a:srgbClr val="F2F5F9"/>
                     </a:solidFill>
                   </a:tcPr>
                 </a:tc>
@@ -15435,7 +15435,7 @@
                   <a:tcPr>
                     <a:lnL w="6350" cap="flat" cmpd="sng" algn="ctr">
                       <a:solidFill>
-                        <a:srgbClr val="DDDDDD"/>
+                        <a:srgbClr val="D8DEE6"/>
                       </a:solidFill>
                       <a:prstDash val="solid"/>
                       <a:round/>
@@ -15444,7 +15444,7 @@
                     </a:lnL>
                     <a:lnR w="6350" cap="flat" cmpd="sng" algn="ctr">
                       <a:solidFill>
-                        <a:srgbClr val="DDDDDD"/>
+                        <a:srgbClr val="D8DEE6"/>
                       </a:solidFill>
                       <a:prstDash val="solid"/>
                       <a:round/>
@@ -15453,7 +15453,7 @@
                     </a:lnR>
                     <a:lnT w="6350" cap="flat" cmpd="sng" algn="ctr">
                       <a:solidFill>
-                        <a:srgbClr val="DDDDDD"/>
+                        <a:srgbClr val="D8DEE6"/>
                       </a:solidFill>
                       <a:prstDash val="solid"/>
                       <a:round/>
@@ -15462,7 +15462,7 @@
                     </a:lnT>
                     <a:lnB w="6350" cap="flat" cmpd="sng" algn="ctr">
                       <a:solidFill>
-                        <a:srgbClr val="DDDDDD"/>
+                        <a:srgbClr val="D8DEE6"/>
                       </a:solidFill>
                       <a:prstDash val="solid"/>
                       <a:round/>
@@ -15503,7 +15503,7 @@
                   <a:tcPr>
                     <a:lnL w="6350" cap="flat" cmpd="sng" algn="ctr">
                       <a:solidFill>
-                        <a:srgbClr val="DDDDDD"/>
+                        <a:srgbClr val="D8DEE6"/>
                       </a:solidFill>
                       <a:prstDash val="solid"/>
                       <a:round/>
@@ -15512,7 +15512,7 @@
                     </a:lnL>
                     <a:lnR w="6350" cap="flat" cmpd="sng" algn="ctr">
                       <a:solidFill>
-                        <a:srgbClr val="DDDDDD"/>
+                        <a:srgbClr val="D8DEE6"/>
                       </a:solidFill>
                       <a:prstDash val="solid"/>
                       <a:round/>
@@ -15521,7 +15521,7 @@
                     </a:lnR>
                     <a:lnT w="6350" cap="flat" cmpd="sng" algn="ctr">
                       <a:solidFill>
-                        <a:srgbClr val="DDDDDD"/>
+                        <a:srgbClr val="D8DEE6"/>
                       </a:solidFill>
                       <a:prstDash val="solid"/>
                       <a:round/>
@@ -15530,7 +15530,7 @@
                     </a:lnT>
                     <a:lnB w="6350" cap="flat" cmpd="sng" algn="ctr">
                       <a:solidFill>
-                        <a:srgbClr val="DDDDDD"/>
+                        <a:srgbClr val="D8DEE6"/>
                       </a:solidFill>
                       <a:prstDash val="solid"/>
                       <a:round/>
@@ -15571,7 +15571,7 @@
                   <a:tcPr>
                     <a:lnL w="6350" cap="flat" cmpd="sng" algn="ctr">
                       <a:solidFill>
-                        <a:srgbClr val="DDDDDD"/>
+                        <a:srgbClr val="D8DEE6"/>
                       </a:solidFill>
                       <a:prstDash val="solid"/>
                       <a:round/>
@@ -15580,7 +15580,7 @@
                     </a:lnL>
                     <a:lnR w="6350" cap="flat" cmpd="sng" algn="ctr">
                       <a:solidFill>
-                        <a:srgbClr val="DDDDDD"/>
+                        <a:srgbClr val="D8DEE6"/>
                       </a:solidFill>
                       <a:prstDash val="solid"/>
                       <a:round/>
@@ -15589,7 +15589,7 @@
                     </a:lnR>
                     <a:lnT w="6350" cap="flat" cmpd="sng" algn="ctr">
                       <a:solidFill>
-                        <a:srgbClr val="DDDDDD"/>
+                        <a:srgbClr val="D8DEE6"/>
                       </a:solidFill>
                       <a:prstDash val="solid"/>
                       <a:round/>
@@ -15598,7 +15598,7 @@
                     </a:lnT>
                     <a:lnB w="6350" cap="flat" cmpd="sng" algn="ctr">
                       <a:solidFill>
-                        <a:srgbClr val="DDDDDD"/>
+                        <a:srgbClr val="D8DEE6"/>
                       </a:solidFill>
                       <a:prstDash val="solid"/>
                       <a:round/>
@@ -15639,7 +15639,7 @@
                   <a:tcPr>
                     <a:lnL w="6350" cap="flat" cmpd="sng" algn="ctr">
                       <a:solidFill>
-                        <a:srgbClr val="DDDDDD"/>
+                        <a:srgbClr val="D8DEE6"/>
                       </a:solidFill>
                       <a:prstDash val="solid"/>
                       <a:round/>
@@ -15648,7 +15648,7 @@
                     </a:lnL>
                     <a:lnR w="6350" cap="flat" cmpd="sng" algn="ctr">
                       <a:solidFill>
-                        <a:srgbClr val="DDDDDD"/>
+                        <a:srgbClr val="D8DEE6"/>
                       </a:solidFill>
                       <a:prstDash val="solid"/>
                       <a:round/>
@@ -15657,7 +15657,7 @@
                     </a:lnR>
                     <a:lnT w="6350" cap="flat" cmpd="sng" algn="ctr">
                       <a:solidFill>
-                        <a:srgbClr val="DDDDDD"/>
+                        <a:srgbClr val="D8DEE6"/>
                       </a:solidFill>
                       <a:prstDash val="solid"/>
                       <a:round/>
@@ -15666,7 +15666,7 @@
                     </a:lnT>
                     <a:lnB w="6350" cap="flat" cmpd="sng" algn="ctr">
                       <a:solidFill>
-                        <a:srgbClr val="DDDDDD"/>
+                        <a:srgbClr val="D8DEE6"/>
                       </a:solidFill>
                       <a:prstDash val="solid"/>
                       <a:round/>
@@ -15707,7 +15707,7 @@
                   <a:tcPr>
                     <a:lnL w="6350" cap="flat" cmpd="sng" algn="ctr">
                       <a:solidFill>
-                        <a:srgbClr val="DDDDDD"/>
+                        <a:srgbClr val="D8DEE6"/>
                       </a:solidFill>
                       <a:prstDash val="solid"/>
                       <a:round/>
@@ -15716,7 +15716,7 @@
                     </a:lnL>
                     <a:lnR w="6350" cap="flat" cmpd="sng" algn="ctr">
                       <a:solidFill>
-                        <a:srgbClr val="DDDDDD"/>
+                        <a:srgbClr val="D8DEE6"/>
                       </a:solidFill>
                       <a:prstDash val="solid"/>
                       <a:round/>
@@ -15725,7 +15725,7 @@
                     </a:lnR>
                     <a:lnT w="6350" cap="flat" cmpd="sng" algn="ctr">
                       <a:solidFill>
-                        <a:srgbClr val="DDDDDD"/>
+                        <a:srgbClr val="D8DEE6"/>
                       </a:solidFill>
                       <a:prstDash val="solid"/>
                       <a:round/>
@@ -15734,7 +15734,7 @@
                     </a:lnT>
                     <a:lnB w="6350" cap="flat" cmpd="sng" algn="ctr">
                       <a:solidFill>
-                        <a:srgbClr val="DDDDDD"/>
+                        <a:srgbClr val="D8DEE6"/>
                       </a:solidFill>
                       <a:prstDash val="solid"/>
                       <a:round/>
@@ -15775,7 +15775,7 @@
                   <a:tcPr>
                     <a:lnL w="6350" cap="flat" cmpd="sng" algn="ctr">
                       <a:solidFill>
-                        <a:srgbClr val="DDDDDD"/>
+                        <a:srgbClr val="D8DEE6"/>
                       </a:solidFill>
                       <a:prstDash val="solid"/>
                       <a:round/>
@@ -15784,7 +15784,7 @@
                     </a:lnL>
                     <a:lnR w="6350" cap="flat" cmpd="sng" algn="ctr">
                       <a:solidFill>
-                        <a:srgbClr val="DDDDDD"/>
+                        <a:srgbClr val="D8DEE6"/>
                       </a:solidFill>
                       <a:prstDash val="solid"/>
                       <a:round/>
@@ -15793,7 +15793,7 @@
                     </a:lnR>
                     <a:lnT w="6350" cap="flat" cmpd="sng" algn="ctr">
                       <a:solidFill>
-                        <a:srgbClr val="DDDDDD"/>
+                        <a:srgbClr val="D8DEE6"/>
                       </a:solidFill>
                       <a:prstDash val="solid"/>
                       <a:round/>
@@ -15802,7 +15802,7 @@
                     </a:lnT>
                     <a:lnB w="6350" cap="flat" cmpd="sng" algn="ctr">
                       <a:solidFill>
-                        <a:srgbClr val="DDDDDD"/>
+                        <a:srgbClr val="D8DEE6"/>
                       </a:solidFill>
                       <a:prstDash val="solid"/>
                       <a:round/>
@@ -15825,7 +15825,7 @@
                       <a:r>
                         <a:rPr lang="en-US" sz="900" b="1" dirty="0">
                           <a:solidFill>
-                            <a:srgbClr val="D4A017"/>
+                            <a:srgbClr val="C98A00"/>
                           </a:solidFill>
                           <a:latin typeface="Calibri" pitchFamily="34" charset="0"/>
                           <a:ea typeface="Calibri" pitchFamily="34" charset="-122"/>
@@ -15843,7 +15843,7 @@
                   <a:tcPr>
                     <a:lnL w="6350" cap="flat" cmpd="sng" algn="ctr">
                       <a:solidFill>
-                        <a:srgbClr val="DDDDDD"/>
+                        <a:srgbClr val="D8DEE6"/>
                       </a:solidFill>
                       <a:prstDash val="solid"/>
                       <a:round/>
@@ -15852,7 +15852,7 @@
                     </a:lnL>
                     <a:lnR w="6350" cap="flat" cmpd="sng" algn="ctr">
                       <a:solidFill>
-                        <a:srgbClr val="DDDDDD"/>
+                        <a:srgbClr val="D8DEE6"/>
                       </a:solidFill>
                       <a:prstDash val="solid"/>
                       <a:round/>
@@ -15861,7 +15861,7 @@
                     </a:lnR>
                     <a:lnT w="6350" cap="flat" cmpd="sng" algn="ctr">
                       <a:solidFill>
-                        <a:srgbClr val="DDDDDD"/>
+                        <a:srgbClr val="D8DEE6"/>
                       </a:solidFill>
                       <a:prstDash val="solid"/>
                       <a:round/>
@@ -15870,7 +15870,7 @@
                     </a:lnT>
                     <a:lnB w="6350" cap="flat" cmpd="sng" algn="ctr">
                       <a:solidFill>
-                        <a:srgbClr val="DDDDDD"/>
+                        <a:srgbClr val="D8DEE6"/>
                       </a:solidFill>
                       <a:prstDash val="solid"/>
                       <a:round/>
@@ -15918,7 +15918,7 @@
                   <a:tcPr>
                     <a:lnL w="6350" cap="flat" cmpd="sng" algn="ctr">
                       <a:solidFill>
-                        <a:srgbClr val="DDDDDD"/>
+                        <a:srgbClr val="D8DEE6"/>
                       </a:solidFill>
                       <a:prstDash val="solid"/>
                       <a:round/>
@@ -15927,7 +15927,7 @@
                     </a:lnL>
                     <a:lnR w="6350" cap="flat" cmpd="sng" algn="ctr">
                       <a:solidFill>
-                        <a:srgbClr val="DDDDDD"/>
+                        <a:srgbClr val="D8DEE6"/>
                       </a:solidFill>
                       <a:prstDash val="solid"/>
                       <a:round/>
@@ -15936,7 +15936,7 @@
                     </a:lnR>
                     <a:lnT w="6350" cap="flat" cmpd="sng" algn="ctr">
                       <a:solidFill>
-                        <a:srgbClr val="DDDDDD"/>
+                        <a:srgbClr val="D8DEE6"/>
                       </a:solidFill>
                       <a:prstDash val="solid"/>
                       <a:round/>
@@ -15945,7 +15945,7 @@
                     </a:lnT>
                     <a:lnB w="6350" cap="flat" cmpd="sng" algn="ctr">
                       <a:solidFill>
-                        <a:srgbClr val="DDDDDD"/>
+                        <a:srgbClr val="D8DEE6"/>
                       </a:solidFill>
                       <a:prstDash val="solid"/>
                       <a:round/>
@@ -15953,7 +15953,7 @@
                       <a:tailEnd type="none" w="med" len="med"/>
                     </a:lnB>
                     <a:solidFill>
-                      <a:srgbClr val="F5F3EF"/>
+                      <a:srgbClr val="F2F5F9"/>
                     </a:solidFill>
                   </a:tcPr>
                 </a:tc>
@@ -15986,7 +15986,7 @@
                   <a:tcPr>
                     <a:lnL w="6350" cap="flat" cmpd="sng" algn="ctr">
                       <a:solidFill>
-                        <a:srgbClr val="DDDDDD"/>
+                        <a:srgbClr val="D8DEE6"/>
                       </a:solidFill>
                       <a:prstDash val="solid"/>
                       <a:round/>
@@ -15995,7 +15995,7 @@
                     </a:lnL>
                     <a:lnR w="6350" cap="flat" cmpd="sng" algn="ctr">
                       <a:solidFill>
-                        <a:srgbClr val="DDDDDD"/>
+                        <a:srgbClr val="D8DEE6"/>
                       </a:solidFill>
                       <a:prstDash val="solid"/>
                       <a:round/>
@@ -16004,7 +16004,7 @@
                     </a:lnR>
                     <a:lnT w="6350" cap="flat" cmpd="sng" algn="ctr">
                       <a:solidFill>
-                        <a:srgbClr val="DDDDDD"/>
+                        <a:srgbClr val="D8DEE6"/>
                       </a:solidFill>
                       <a:prstDash val="solid"/>
                       <a:round/>
@@ -16013,7 +16013,7 @@
                     </a:lnT>
                     <a:lnB w="6350" cap="flat" cmpd="sng" algn="ctr">
                       <a:solidFill>
-                        <a:srgbClr val="DDDDDD"/>
+                        <a:srgbClr val="D8DEE6"/>
                       </a:solidFill>
                       <a:prstDash val="solid"/>
                       <a:round/>
@@ -16021,7 +16021,7 @@
                       <a:tailEnd type="none" w="med" len="med"/>
                     </a:lnB>
                     <a:solidFill>
-                      <a:srgbClr val="F5F3EF"/>
+                      <a:srgbClr val="F2F5F9"/>
                     </a:solidFill>
                   </a:tcPr>
                 </a:tc>
@@ -16054,7 +16054,7 @@
                   <a:tcPr>
                     <a:lnL w="6350" cap="flat" cmpd="sng" algn="ctr">
                       <a:solidFill>
-                        <a:srgbClr val="DDDDDD"/>
+                        <a:srgbClr val="D8DEE6"/>
                       </a:solidFill>
                       <a:prstDash val="solid"/>
                       <a:round/>
@@ -16063,7 +16063,7 @@
                     </a:lnL>
                     <a:lnR w="6350" cap="flat" cmpd="sng" algn="ctr">
                       <a:solidFill>
-                        <a:srgbClr val="DDDDDD"/>
+                        <a:srgbClr val="D8DEE6"/>
                       </a:solidFill>
                       <a:prstDash val="solid"/>
                       <a:round/>
@@ -16072,7 +16072,7 @@
                     </a:lnR>
                     <a:lnT w="6350" cap="flat" cmpd="sng" algn="ctr">
                       <a:solidFill>
-                        <a:srgbClr val="DDDDDD"/>
+                        <a:srgbClr val="D8DEE6"/>
                       </a:solidFill>
                       <a:prstDash val="solid"/>
                       <a:round/>
@@ -16081,7 +16081,7 @@
                     </a:lnT>
                     <a:lnB w="6350" cap="flat" cmpd="sng" algn="ctr">
                       <a:solidFill>
-                        <a:srgbClr val="DDDDDD"/>
+                        <a:srgbClr val="D8DEE6"/>
                       </a:solidFill>
                       <a:prstDash val="solid"/>
                       <a:round/>
@@ -16089,7 +16089,7 @@
                       <a:tailEnd type="none" w="med" len="med"/>
                     </a:lnB>
                     <a:solidFill>
-                      <a:srgbClr val="F5F3EF"/>
+                      <a:srgbClr val="F2F5F9"/>
                     </a:solidFill>
                   </a:tcPr>
                 </a:tc>
@@ -16122,7 +16122,7 @@
                   <a:tcPr>
                     <a:lnL w="6350" cap="flat" cmpd="sng" algn="ctr">
                       <a:solidFill>
-                        <a:srgbClr val="DDDDDD"/>
+                        <a:srgbClr val="D8DEE6"/>
                       </a:solidFill>
                       <a:prstDash val="solid"/>
                       <a:round/>
@@ -16131,7 +16131,7 @@
                     </a:lnL>
                     <a:lnR w="6350" cap="flat" cmpd="sng" algn="ctr">
                       <a:solidFill>
-                        <a:srgbClr val="DDDDDD"/>
+                        <a:srgbClr val="D8DEE6"/>
                       </a:solidFill>
                       <a:prstDash val="solid"/>
                       <a:round/>
@@ -16140,7 +16140,7 @@
                     </a:lnR>
                     <a:lnT w="6350" cap="flat" cmpd="sng" algn="ctr">
                       <a:solidFill>
-                        <a:srgbClr val="DDDDDD"/>
+                        <a:srgbClr val="D8DEE6"/>
                       </a:solidFill>
                       <a:prstDash val="solid"/>
                       <a:round/>
@@ -16149,7 +16149,7 @@
                     </a:lnT>
                     <a:lnB w="6350" cap="flat" cmpd="sng" algn="ctr">
                       <a:solidFill>
-                        <a:srgbClr val="DDDDDD"/>
+                        <a:srgbClr val="D8DEE6"/>
                       </a:solidFill>
                       <a:prstDash val="solid"/>
                       <a:round/>
@@ -16157,7 +16157,7 @@
                       <a:tailEnd type="none" w="med" len="med"/>
                     </a:lnB>
                     <a:solidFill>
-                      <a:srgbClr val="F5F3EF"/>
+                      <a:srgbClr val="F2F5F9"/>
                     </a:solidFill>
                   </a:tcPr>
                 </a:tc>
@@ -16190,7 +16190,7 @@
                   <a:tcPr>
                     <a:lnL w="6350" cap="flat" cmpd="sng" algn="ctr">
                       <a:solidFill>
-                        <a:srgbClr val="DDDDDD"/>
+                        <a:srgbClr val="D8DEE6"/>
                       </a:solidFill>
                       <a:prstDash val="solid"/>
                       <a:round/>
@@ -16199,7 +16199,7 @@
                     </a:lnL>
                     <a:lnR w="6350" cap="flat" cmpd="sng" algn="ctr">
                       <a:solidFill>
-                        <a:srgbClr val="DDDDDD"/>
+                        <a:srgbClr val="D8DEE6"/>
                       </a:solidFill>
                       <a:prstDash val="solid"/>
                       <a:round/>
@@ -16208,7 +16208,7 @@
                     </a:lnR>
                     <a:lnT w="6350" cap="flat" cmpd="sng" algn="ctr">
                       <a:solidFill>
-                        <a:srgbClr val="DDDDDD"/>
+                        <a:srgbClr val="D8DEE6"/>
                       </a:solidFill>
                       <a:prstDash val="solid"/>
                       <a:round/>
@@ -16217,7 +16217,7 @@
                     </a:lnT>
                     <a:lnB w="6350" cap="flat" cmpd="sng" algn="ctr">
                       <a:solidFill>
-                        <a:srgbClr val="DDDDDD"/>
+                        <a:srgbClr val="D8DEE6"/>
                       </a:solidFill>
                       <a:prstDash val="solid"/>
                       <a:round/>
@@ -16225,7 +16225,7 @@
                       <a:tailEnd type="none" w="med" len="med"/>
                     </a:lnB>
                     <a:solidFill>
-                      <a:srgbClr val="F5F3EF"/>
+                      <a:srgbClr val="F2F5F9"/>
                     </a:solidFill>
                   </a:tcPr>
                 </a:tc>
@@ -16258,7 +16258,7 @@
                   <a:tcPr>
                     <a:lnL w="6350" cap="flat" cmpd="sng" algn="ctr">
                       <a:solidFill>
-                        <a:srgbClr val="DDDDDD"/>
+                        <a:srgbClr val="D8DEE6"/>
                       </a:solidFill>
                       <a:prstDash val="solid"/>
                       <a:round/>
@@ -16267,7 +16267,7 @@
                     </a:lnL>
                     <a:lnR w="6350" cap="flat" cmpd="sng" algn="ctr">
                       <a:solidFill>
-                        <a:srgbClr val="DDDDDD"/>
+                        <a:srgbClr val="D8DEE6"/>
                       </a:solidFill>
                       <a:prstDash val="solid"/>
                       <a:round/>
@@ -16276,7 +16276,7 @@
                     </a:lnR>
                     <a:lnT w="6350" cap="flat" cmpd="sng" algn="ctr">
                       <a:solidFill>
-                        <a:srgbClr val="DDDDDD"/>
+                        <a:srgbClr val="D8DEE6"/>
                       </a:solidFill>
                       <a:prstDash val="solid"/>
                       <a:round/>
@@ -16285,7 +16285,7 @@
                     </a:lnT>
                     <a:lnB w="6350" cap="flat" cmpd="sng" algn="ctr">
                       <a:solidFill>
-                        <a:srgbClr val="DDDDDD"/>
+                        <a:srgbClr val="D8DEE6"/>
                       </a:solidFill>
                       <a:prstDash val="solid"/>
                       <a:round/>
@@ -16293,7 +16293,7 @@
                       <a:tailEnd type="none" w="med" len="med"/>
                     </a:lnB>
                     <a:solidFill>
-                      <a:srgbClr val="F5F3EF"/>
+                      <a:srgbClr val="F2F5F9"/>
                     </a:solidFill>
                   </a:tcPr>
                 </a:tc>
@@ -16308,7 +16308,7 @@
                       <a:r>
                         <a:rPr lang="en-US" sz="900" b="1" dirty="0">
                           <a:solidFill>
-                            <a:srgbClr val="C0392B"/>
+                            <a:srgbClr val="D9472B"/>
                           </a:solidFill>
                           <a:latin typeface="Calibri" pitchFamily="34" charset="0"/>
                           <a:ea typeface="Calibri" pitchFamily="34" charset="-122"/>
@@ -16326,7 +16326,7 @@
                   <a:tcPr>
                     <a:lnL w="6350" cap="flat" cmpd="sng" algn="ctr">
                       <a:solidFill>
-                        <a:srgbClr val="DDDDDD"/>
+                        <a:srgbClr val="D8DEE6"/>
                       </a:solidFill>
                       <a:prstDash val="solid"/>
                       <a:round/>
@@ -16335,7 +16335,7 @@
                     </a:lnL>
                     <a:lnR w="6350" cap="flat" cmpd="sng" algn="ctr">
                       <a:solidFill>
-                        <a:srgbClr val="DDDDDD"/>
+                        <a:srgbClr val="D8DEE6"/>
                       </a:solidFill>
                       <a:prstDash val="solid"/>
                       <a:round/>
@@ -16344,7 +16344,7 @@
                     </a:lnR>
                     <a:lnT w="6350" cap="flat" cmpd="sng" algn="ctr">
                       <a:solidFill>
-                        <a:srgbClr val="DDDDDD"/>
+                        <a:srgbClr val="D8DEE6"/>
                       </a:solidFill>
                       <a:prstDash val="solid"/>
                       <a:round/>
@@ -16353,7 +16353,7 @@
                     </a:lnT>
                     <a:lnB w="6350" cap="flat" cmpd="sng" algn="ctr">
                       <a:solidFill>
-                        <a:srgbClr val="DDDDDD"/>
+                        <a:srgbClr val="D8DEE6"/>
                       </a:solidFill>
                       <a:prstDash val="solid"/>
                       <a:round/>
@@ -16361,7 +16361,7 @@
                       <a:tailEnd type="none" w="med" len="med"/>
                     </a:lnB>
                     <a:solidFill>
-                      <a:srgbClr val="F5F3EF"/>
+                      <a:srgbClr val="F2F5F9"/>
                     </a:solidFill>
                   </a:tcPr>
                 </a:tc>
@@ -16401,7 +16401,7 @@
                   <a:tcPr>
                     <a:lnL w="6350" cap="flat" cmpd="sng" algn="ctr">
                       <a:solidFill>
-                        <a:srgbClr val="DDDDDD"/>
+                        <a:srgbClr val="D8DEE6"/>
                       </a:solidFill>
                       <a:prstDash val="solid"/>
                       <a:round/>
@@ -16410,7 +16410,7 @@
                     </a:lnL>
                     <a:lnR w="6350" cap="flat" cmpd="sng" algn="ctr">
                       <a:solidFill>
-                        <a:srgbClr val="DDDDDD"/>
+                        <a:srgbClr val="D8DEE6"/>
                       </a:solidFill>
                       <a:prstDash val="solid"/>
                       <a:round/>
@@ -16419,7 +16419,7 @@
                     </a:lnR>
                     <a:lnT w="6350" cap="flat" cmpd="sng" algn="ctr">
                       <a:solidFill>
-                        <a:srgbClr val="DDDDDD"/>
+                        <a:srgbClr val="D8DEE6"/>
                       </a:solidFill>
                       <a:prstDash val="solid"/>
                       <a:round/>
@@ -16428,7 +16428,7 @@
                     </a:lnT>
                     <a:lnB w="6350" cap="flat" cmpd="sng" algn="ctr">
                       <a:solidFill>
-                        <a:srgbClr val="DDDDDD"/>
+                        <a:srgbClr val="D8DEE6"/>
                       </a:solidFill>
                       <a:prstDash val="solid"/>
                       <a:round/>
@@ -16469,7 +16469,7 @@
                   <a:tcPr>
                     <a:lnL w="6350" cap="flat" cmpd="sng" algn="ctr">
                       <a:solidFill>
-                        <a:srgbClr val="DDDDDD"/>
+                        <a:srgbClr val="D8DEE6"/>
                       </a:solidFill>
                       <a:prstDash val="solid"/>
                       <a:round/>
@@ -16478,7 +16478,7 @@
                     </a:lnL>
                     <a:lnR w="6350" cap="flat" cmpd="sng" algn="ctr">
                       <a:solidFill>
-                        <a:srgbClr val="DDDDDD"/>
+                        <a:srgbClr val="D8DEE6"/>
                       </a:solidFill>
                       <a:prstDash val="solid"/>
                       <a:round/>
@@ -16487,7 +16487,7 @@
                     </a:lnR>
                     <a:lnT w="6350" cap="flat" cmpd="sng" algn="ctr">
                       <a:solidFill>
-                        <a:srgbClr val="DDDDDD"/>
+                        <a:srgbClr val="D8DEE6"/>
                       </a:solidFill>
                       <a:prstDash val="solid"/>
                       <a:round/>
@@ -16496,7 +16496,7 @@
                     </a:lnT>
                     <a:lnB w="6350" cap="flat" cmpd="sng" algn="ctr">
                       <a:solidFill>
-                        <a:srgbClr val="DDDDDD"/>
+                        <a:srgbClr val="D8DEE6"/>
                       </a:solidFill>
                       <a:prstDash val="solid"/>
                       <a:round/>
@@ -16537,7 +16537,7 @@
                   <a:tcPr>
                     <a:lnL w="6350" cap="flat" cmpd="sng" algn="ctr">
                       <a:solidFill>
-                        <a:srgbClr val="DDDDDD"/>
+                        <a:srgbClr val="D8DEE6"/>
                       </a:solidFill>
                       <a:prstDash val="solid"/>
                       <a:round/>
@@ -16546,7 +16546,7 @@
                     </a:lnL>
                     <a:lnR w="6350" cap="flat" cmpd="sng" algn="ctr">
                       <a:solidFill>
-                        <a:srgbClr val="DDDDDD"/>
+                        <a:srgbClr val="D8DEE6"/>
                       </a:solidFill>
                       <a:prstDash val="solid"/>
                       <a:round/>
@@ -16555,7 +16555,7 @@
                     </a:lnR>
                     <a:lnT w="6350" cap="flat" cmpd="sng" algn="ctr">
                       <a:solidFill>
-                        <a:srgbClr val="DDDDDD"/>
+                        <a:srgbClr val="D8DEE6"/>
                       </a:solidFill>
                       <a:prstDash val="solid"/>
                       <a:round/>
@@ -16564,7 +16564,7 @@
                     </a:lnT>
                     <a:lnB w="6350" cap="flat" cmpd="sng" algn="ctr">
                       <a:solidFill>
-                        <a:srgbClr val="DDDDDD"/>
+                        <a:srgbClr val="D8DEE6"/>
                       </a:solidFill>
                       <a:prstDash val="solid"/>
                       <a:round/>
@@ -16605,7 +16605,7 @@
                   <a:tcPr>
                     <a:lnL w="6350" cap="flat" cmpd="sng" algn="ctr">
                       <a:solidFill>
-                        <a:srgbClr val="DDDDDD"/>
+                        <a:srgbClr val="D8DEE6"/>
                       </a:solidFill>
                       <a:prstDash val="solid"/>
                       <a:round/>
@@ -16614,7 +16614,7 @@
                     </a:lnL>
                     <a:lnR w="6350" cap="flat" cmpd="sng" algn="ctr">
                       <a:solidFill>
-                        <a:srgbClr val="DDDDDD"/>
+                        <a:srgbClr val="D8DEE6"/>
                       </a:solidFill>
                       <a:prstDash val="solid"/>
                       <a:round/>
@@ -16623,7 +16623,7 @@
                     </a:lnR>
                     <a:lnT w="6350" cap="flat" cmpd="sng" algn="ctr">
                       <a:solidFill>
-                        <a:srgbClr val="DDDDDD"/>
+                        <a:srgbClr val="D8DEE6"/>
                       </a:solidFill>
                       <a:prstDash val="solid"/>
                       <a:round/>
@@ -16632,7 +16632,7 @@
                     </a:lnT>
                     <a:lnB w="6350" cap="flat" cmpd="sng" algn="ctr">
                       <a:solidFill>
-                        <a:srgbClr val="DDDDDD"/>
+                        <a:srgbClr val="D8DEE6"/>
                       </a:solidFill>
                       <a:prstDash val="solid"/>
                       <a:round/>
@@ -16673,7 +16673,7 @@
                   <a:tcPr>
                     <a:lnL w="6350" cap="flat" cmpd="sng" algn="ctr">
                       <a:solidFill>
-                        <a:srgbClr val="DDDDDD"/>
+                        <a:srgbClr val="D8DEE6"/>
                       </a:solidFill>
                       <a:prstDash val="solid"/>
                       <a:round/>
@@ -16682,7 +16682,7 @@
                     </a:lnL>
                     <a:lnR w="6350" cap="flat" cmpd="sng" algn="ctr">
                       <a:solidFill>
-                        <a:srgbClr val="DDDDDD"/>
+                        <a:srgbClr val="D8DEE6"/>
                       </a:solidFill>
                       <a:prstDash val="solid"/>
                       <a:round/>
@@ -16691,7 +16691,7 @@
                     </a:lnR>
                     <a:lnT w="6350" cap="flat" cmpd="sng" algn="ctr">
                       <a:solidFill>
-                        <a:srgbClr val="DDDDDD"/>
+                        <a:srgbClr val="D8DEE6"/>
                       </a:solidFill>
                       <a:prstDash val="solid"/>
                       <a:round/>
@@ -16700,7 +16700,7 @@
                     </a:lnT>
                     <a:lnB w="6350" cap="flat" cmpd="sng" algn="ctr">
                       <a:solidFill>
-                        <a:srgbClr val="DDDDDD"/>
+                        <a:srgbClr val="D8DEE6"/>
                       </a:solidFill>
                       <a:prstDash val="solid"/>
                       <a:round/>
@@ -16741,7 +16741,7 @@
                   <a:tcPr>
                     <a:lnL w="6350" cap="flat" cmpd="sng" algn="ctr">
                       <a:solidFill>
-                        <a:srgbClr val="DDDDDD"/>
+                        <a:srgbClr val="D8DEE6"/>
                       </a:solidFill>
                       <a:prstDash val="solid"/>
                       <a:round/>
@@ -16750,7 +16750,7 @@
                     </a:lnL>
                     <a:lnR w="6350" cap="flat" cmpd="sng" algn="ctr">
                       <a:solidFill>
-                        <a:srgbClr val="DDDDDD"/>
+                        <a:srgbClr val="D8DEE6"/>
                       </a:solidFill>
                       <a:prstDash val="solid"/>
                       <a:round/>
@@ -16759,7 +16759,7 @@
                     </a:lnR>
                     <a:lnT w="6350" cap="flat" cmpd="sng" algn="ctr">
                       <a:solidFill>
-                        <a:srgbClr val="DDDDDD"/>
+                        <a:srgbClr val="D8DEE6"/>
                       </a:solidFill>
                       <a:prstDash val="solid"/>
                       <a:round/>
@@ -16768,7 +16768,7 @@
                     </a:lnT>
                     <a:lnB w="6350" cap="flat" cmpd="sng" algn="ctr">
                       <a:solidFill>
-                        <a:srgbClr val="DDDDDD"/>
+                        <a:srgbClr val="D8DEE6"/>
                       </a:solidFill>
                       <a:prstDash val="solid"/>
                       <a:round/>
@@ -16791,7 +16791,7 @@
                       <a:r>
                         <a:rPr lang="en-US" sz="900" b="1" dirty="0">
                           <a:solidFill>
-                            <a:srgbClr val="C0392B"/>
+                            <a:srgbClr val="D9472B"/>
                           </a:solidFill>
                           <a:latin typeface="Calibri" pitchFamily="34" charset="0"/>
                           <a:ea typeface="Calibri" pitchFamily="34" charset="-122"/>
@@ -16809,7 +16809,7 @@
                   <a:tcPr>
                     <a:lnL w="6350" cap="flat" cmpd="sng" algn="ctr">
                       <a:solidFill>
-                        <a:srgbClr val="DDDDDD"/>
+                        <a:srgbClr val="D8DEE6"/>
                       </a:solidFill>
                       <a:prstDash val="solid"/>
                       <a:round/>
@@ -16818,7 +16818,7 @@
                     </a:lnL>
                     <a:lnR w="6350" cap="flat" cmpd="sng" algn="ctr">
                       <a:solidFill>
-                        <a:srgbClr val="DDDDDD"/>
+                        <a:srgbClr val="D8DEE6"/>
                       </a:solidFill>
                       <a:prstDash val="solid"/>
                       <a:round/>
@@ -16827,7 +16827,7 @@
                     </a:lnR>
                     <a:lnT w="6350" cap="flat" cmpd="sng" algn="ctr">
                       <a:solidFill>
-                        <a:srgbClr val="DDDDDD"/>
+                        <a:srgbClr val="D8DEE6"/>
                       </a:solidFill>
                       <a:prstDash val="solid"/>
                       <a:round/>
@@ -16836,7 +16836,7 @@
                     </a:lnT>
                     <a:lnB w="6350" cap="flat" cmpd="sng" algn="ctr">
                       <a:solidFill>
-                        <a:srgbClr val="DDDDDD"/>
+                        <a:srgbClr val="D8DEE6"/>
                       </a:solidFill>
                       <a:prstDash val="solid"/>
                       <a:round/>
@@ -16908,7 +16908,7 @@
     <p:bg>
       <p:bgPr>
         <a:solidFill>
-          <a:srgbClr val="FAF8F5"/>
+          <a:srgbClr val="FFFFFF"/>
         </a:solidFill>
         <a:effectLst/>
       </p:bgPr>
@@ -16942,7 +16942,7 @@
             <a:avLst/>
           </a:prstGeom>
           <a:solidFill>
-            <a:srgbClr val="3B2F2F"/>
+            <a:srgbClr val="1B2A41"/>
           </a:solidFill>
           <a:ln/>
         </p:spPr>
@@ -16983,9 +16983,9 @@
                 <a:solidFill>
                   <a:srgbClr val="FFFFFF"/>
                 </a:solidFill>
-                <a:latin typeface="Georgia" pitchFamily="34" charset="0"/>
-                <a:ea typeface="Georgia" pitchFamily="34" charset="-122"/>
-                <a:cs typeface="Georgia" pitchFamily="34" charset="-120"/>
+                <a:latin typeface="Calibri" pitchFamily="34" charset="0"/>
+                <a:ea typeface="Calibri" pitchFamily="34" charset="-122"/>
+                <a:cs typeface="Calibri" pitchFamily="34" charset="-120"/>
               </a:rPr>
               <a:t>3 Menu Optimizations to Test</a:t>
             </a:r>
@@ -17042,7 +17042,7 @@
             <a:avLst/>
           </a:prstGeom>
           <a:solidFill>
-            <a:srgbClr val="B85042"/>
+            <a:srgbClr val="2F6690"/>
           </a:solidFill>
           <a:ln/>
         </p:spPr>
@@ -17083,9 +17083,9 @@
                 <a:solidFill>
                   <a:srgbClr val="FFFFFF"/>
                 </a:solidFill>
-                <a:latin typeface="Georgia" pitchFamily="34" charset="0"/>
-                <a:ea typeface="Georgia" pitchFamily="34" charset="-122"/>
-                <a:cs typeface="Georgia" pitchFamily="34" charset="-120"/>
+                <a:latin typeface="Calibri" pitchFamily="34" charset="0"/>
+                <a:ea typeface="Calibri" pitchFamily="34" charset="-122"/>
+                <a:cs typeface="Calibri" pitchFamily="34" charset="-120"/>
               </a:rPr>
               <a:t>1</a:t>
             </a:r>
@@ -17120,11 +17120,11 @@
             <a:r>
               <a:rPr lang="en-US" sz="1400" b="1" dirty="0">
                 <a:solidFill>
-                  <a:srgbClr val="2D2D2D"/>
+                  <a:srgbClr val="1F2A37"/>
                 </a:solidFill>
-                <a:latin typeface="Georgia" pitchFamily="34" charset="0"/>
-                <a:ea typeface="Georgia" pitchFamily="34" charset="-122"/>
-                <a:cs typeface="Georgia" pitchFamily="34" charset="-120"/>
+                <a:latin typeface="Calibri" pitchFamily="34" charset="0"/>
+                <a:ea typeface="Calibri" pitchFamily="34" charset="-122"/>
+                <a:cs typeface="Calibri" pitchFamily="34" charset="-120"/>
               </a:rPr>
               <a:t>Add Samosa &amp; Mandazi upsell at checkout</a:t>
             </a:r>
@@ -17159,7 +17159,7 @@
             <a:r>
               <a:rPr lang="en-US" sz="1100" dirty="0">
                 <a:solidFill>
-                  <a:srgbClr val="7A7A7A"/>
+                  <a:srgbClr val="5F6B7A"/>
                 </a:solidFill>
                 <a:latin typeface="Calibri" pitchFamily="34" charset="0"/>
                 <a:ea typeface="Calibri" pitchFamily="34" charset="-122"/>
@@ -17220,7 +17220,7 @@
             <a:avLst/>
           </a:prstGeom>
           <a:solidFill>
-            <a:srgbClr val="B85042"/>
+            <a:srgbClr val="2F6690"/>
           </a:solidFill>
           <a:ln/>
         </p:spPr>
@@ -17261,9 +17261,9 @@
                 <a:solidFill>
                   <a:srgbClr val="FFFFFF"/>
                 </a:solidFill>
-                <a:latin typeface="Georgia" pitchFamily="34" charset="0"/>
-                <a:ea typeface="Georgia" pitchFamily="34" charset="-122"/>
-                <a:cs typeface="Georgia" pitchFamily="34" charset="-120"/>
+                <a:latin typeface="Calibri" pitchFamily="34" charset="0"/>
+                <a:ea typeface="Calibri" pitchFamily="34" charset="-122"/>
+                <a:cs typeface="Calibri" pitchFamily="34" charset="-120"/>
               </a:rPr>
               <a:t>2</a:t>
             </a:r>
@@ -17298,11 +17298,11 @@
             <a:r>
               <a:rPr lang="en-US" sz="1400" b="1" dirty="0">
                 <a:solidFill>
-                  <a:srgbClr val="2D2D2D"/>
+                  <a:srgbClr val="1F2A37"/>
                 </a:solidFill>
-                <a:latin typeface="Georgia" pitchFamily="34" charset="0"/>
-                <a:ea typeface="Georgia" pitchFamily="34" charset="-122"/>
-                <a:cs typeface="Georgia" pitchFamily="34" charset="-120"/>
+                <a:latin typeface="Calibri" pitchFamily="34" charset="0"/>
+                <a:ea typeface="Calibri" pitchFamily="34" charset="-122"/>
+                <a:cs typeface="Calibri" pitchFamily="34" charset="-120"/>
               </a:rPr>
               <a:t>Launch Nyama Choma Platter meal deal in Eastleigh</a:t>
             </a:r>
@@ -17337,7 +17337,7 @@
             <a:r>
               <a:rPr lang="en-US" sz="1100" dirty="0">
                 <a:solidFill>
-                  <a:srgbClr val="7A7A7A"/>
+                  <a:srgbClr val="5F6B7A"/>
                 </a:solidFill>
                 <a:latin typeface="Calibri" pitchFamily="34" charset="0"/>
                 <a:ea typeface="Calibri" pitchFamily="34" charset="-122"/>
@@ -17398,7 +17398,7 @@
             <a:avLst/>
           </a:prstGeom>
           <a:solidFill>
-            <a:srgbClr val="B85042"/>
+            <a:srgbClr val="2F6690"/>
           </a:solidFill>
           <a:ln/>
         </p:spPr>
@@ -17439,9 +17439,9 @@
                 <a:solidFill>
                   <a:srgbClr val="FFFFFF"/>
                 </a:solidFill>
-                <a:latin typeface="Georgia" pitchFamily="34" charset="0"/>
-                <a:ea typeface="Georgia" pitchFamily="34" charset="-122"/>
-                <a:cs typeface="Georgia" pitchFamily="34" charset="-120"/>
+                <a:latin typeface="Calibri" pitchFamily="34" charset="0"/>
+                <a:ea typeface="Calibri" pitchFamily="34" charset="-122"/>
+                <a:cs typeface="Calibri" pitchFamily="34" charset="-120"/>
               </a:rPr>
               <a:t>3</a:t>
             </a:r>
@@ -17476,11 +17476,11 @@
             <a:r>
               <a:rPr lang="en-US" sz="1400" b="1" dirty="0">
                 <a:solidFill>
-                  <a:srgbClr val="2D2D2D"/>
+                  <a:srgbClr val="1F2A37"/>
                 </a:solidFill>
-                <a:latin typeface="Georgia" pitchFamily="34" charset="0"/>
-                <a:ea typeface="Georgia" pitchFamily="34" charset="-122"/>
-                <a:cs typeface="Georgia" pitchFamily="34" charset="-120"/>
+                <a:latin typeface="Calibri" pitchFamily="34" charset="0"/>
+                <a:ea typeface="Calibri" pitchFamily="34" charset="-122"/>
+                <a:cs typeface="Calibri" pitchFamily="34" charset="-120"/>
               </a:rPr>
               <a:t>Test removing Matoke &amp; Beef and Githeri Special</a:t>
             </a:r>
@@ -17515,7 +17515,7 @@
             <a:r>
               <a:rPr lang="en-US" sz="1100" dirty="0">
                 <a:solidFill>
-                  <a:srgbClr val="7A7A7A"/>
+                  <a:srgbClr val="5F6B7A"/>
                 </a:solidFill>
                 <a:latin typeface="Calibri" pitchFamily="34" charset="0"/>
                 <a:ea typeface="Calibri" pitchFamily="34" charset="-122"/>
@@ -17538,7 +17538,7 @@
 <file path=ppt/theme/theme1.xml><?xml version="1.0" encoding="utf-8"?>
 <a:theme xmlns:a="http://schemas.openxmlformats.org/drawingml/2006/main" name="Office Theme">
   <a:themeElements>
-    <a:clrScheme name="Office">
+    <a:clrScheme name="Boardroom Navy">
       <a:dk1>
         <a:sysClr val="windowText" lastClr="000000"/>
       </a:dk1>
@@ -17546,28 +17546,28 @@
         <a:sysClr val="window" lastClr="FFFFFF"/>
       </a:lt1>
       <a:dk2>
-        <a:srgbClr val="44546A"/>
+        <a:srgbClr val="1B2A41"/>
       </a:dk2>
       <a:lt2>
-        <a:srgbClr val="E7E6E6"/>
+        <a:srgbClr val="F2F5F9"/>
       </a:lt2>
       <a:accent1>
-        <a:srgbClr val="4472C4"/>
+        <a:srgbClr val="1B2A41"/>
       </a:accent1>
       <a:accent2>
-        <a:srgbClr val="ED7D31"/>
+        <a:srgbClr val="2F6690"/>
       </a:accent2>
       <a:accent3>
-        <a:srgbClr val="A5A5A5"/>
+        <a:srgbClr val="0F9D8A"/>
       </a:accent3>
       <a:accent4>
-        <a:srgbClr val="FFC000"/>
+        <a:srgbClr val="D9472B"/>
       </a:accent4>
       <a:accent5>
-        <a:srgbClr val="5B9BD5"/>
+        <a:srgbClr val="5F6B7A"/>
       </a:accent5>
       <a:accent6>
-        <a:srgbClr val="70AD47"/>
+        <a:srgbClr val="C98A00"/>
       </a:accent6>
       <a:hlink>
         <a:srgbClr val="0563C1"/>
@@ -17578,7 +17578,7 @@
     </a:clrScheme>
     <a:fontScheme name="Office">
       <a:majorFont>
-        <a:latin typeface="Calibri Light" panose="020F0302020204030204"/>
+        <a:latin typeface="Calibri" panose="020F0302020204030204"/>
         <a:ea typeface=""/>
         <a:cs typeface=""/>
         <a:font script="Jpan" typeface="游ゴシック Light"/>
